--- a/slides/pptx/week-08.pptx
+++ b/slides/pptx/week-08.pptx
@@ -12,9 +12,10 @@
     <p:sldId id="260" r:id="rId6"/>
     <p:sldId id="261" r:id="rId7"/>
     <p:sldId id="262" r:id="rId8"/>
+    <p:sldId id="263" r:id="rId9"/>
   </p:sldIdLst>
   <p:notesMasterIdLst>
-    <p:notesMasterId r:id="rId9"/>
+    <p:notesMasterId r:id="rId10"/>
   </p:notesMasterIdLst>
   <p:sldSz cx="12191695" cy="6858000"/>
   <p:notesSz cx="6858000" cy="12191695"/>
@@ -1078,6 +1079,94 @@
 </p:notes>
 </file>
 
+<file path=ppt/notesSlides/notesSlide8.xml><?xml version="1.0" encoding="utf-8"?>
+<p:notes xmlns:a="http://schemas.openxmlformats.org/drawingml/2006/main" xmlns:r="http://schemas.openxmlformats.org/officeDocument/2006/relationships" xmlns:p="http://schemas.openxmlformats.org/presentationml/2006/main">
+  <p:cSld>
+    <p:spTree>
+      <p:nvGrpSpPr>
+        <p:cNvPr id="1" name=""/>
+        <p:cNvGrpSpPr/>
+        <p:nvPr/>
+      </p:nvGrpSpPr>
+      <p:grpSpPr>
+        <a:xfrm>
+          <a:off x="0" y="0"/>
+          <a:ext cx="0" cy="0"/>
+          <a:chOff x="0" y="0"/>
+          <a:chExt cx="0" cy="0"/>
+        </a:xfrm>
+      </p:grpSpPr>
+      <p:sp>
+        <p:nvSpPr>
+          <p:cNvPr id="2" name="Slide Image Placeholder 1"/>
+          <p:cNvSpPr>
+            <a:spLocks noGrp="1" noRot="1" noChangeAspect="1"/>
+          </p:cNvSpPr>
+          <p:nvPr>
+            <p:ph type="sldImg"/>
+          </p:nvPr>
+        </p:nvSpPr>
+        <p:spPr/>
+      </p:sp>
+      <p:sp>
+        <p:nvSpPr>
+          <p:cNvPr id="3" name="Notes Placeholder 2"/>
+          <p:cNvSpPr>
+            <a:spLocks noGrp="1"/>
+          </p:cNvSpPr>
+          <p:nvPr>
+            <p:ph type="body" idx="1"/>
+          </p:nvPr>
+        </p:nvSpPr>
+        <p:spPr/>
+        <p:txBody>
+          <a:bodyPr/>
+          <a:lstStyle/>
+          <a:p>
+            <a:r>
+              <a:rPr lang="en-US" dirty="0"/>
+              <a:t/>
+            </a:r>
+            <a:endParaRPr lang="en-US" dirty="0"/>
+          </a:p>
+        </p:txBody>
+      </p:sp>
+      <p:sp>
+        <p:nvSpPr>
+          <p:cNvPr id="4" name="Slide Number Placeholder 3"/>
+          <p:cNvSpPr>
+            <a:spLocks noGrp="1"/>
+          </p:cNvSpPr>
+          <p:nvPr>
+            <p:ph type="sldNum" sz="quarter" idx="10"/>
+          </p:nvPr>
+        </p:nvSpPr>
+        <p:spPr/>
+        <p:txBody>
+          <a:bodyPr/>
+          <a:lstStyle/>
+          <a:p>
+            <a:fld id="{F7021451-1387-4CA6-816F-3879F97B5CBC}" type="slidenum">
+              <a:rPr lang="en-US"/>
+              <a:t>8</a:t>
+            </a:fld>
+            <a:endParaRPr lang="en-US"/>
+          </a:p>
+        </p:txBody>
+      </p:sp>
+    </p:spTree>
+    <p:extLst>
+      <p:ext uri="{BB962C8B-B14F-4D97-AF65-F5344CB8AC3E}">
+        <p14:creationId xmlns:p14="http://schemas.microsoft.com/office/powerpoint/2010/main" val="1024086991"/>
+      </p:ext>
+    </p:extLst>
+  </p:cSld>
+  <p:clrMapOvr>
+    <a:masterClrMapping/>
+  </p:clrMapOvr>
+</p:notes>
+</file>
+
 <file path=ppt/slideLayouts/slideLayout1.xml><?xml version="1.0" encoding="utf-8"?>
 <p:sldLayout xmlns:a="http://schemas.openxmlformats.org/drawingml/2006/main" xmlns:r="http://schemas.openxmlformats.org/officeDocument/2006/relationships" xmlns:p="http://schemas.openxmlformats.org/presentationml/2006/main" preserve="1">
   <p:cSld name="DEFAULT">
@@ -3988,6 +4077,548 @@
 <file path=ppt/slides/slide7.xml><?xml version="1.0" encoding="utf-8"?>
 <p:sld xmlns:a="http://schemas.openxmlformats.org/drawingml/2006/main" xmlns:r="http://schemas.openxmlformats.org/officeDocument/2006/relationships" xmlns:p="http://schemas.openxmlformats.org/presentationml/2006/main">
   <p:cSld name="Slide 7">
+    <p:bg>
+      <p:bgPr>
+        <a:solidFill>
+          <a:srgbClr val="FFFFFF"/>
+        </a:solidFill>
+      </p:bgPr>
+    </p:bg>
+    <p:spTree>
+      <p:nvGrpSpPr>
+        <p:cNvPr id="1" name=""/>
+        <p:cNvGrpSpPr/>
+        <p:nvPr/>
+      </p:nvGrpSpPr>
+      <p:grpSpPr>
+        <a:xfrm>
+          <a:off x="0" y="0"/>
+          <a:ext cx="0" cy="0"/>
+          <a:chOff x="0" y="0"/>
+          <a:chExt cx="0" cy="0"/>
+        </a:xfrm>
+      </p:grpSpPr>
+      <p:sp>
+        <p:nvSpPr>
+          <p:cNvPr id="2" name="Text 0"/>
+          <p:cNvSpPr/>
+          <p:nvPr/>
+        </p:nvSpPr>
+        <p:spPr>
+          <a:xfrm>
+            <a:off x="640080" y="640080"/>
+            <a:ext cx="10058400" cy="320040"/>
+          </a:xfrm>
+          <a:prstGeom prst="rect">
+            <a:avLst/>
+          </a:prstGeom>
+          <a:noFill/>
+          <a:ln/>
+        </p:spPr>
+        <p:txBody>
+          <a:bodyPr wrap="square" rtlCol="0" anchor="ctr"/>
+          <a:lstStyle/>
+          <a:p>
+            <a:pPr indent="0" marL="0">
+              <a:buNone/>
+            </a:pPr>
+            <a:r>
+              <a:rPr lang="en-US" sz="1300" b="1" spc="300" kern="0" dirty="0">
+                <a:solidFill>
+                  <a:srgbClr val="7A3B2E"/>
+                </a:solidFill>
+                <a:latin typeface="Calibri" pitchFamily="34" charset="0"/>
+                <a:ea typeface="Calibri" pitchFamily="34" charset="-122"/>
+                <a:cs typeface="Calibri" pitchFamily="34" charset="-120"/>
+              </a:rPr>
+              <a:t>HOW THIS WEEK CONNECTS</a:t>
+            </a:r>
+            <a:endParaRPr lang="en-US" sz="1300" dirty="0"/>
+          </a:p>
+        </p:txBody>
+      </p:sp>
+      <p:sp>
+        <p:nvSpPr>
+          <p:cNvPr id="3" name="Text 1"/>
+          <p:cNvSpPr/>
+          <p:nvPr/>
+        </p:nvSpPr>
+        <p:spPr>
+          <a:xfrm>
+            <a:off x="640080" y="987552"/>
+            <a:ext cx="10058400" cy="640080"/>
+          </a:xfrm>
+          <a:prstGeom prst="rect">
+            <a:avLst/>
+          </a:prstGeom>
+          <a:noFill/>
+          <a:ln/>
+        </p:spPr>
+        <p:txBody>
+          <a:bodyPr wrap="square" rtlCol="0" anchor="ctr"/>
+          <a:lstStyle/>
+          <a:p>
+            <a:pPr indent="0" marL="0">
+              <a:buNone/>
+            </a:pPr>
+            <a:r>
+              <a:rPr lang="en-US" sz="2800" b="1" dirty="0">
+                <a:solidFill>
+                  <a:srgbClr val="1A1A1A"/>
+                </a:solidFill>
+                <a:latin typeface="Cambria" pitchFamily="34" charset="0"/>
+                <a:ea typeface="Cambria" pitchFamily="34" charset="-122"/>
+                <a:cs typeface="Cambria" pitchFamily="34" charset="-120"/>
+              </a:rPr>
+              <a:t>The course's through-lines</a:t>
+            </a:r>
+            <a:endParaRPr lang="en-US" sz="2800" dirty="0"/>
+          </a:p>
+        </p:txBody>
+      </p:sp>
+      <p:sp>
+        <p:nvSpPr>
+          <p:cNvPr id="4" name="Shape 2"/>
+          <p:cNvSpPr/>
+          <p:nvPr/>
+        </p:nvSpPr>
+        <p:spPr>
+          <a:xfrm>
+            <a:off x="640080" y="2057400"/>
+            <a:ext cx="457200" cy="457200"/>
+          </a:xfrm>
+          <a:prstGeom prst="roundRect">
+            <a:avLst>
+              <a:gd name="adj" fmla="val 16000"/>
+            </a:avLst>
+          </a:prstGeom>
+          <a:solidFill>
+            <a:srgbClr val="7A3B2E"/>
+          </a:solidFill>
+          <a:ln/>
+        </p:spPr>
+      </p:sp>
+      <p:sp>
+        <p:nvSpPr>
+          <p:cNvPr id="5" name="Text 3"/>
+          <p:cNvSpPr/>
+          <p:nvPr/>
+        </p:nvSpPr>
+        <p:spPr>
+          <a:xfrm>
+            <a:off x="640080" y="2057400"/>
+            <a:ext cx="457200" cy="457200"/>
+          </a:xfrm>
+          <a:prstGeom prst="rect">
+            <a:avLst/>
+          </a:prstGeom>
+          <a:noFill/>
+          <a:ln/>
+        </p:spPr>
+        <p:txBody>
+          <a:bodyPr wrap="square" rtlCol="0" anchor="ctr"/>
+          <a:lstStyle/>
+          <a:p>
+            <a:pPr algn="ctr" indent="0" marL="0">
+              <a:buNone/>
+            </a:pPr>
+            <a:r>
+              <a:rPr lang="en-US" sz="2000" b="1" dirty="0">
+                <a:solidFill>
+                  <a:srgbClr val="FFFFFF"/>
+                </a:solidFill>
+                <a:latin typeface="Cambria" pitchFamily="34" charset="0"/>
+                <a:ea typeface="Cambria" pitchFamily="34" charset="-122"/>
+                <a:cs typeface="Cambria" pitchFamily="34" charset="-120"/>
+              </a:rPr>
+              <a:t>1</a:t>
+            </a:r>
+            <a:endParaRPr lang="en-US" sz="2000" dirty="0"/>
+          </a:p>
+        </p:txBody>
+      </p:sp>
+      <p:sp>
+        <p:nvSpPr>
+          <p:cNvPr id="6" name="Text 4"/>
+          <p:cNvSpPr/>
+          <p:nvPr/>
+        </p:nvSpPr>
+        <p:spPr>
+          <a:xfrm>
+            <a:off x="1371600" y="2020824"/>
+            <a:ext cx="10332720" cy="411480"/>
+          </a:xfrm>
+          <a:prstGeom prst="rect">
+            <a:avLst/>
+          </a:prstGeom>
+          <a:noFill/>
+          <a:ln/>
+        </p:spPr>
+        <p:txBody>
+          <a:bodyPr wrap="square" rtlCol="0" anchor="ctr"/>
+          <a:lstStyle/>
+          <a:p>
+            <a:pPr indent="0" marL="0">
+              <a:buNone/>
+            </a:pPr>
+            <a:r>
+              <a:rPr lang="en-US" sz="1900" b="1" dirty="0">
+                <a:solidFill>
+                  <a:srgbClr val="7A3B2E"/>
+                </a:solidFill>
+                <a:latin typeface="Cambria" pitchFamily="34" charset="0"/>
+                <a:ea typeface="Cambria" pitchFamily="34" charset="-122"/>
+                <a:cs typeface="Cambria" pitchFamily="34" charset="-120"/>
+              </a:rPr>
+              <a:t>Whose data, at full scale</a:t>
+            </a:r>
+            <a:endParaRPr lang="en-US" sz="1900" dirty="0"/>
+          </a:p>
+        </p:txBody>
+      </p:sp>
+      <p:sp>
+        <p:nvSpPr>
+          <p:cNvPr id="7" name="Text 5"/>
+          <p:cNvSpPr/>
+          <p:nvPr/>
+        </p:nvSpPr>
+        <p:spPr>
+          <a:xfrm>
+            <a:off x="1371600" y="2441448"/>
+            <a:ext cx="10332720" cy="914400"/>
+          </a:xfrm>
+          <a:prstGeom prst="rect">
+            <a:avLst/>
+          </a:prstGeom>
+          <a:noFill/>
+          <a:ln/>
+        </p:spPr>
+        <p:txBody>
+          <a:bodyPr wrap="square" rtlCol="0" anchor="t">
+            <a:spAutoFit/>
+          </a:bodyPr>
+          <a:lstStyle/>
+          <a:p>
+            <a:pPr indent="0" marL="0">
+              <a:lnSpc>
+                <a:spcPct val="112000"/>
+              </a:lnSpc>
+              <a:buNone/>
+            </a:pPr>
+            <a:r>
+              <a:rPr lang="en-US" sz="1450" dirty="0">
+                <a:solidFill>
+                  <a:srgbClr val="1A1A1A"/>
+                </a:solidFill>
+                <a:latin typeface="Calibri" pitchFamily="34" charset="0"/>
+                <a:ea typeface="Calibri" pitchFamily="34" charset="-122"/>
+                <a:cs typeface="Calibri" pitchFamily="34" charset="-120"/>
+              </a:rPr>
+              <a:t>A model is its corpus: bound the corpus and you bound the mind.</a:t>
+            </a:r>
+            <a:endParaRPr lang="en-US" sz="1450" dirty="0"/>
+          </a:p>
+        </p:txBody>
+      </p:sp>
+      <p:sp>
+        <p:nvSpPr>
+          <p:cNvPr id="8" name="Shape 6"/>
+          <p:cNvSpPr/>
+          <p:nvPr/>
+        </p:nvSpPr>
+        <p:spPr>
+          <a:xfrm>
+            <a:off x="640080" y="3520440"/>
+            <a:ext cx="457200" cy="457200"/>
+          </a:xfrm>
+          <a:prstGeom prst="roundRect">
+            <a:avLst>
+              <a:gd name="adj" fmla="val 16000"/>
+            </a:avLst>
+          </a:prstGeom>
+          <a:solidFill>
+            <a:srgbClr val="3F6F5F"/>
+          </a:solidFill>
+          <a:ln/>
+        </p:spPr>
+      </p:sp>
+      <p:sp>
+        <p:nvSpPr>
+          <p:cNvPr id="9" name="Text 7"/>
+          <p:cNvSpPr/>
+          <p:nvPr/>
+        </p:nvSpPr>
+        <p:spPr>
+          <a:xfrm>
+            <a:off x="640080" y="3520440"/>
+            <a:ext cx="457200" cy="457200"/>
+          </a:xfrm>
+          <a:prstGeom prst="rect">
+            <a:avLst/>
+          </a:prstGeom>
+          <a:noFill/>
+          <a:ln/>
+        </p:spPr>
+        <p:txBody>
+          <a:bodyPr wrap="square" rtlCol="0" anchor="ctr"/>
+          <a:lstStyle/>
+          <a:p>
+            <a:pPr algn="ctr" indent="0" marL="0">
+              <a:buNone/>
+            </a:pPr>
+            <a:r>
+              <a:rPr lang="en-US" sz="2000" b="1" dirty="0">
+                <a:solidFill>
+                  <a:srgbClr val="FFFFFF"/>
+                </a:solidFill>
+                <a:latin typeface="Cambria" pitchFamily="34" charset="0"/>
+                <a:ea typeface="Cambria" pitchFamily="34" charset="-122"/>
+                <a:cs typeface="Cambria" pitchFamily="34" charset="-120"/>
+              </a:rPr>
+              <a:t>2</a:t>
+            </a:r>
+            <a:endParaRPr lang="en-US" sz="2000" dirty="0"/>
+          </a:p>
+        </p:txBody>
+      </p:sp>
+      <p:sp>
+        <p:nvSpPr>
+          <p:cNvPr id="10" name="Text 8"/>
+          <p:cNvSpPr/>
+          <p:nvPr/>
+        </p:nvSpPr>
+        <p:spPr>
+          <a:xfrm>
+            <a:off x="1371600" y="3483864"/>
+            <a:ext cx="10332720" cy="411480"/>
+          </a:xfrm>
+          <a:prstGeom prst="rect">
+            <a:avLst/>
+          </a:prstGeom>
+          <a:noFill/>
+          <a:ln/>
+        </p:spPr>
+        <p:txBody>
+          <a:bodyPr wrap="square" rtlCol="0" anchor="ctr"/>
+          <a:lstStyle/>
+          <a:p>
+            <a:pPr indent="0" marL="0">
+              <a:buNone/>
+            </a:pPr>
+            <a:r>
+              <a:rPr lang="en-US" sz="1900" b="1" dirty="0">
+                <a:solidFill>
+                  <a:srgbClr val="3F6F5F"/>
+                </a:solidFill>
+                <a:latin typeface="Cambria" pitchFamily="34" charset="0"/>
+                <a:ea typeface="Cambria" pitchFamily="34" charset="-122"/>
+                <a:cs typeface="Cambria" pitchFamily="34" charset="-120"/>
+              </a:rPr>
+              <a:t>Memorization isn't reading</a:t>
+            </a:r>
+            <a:endParaRPr lang="en-US" sz="1900" dirty="0"/>
+          </a:p>
+        </p:txBody>
+      </p:sp>
+      <p:sp>
+        <p:nvSpPr>
+          <p:cNvPr id="11" name="Text 9"/>
+          <p:cNvSpPr/>
+          <p:nvPr/>
+        </p:nvSpPr>
+        <p:spPr>
+          <a:xfrm>
+            <a:off x="1371600" y="3904488"/>
+            <a:ext cx="10332720" cy="914400"/>
+          </a:xfrm>
+          <a:prstGeom prst="rect">
+            <a:avLst/>
+          </a:prstGeom>
+          <a:noFill/>
+          <a:ln/>
+        </p:spPr>
+        <p:txBody>
+          <a:bodyPr wrap="square" rtlCol="0" anchor="t">
+            <a:spAutoFit/>
+          </a:bodyPr>
+          <a:lstStyle/>
+          <a:p>
+            <a:pPr indent="0" marL="0">
+              <a:lnSpc>
+                <a:spcPct val="112000"/>
+              </a:lnSpc>
+              <a:buNone/>
+            </a:pPr>
+            <a:r>
+              <a:rPr lang="en-US" sz="1450" dirty="0">
+                <a:solidFill>
+                  <a:srgbClr val="1A1A1A"/>
+                </a:solidFill>
+                <a:latin typeface="Calibri" pitchFamily="34" charset="0"/>
+                <a:ea typeface="Calibri" pitchFamily="34" charset="-122"/>
+                <a:cs typeface="Calibri" pitchFamily="34" charset="-120"/>
+              </a:rPr>
+              <a:t>A model may recite your corpus rather than read it, a validity problem, not just ethics.</a:t>
+            </a:r>
+            <a:endParaRPr lang="en-US" sz="1450" dirty="0"/>
+          </a:p>
+        </p:txBody>
+      </p:sp>
+      <p:sp>
+        <p:nvSpPr>
+          <p:cNvPr id="12" name="Shape 10"/>
+          <p:cNvSpPr/>
+          <p:nvPr/>
+        </p:nvSpPr>
+        <p:spPr>
+          <a:xfrm>
+            <a:off x="640080" y="4983480"/>
+            <a:ext cx="457200" cy="457200"/>
+          </a:xfrm>
+          <a:prstGeom prst="roundRect">
+            <a:avLst>
+              <a:gd name="adj" fmla="val 16000"/>
+            </a:avLst>
+          </a:prstGeom>
+          <a:solidFill>
+            <a:srgbClr val="B9852F"/>
+          </a:solidFill>
+          <a:ln/>
+        </p:spPr>
+      </p:sp>
+      <p:sp>
+        <p:nvSpPr>
+          <p:cNvPr id="13" name="Text 11"/>
+          <p:cNvSpPr/>
+          <p:nvPr/>
+        </p:nvSpPr>
+        <p:spPr>
+          <a:xfrm>
+            <a:off x="640080" y="4983480"/>
+            <a:ext cx="457200" cy="457200"/>
+          </a:xfrm>
+          <a:prstGeom prst="rect">
+            <a:avLst/>
+          </a:prstGeom>
+          <a:noFill/>
+          <a:ln/>
+        </p:spPr>
+        <p:txBody>
+          <a:bodyPr wrap="square" rtlCol="0" anchor="ctr"/>
+          <a:lstStyle/>
+          <a:p>
+            <a:pPr algn="ctr" indent="0" marL="0">
+              <a:buNone/>
+            </a:pPr>
+            <a:r>
+              <a:rPr lang="en-US" sz="2000" b="1" dirty="0">
+                <a:solidFill>
+                  <a:srgbClr val="FFFFFF"/>
+                </a:solidFill>
+                <a:latin typeface="Cambria" pitchFamily="34" charset="0"/>
+                <a:ea typeface="Cambria" pitchFamily="34" charset="-122"/>
+                <a:cs typeface="Cambria" pitchFamily="34" charset="-120"/>
+              </a:rPr>
+              <a:t>3</a:t>
+            </a:r>
+            <a:endParaRPr lang="en-US" sz="2000" dirty="0"/>
+          </a:p>
+        </p:txBody>
+      </p:sp>
+      <p:sp>
+        <p:nvSpPr>
+          <p:cNvPr id="14" name="Text 12"/>
+          <p:cNvSpPr/>
+          <p:nvPr/>
+        </p:nvSpPr>
+        <p:spPr>
+          <a:xfrm>
+            <a:off x="1371600" y="4946904"/>
+            <a:ext cx="10332720" cy="411480"/>
+          </a:xfrm>
+          <a:prstGeom prst="rect">
+            <a:avLst/>
+          </a:prstGeom>
+          <a:noFill/>
+          <a:ln/>
+        </p:spPr>
+        <p:txBody>
+          <a:bodyPr wrap="square" rtlCol="0" anchor="ctr"/>
+          <a:lstStyle/>
+          <a:p>
+            <a:pPr indent="0" marL="0">
+              <a:buNone/>
+            </a:pPr>
+            <a:r>
+              <a:rPr lang="en-US" sz="1900" b="1" dirty="0">
+                <a:solidFill>
+                  <a:srgbClr val="B9852F"/>
+                </a:solidFill>
+                <a:latin typeface="Cambria" pitchFamily="34" charset="0"/>
+                <a:ea typeface="Cambria" pitchFamily="34" charset="-122"/>
+                <a:cs typeface="Cambria" pitchFamily="34" charset="-120"/>
+              </a:rPr>
+              <a:t>Kill it, then keep it</a:t>
+            </a:r>
+            <a:endParaRPr lang="en-US" sz="1900" dirty="0"/>
+          </a:p>
+        </p:txBody>
+      </p:sp>
+      <p:sp>
+        <p:nvSpPr>
+          <p:cNvPr id="15" name="Text 13"/>
+          <p:cNvSpPr/>
+          <p:nvPr/>
+        </p:nvSpPr>
+        <p:spPr>
+          <a:xfrm>
+            <a:off x="1371600" y="5367528"/>
+            <a:ext cx="10332720" cy="914400"/>
+          </a:xfrm>
+          <a:prstGeom prst="rect">
+            <a:avLst/>
+          </a:prstGeom>
+          <a:noFill/>
+          <a:ln/>
+        </p:spPr>
+        <p:txBody>
+          <a:bodyPr wrap="square" rtlCol="0" anchor="t">
+            <a:spAutoFit/>
+          </a:bodyPr>
+          <a:lstStyle/>
+          <a:p>
+            <a:pPr indent="0" marL="0">
+              <a:lnSpc>
+                <a:spcPct val="112000"/>
+              </a:lnSpc>
+              <a:buNone/>
+            </a:pPr>
+            <a:r>
+              <a:rPr lang="en-US" sz="1450" dirty="0">
+                <a:solidFill>
+                  <a:srgbClr val="1A1A1A"/>
+                </a:solidFill>
+                <a:latin typeface="Calibri" pitchFamily="34" charset="0"/>
+                <a:ea typeface="Calibri" pitchFamily="34" charset="-122"/>
+                <a:cs typeface="Calibri" pitchFamily="34" charset="-120"/>
+              </a:rPr>
+              <a:t>The Week 2 trial move, now turned on your own finding.</a:t>
+            </a:r>
+            <a:endParaRPr lang="en-US" sz="1450" dirty="0"/>
+          </a:p>
+        </p:txBody>
+      </p:sp>
+    </p:spTree>
+  </p:cSld>
+  <p:clrMapOvr>
+    <a:masterClrMapping/>
+  </p:clrMapOvr>
+</p:sld>
+</file>
+
+<file path=ppt/slides/slide8.xml><?xml version="1.0" encoding="utf-8"?>
+<p:sld xmlns:a="http://schemas.openxmlformats.org/drawingml/2006/main" xmlns:r="http://schemas.openxmlformats.org/officeDocument/2006/relationships" xmlns:p="http://schemas.openxmlformats.org/presentationml/2006/main">
+  <p:cSld name="Slide 8">
     <p:bg>
       <p:bgPr>
         <a:solidFill>

--- a/slides/pptx/week-08.pptx
+++ b/slides/pptx/week-08.pptx
@@ -13,9 +13,12 @@
     <p:sldId id="261" r:id="rId7"/>
     <p:sldId id="262" r:id="rId8"/>
     <p:sldId id="263" r:id="rId9"/>
+    <p:sldId id="264" r:id="rId10"/>
+    <p:sldId id="265" r:id="rId11"/>
+    <p:sldId id="266" r:id="rId12"/>
   </p:sldIdLst>
   <p:notesMasterIdLst>
-    <p:notesMasterId r:id="rId10"/>
+    <p:notesMasterId r:id="rId13"/>
   </p:notesMasterIdLst>
   <p:sldSz cx="12191695" cy="6858000"/>
   <p:notesSz cx="6858000" cy="12191695"/>
@@ -551,6 +554,182 @@
 </p:notes>
 </file>
 
+<file path=ppt/notesSlides/notesSlide10.xml><?xml version="1.0" encoding="utf-8"?>
+<p:notes xmlns:a="http://schemas.openxmlformats.org/drawingml/2006/main" xmlns:r="http://schemas.openxmlformats.org/officeDocument/2006/relationships" xmlns:p="http://schemas.openxmlformats.org/presentationml/2006/main">
+  <p:cSld>
+    <p:spTree>
+      <p:nvGrpSpPr>
+        <p:cNvPr id="1" name=""/>
+        <p:cNvGrpSpPr/>
+        <p:nvPr/>
+      </p:nvGrpSpPr>
+      <p:grpSpPr>
+        <a:xfrm>
+          <a:off x="0" y="0"/>
+          <a:ext cx="0" cy="0"/>
+          <a:chOff x="0" y="0"/>
+          <a:chExt cx="0" cy="0"/>
+        </a:xfrm>
+      </p:grpSpPr>
+      <p:sp>
+        <p:nvSpPr>
+          <p:cNvPr id="2" name="Slide Image Placeholder 1"/>
+          <p:cNvSpPr>
+            <a:spLocks noGrp="1" noRot="1" noChangeAspect="1"/>
+          </p:cNvSpPr>
+          <p:nvPr>
+            <p:ph type="sldImg"/>
+          </p:nvPr>
+        </p:nvSpPr>
+        <p:spPr/>
+      </p:sp>
+      <p:sp>
+        <p:nvSpPr>
+          <p:cNvPr id="3" name="Notes Placeholder 2"/>
+          <p:cNvSpPr>
+            <a:spLocks noGrp="1"/>
+          </p:cNvSpPr>
+          <p:nvPr>
+            <p:ph type="body" idx="1"/>
+          </p:nvPr>
+        </p:nvSpPr>
+        <p:spPr/>
+        <p:txBody>
+          <a:bodyPr/>
+          <a:lstStyle/>
+          <a:p>
+            <a:r>
+              <a:rPr lang="en-US" dirty="0"/>
+              <a:t/>
+            </a:r>
+            <a:endParaRPr lang="en-US" dirty="0"/>
+          </a:p>
+        </p:txBody>
+      </p:sp>
+      <p:sp>
+        <p:nvSpPr>
+          <p:cNvPr id="4" name="Slide Number Placeholder 3"/>
+          <p:cNvSpPr>
+            <a:spLocks noGrp="1"/>
+          </p:cNvSpPr>
+          <p:nvPr>
+            <p:ph type="sldNum" sz="quarter" idx="10"/>
+          </p:nvPr>
+        </p:nvSpPr>
+        <p:spPr/>
+        <p:txBody>
+          <a:bodyPr/>
+          <a:lstStyle/>
+          <a:p>
+            <a:fld id="{F7021451-1387-4CA6-816F-3879F97B5CBC}" type="slidenum">
+              <a:rPr lang="en-US"/>
+              <a:t>10</a:t>
+            </a:fld>
+            <a:endParaRPr lang="en-US"/>
+          </a:p>
+        </p:txBody>
+      </p:sp>
+    </p:spTree>
+    <p:extLst>
+      <p:ext uri="{BB962C8B-B14F-4D97-AF65-F5344CB8AC3E}">
+        <p14:creationId xmlns:p14="http://schemas.microsoft.com/office/powerpoint/2010/main" val="1024086991"/>
+      </p:ext>
+    </p:extLst>
+  </p:cSld>
+  <p:clrMapOvr>
+    <a:masterClrMapping/>
+  </p:clrMapOvr>
+</p:notes>
+</file>
+
+<file path=ppt/notesSlides/notesSlide11.xml><?xml version="1.0" encoding="utf-8"?>
+<p:notes xmlns:a="http://schemas.openxmlformats.org/drawingml/2006/main" xmlns:r="http://schemas.openxmlformats.org/officeDocument/2006/relationships" xmlns:p="http://schemas.openxmlformats.org/presentationml/2006/main">
+  <p:cSld>
+    <p:spTree>
+      <p:nvGrpSpPr>
+        <p:cNvPr id="1" name=""/>
+        <p:cNvGrpSpPr/>
+        <p:nvPr/>
+      </p:nvGrpSpPr>
+      <p:grpSpPr>
+        <a:xfrm>
+          <a:off x="0" y="0"/>
+          <a:ext cx="0" cy="0"/>
+          <a:chOff x="0" y="0"/>
+          <a:chExt cx="0" cy="0"/>
+        </a:xfrm>
+      </p:grpSpPr>
+      <p:sp>
+        <p:nvSpPr>
+          <p:cNvPr id="2" name="Slide Image Placeholder 1"/>
+          <p:cNvSpPr>
+            <a:spLocks noGrp="1" noRot="1" noChangeAspect="1"/>
+          </p:cNvSpPr>
+          <p:nvPr>
+            <p:ph type="sldImg"/>
+          </p:nvPr>
+        </p:nvSpPr>
+        <p:spPr/>
+      </p:sp>
+      <p:sp>
+        <p:nvSpPr>
+          <p:cNvPr id="3" name="Notes Placeholder 2"/>
+          <p:cNvSpPr>
+            <a:spLocks noGrp="1"/>
+          </p:cNvSpPr>
+          <p:nvPr>
+            <p:ph type="body" idx="1"/>
+          </p:nvPr>
+        </p:nvSpPr>
+        <p:spPr/>
+        <p:txBody>
+          <a:bodyPr/>
+          <a:lstStyle/>
+          <a:p>
+            <a:r>
+              <a:rPr lang="en-US" dirty="0"/>
+              <a:t/>
+            </a:r>
+            <a:endParaRPr lang="en-US" dirty="0"/>
+          </a:p>
+        </p:txBody>
+      </p:sp>
+      <p:sp>
+        <p:nvSpPr>
+          <p:cNvPr id="4" name="Slide Number Placeholder 3"/>
+          <p:cNvSpPr>
+            <a:spLocks noGrp="1"/>
+          </p:cNvSpPr>
+          <p:nvPr>
+            <p:ph type="sldNum" sz="quarter" idx="10"/>
+          </p:nvPr>
+        </p:nvSpPr>
+        <p:spPr/>
+        <p:txBody>
+          <a:bodyPr/>
+          <a:lstStyle/>
+          <a:p>
+            <a:fld id="{F7021451-1387-4CA6-816F-3879F97B5CBC}" type="slidenum">
+              <a:rPr lang="en-US"/>
+              <a:t>11</a:t>
+            </a:fld>
+            <a:endParaRPr lang="en-US"/>
+          </a:p>
+        </p:txBody>
+      </p:sp>
+    </p:spTree>
+    <p:extLst>
+      <p:ext uri="{BB962C8B-B14F-4D97-AF65-F5344CB8AC3E}">
+        <p14:creationId xmlns:p14="http://schemas.microsoft.com/office/powerpoint/2010/main" val="1024086991"/>
+      </p:ext>
+    </p:extLst>
+  </p:cSld>
+  <p:clrMapOvr>
+    <a:masterClrMapping/>
+  </p:clrMapOvr>
+</p:notes>
+</file>
+
 <file path=ppt/notesSlides/notesSlide2.xml><?xml version="1.0" encoding="utf-8"?>
 <p:notes xmlns:a="http://schemas.openxmlformats.org/drawingml/2006/main" xmlns:r="http://schemas.openxmlformats.org/officeDocument/2006/relationships" xmlns:p="http://schemas.openxmlformats.org/presentationml/2006/main">
   <p:cSld>
@@ -1149,6 +1328,94 @@
             <a:fld id="{F7021451-1387-4CA6-816F-3879F97B5CBC}" type="slidenum">
               <a:rPr lang="en-US"/>
               <a:t>8</a:t>
+            </a:fld>
+            <a:endParaRPr lang="en-US"/>
+          </a:p>
+        </p:txBody>
+      </p:sp>
+    </p:spTree>
+    <p:extLst>
+      <p:ext uri="{BB962C8B-B14F-4D97-AF65-F5344CB8AC3E}">
+        <p14:creationId xmlns:p14="http://schemas.microsoft.com/office/powerpoint/2010/main" val="1024086991"/>
+      </p:ext>
+    </p:extLst>
+  </p:cSld>
+  <p:clrMapOvr>
+    <a:masterClrMapping/>
+  </p:clrMapOvr>
+</p:notes>
+</file>
+
+<file path=ppt/notesSlides/notesSlide9.xml><?xml version="1.0" encoding="utf-8"?>
+<p:notes xmlns:a="http://schemas.openxmlformats.org/drawingml/2006/main" xmlns:r="http://schemas.openxmlformats.org/officeDocument/2006/relationships" xmlns:p="http://schemas.openxmlformats.org/presentationml/2006/main">
+  <p:cSld>
+    <p:spTree>
+      <p:nvGrpSpPr>
+        <p:cNvPr id="1" name=""/>
+        <p:cNvGrpSpPr/>
+        <p:nvPr/>
+      </p:nvGrpSpPr>
+      <p:grpSpPr>
+        <a:xfrm>
+          <a:off x="0" y="0"/>
+          <a:ext cx="0" cy="0"/>
+          <a:chOff x="0" y="0"/>
+          <a:chExt cx="0" cy="0"/>
+        </a:xfrm>
+      </p:grpSpPr>
+      <p:sp>
+        <p:nvSpPr>
+          <p:cNvPr id="2" name="Slide Image Placeholder 1"/>
+          <p:cNvSpPr>
+            <a:spLocks noGrp="1" noRot="1" noChangeAspect="1"/>
+          </p:cNvSpPr>
+          <p:nvPr>
+            <p:ph type="sldImg"/>
+          </p:nvPr>
+        </p:nvSpPr>
+        <p:spPr/>
+      </p:sp>
+      <p:sp>
+        <p:nvSpPr>
+          <p:cNvPr id="3" name="Notes Placeholder 2"/>
+          <p:cNvSpPr>
+            <a:spLocks noGrp="1"/>
+          </p:cNvSpPr>
+          <p:nvPr>
+            <p:ph type="body" idx="1"/>
+          </p:nvPr>
+        </p:nvSpPr>
+        <p:spPr/>
+        <p:txBody>
+          <a:bodyPr/>
+          <a:lstStyle/>
+          <a:p>
+            <a:r>
+              <a:rPr lang="en-US" dirty="0"/>
+              <a:t/>
+            </a:r>
+            <a:endParaRPr lang="en-US" dirty="0"/>
+          </a:p>
+        </p:txBody>
+      </p:sp>
+      <p:sp>
+        <p:nvSpPr>
+          <p:cNvPr id="4" name="Slide Number Placeholder 3"/>
+          <p:cNvSpPr>
+            <a:spLocks noGrp="1"/>
+          </p:cNvSpPr>
+          <p:nvPr>
+            <p:ph type="sldNum" sz="quarter" idx="10"/>
+          </p:nvPr>
+        </p:nvSpPr>
+        <p:spPr/>
+        <p:txBody>
+          <a:bodyPr/>
+          <a:lstStyle/>
+          <a:p>
+            <a:fld id="{F7021451-1387-4CA6-816F-3879F97B5CBC}" type="slidenum">
+              <a:rPr lang="en-US"/>
+              <a:t>9</a:t>
             </a:fld>
             <a:endParaRPr lang="en-US"/>
           </a:p>
@@ -2025,6 +2292,982 @@
 </p:sld>
 </file>
 
+<file path=ppt/slides/slide10.xml><?xml version="1.0" encoding="utf-8"?>
+<p:sld xmlns:a="http://schemas.openxmlformats.org/drawingml/2006/main" xmlns:r="http://schemas.openxmlformats.org/officeDocument/2006/relationships" xmlns:p="http://schemas.openxmlformats.org/presentationml/2006/main">
+  <p:cSld name="Slide 10">
+    <p:bg>
+      <p:bgPr>
+        <a:solidFill>
+          <a:srgbClr val="FFFFFF"/>
+        </a:solidFill>
+      </p:bgPr>
+    </p:bg>
+    <p:spTree>
+      <p:nvGrpSpPr>
+        <p:cNvPr id="1" name=""/>
+        <p:cNvGrpSpPr/>
+        <p:nvPr/>
+      </p:nvGrpSpPr>
+      <p:grpSpPr>
+        <a:xfrm>
+          <a:off x="0" y="0"/>
+          <a:ext cx="0" cy="0"/>
+          <a:chOff x="0" y="0"/>
+          <a:chExt cx="0" cy="0"/>
+        </a:xfrm>
+      </p:grpSpPr>
+      <p:sp>
+        <p:nvSpPr>
+          <p:cNvPr id="2" name="Text 0"/>
+          <p:cNvSpPr/>
+          <p:nvPr/>
+        </p:nvSpPr>
+        <p:spPr>
+          <a:xfrm>
+            <a:off x="640080" y="640080"/>
+            <a:ext cx="10058400" cy="320040"/>
+          </a:xfrm>
+          <a:prstGeom prst="rect">
+            <a:avLst/>
+          </a:prstGeom>
+          <a:noFill/>
+          <a:ln/>
+        </p:spPr>
+        <p:txBody>
+          <a:bodyPr wrap="square" rtlCol="0" anchor="ctr"/>
+          <a:lstStyle/>
+          <a:p>
+            <a:pPr indent="0" marL="0">
+              <a:buNone/>
+            </a:pPr>
+            <a:r>
+              <a:rPr lang="en-US" sz="1300" b="1" spc="300" kern="0" dirty="0">
+                <a:solidFill>
+                  <a:srgbClr val="7A3B2E"/>
+                </a:solidFill>
+                <a:latin typeface="Calibri" pitchFamily="34" charset="0"/>
+                <a:ea typeface="Calibri" pitchFamily="34" charset="-122"/>
+                <a:cs typeface="Calibri" pitchFamily="34" charset="-120"/>
+              </a:rPr>
+              <a:t>HOW THIS WEEK CONNECTS</a:t>
+            </a:r>
+            <a:endParaRPr lang="en-US" sz="1300" dirty="0"/>
+          </a:p>
+        </p:txBody>
+      </p:sp>
+      <p:sp>
+        <p:nvSpPr>
+          <p:cNvPr id="3" name="Text 1"/>
+          <p:cNvSpPr/>
+          <p:nvPr/>
+        </p:nvSpPr>
+        <p:spPr>
+          <a:xfrm>
+            <a:off x="640080" y="987552"/>
+            <a:ext cx="10058400" cy="640080"/>
+          </a:xfrm>
+          <a:prstGeom prst="rect">
+            <a:avLst/>
+          </a:prstGeom>
+          <a:noFill/>
+          <a:ln/>
+        </p:spPr>
+        <p:txBody>
+          <a:bodyPr wrap="square" rtlCol="0" anchor="ctr"/>
+          <a:lstStyle/>
+          <a:p>
+            <a:pPr indent="0" marL="0">
+              <a:buNone/>
+            </a:pPr>
+            <a:r>
+              <a:rPr lang="en-US" sz="2800" b="1" dirty="0">
+                <a:solidFill>
+                  <a:srgbClr val="1A1A1A"/>
+                </a:solidFill>
+                <a:latin typeface="Cambria" pitchFamily="34" charset="0"/>
+                <a:ea typeface="Cambria" pitchFamily="34" charset="-122"/>
+                <a:cs typeface="Cambria" pitchFamily="34" charset="-120"/>
+              </a:rPr>
+              <a:t>The course's through-lines</a:t>
+            </a:r>
+            <a:endParaRPr lang="en-US" sz="2800" dirty="0"/>
+          </a:p>
+        </p:txBody>
+      </p:sp>
+      <p:sp>
+        <p:nvSpPr>
+          <p:cNvPr id="4" name="Shape 2"/>
+          <p:cNvSpPr/>
+          <p:nvPr/>
+        </p:nvSpPr>
+        <p:spPr>
+          <a:xfrm>
+            <a:off x="640080" y="2057400"/>
+            <a:ext cx="457200" cy="457200"/>
+          </a:xfrm>
+          <a:prstGeom prst="roundRect">
+            <a:avLst>
+              <a:gd name="adj" fmla="val 16000"/>
+            </a:avLst>
+          </a:prstGeom>
+          <a:solidFill>
+            <a:srgbClr val="7A3B2E"/>
+          </a:solidFill>
+          <a:ln/>
+        </p:spPr>
+      </p:sp>
+      <p:sp>
+        <p:nvSpPr>
+          <p:cNvPr id="5" name="Text 3"/>
+          <p:cNvSpPr/>
+          <p:nvPr/>
+        </p:nvSpPr>
+        <p:spPr>
+          <a:xfrm>
+            <a:off x="640080" y="2057400"/>
+            <a:ext cx="457200" cy="457200"/>
+          </a:xfrm>
+          <a:prstGeom prst="rect">
+            <a:avLst/>
+          </a:prstGeom>
+          <a:noFill/>
+          <a:ln/>
+        </p:spPr>
+        <p:txBody>
+          <a:bodyPr wrap="square" rtlCol="0" anchor="ctr"/>
+          <a:lstStyle/>
+          <a:p>
+            <a:pPr algn="ctr" indent="0" marL="0">
+              <a:buNone/>
+            </a:pPr>
+            <a:r>
+              <a:rPr lang="en-US" sz="2000" b="1" dirty="0">
+                <a:solidFill>
+                  <a:srgbClr val="FFFFFF"/>
+                </a:solidFill>
+                <a:latin typeface="Cambria" pitchFamily="34" charset="0"/>
+                <a:ea typeface="Cambria" pitchFamily="34" charset="-122"/>
+                <a:cs typeface="Cambria" pitchFamily="34" charset="-120"/>
+              </a:rPr>
+              <a:t>1</a:t>
+            </a:r>
+            <a:endParaRPr lang="en-US" sz="2000" dirty="0"/>
+          </a:p>
+        </p:txBody>
+      </p:sp>
+      <p:sp>
+        <p:nvSpPr>
+          <p:cNvPr id="6" name="Text 4"/>
+          <p:cNvSpPr/>
+          <p:nvPr/>
+        </p:nvSpPr>
+        <p:spPr>
+          <a:xfrm>
+            <a:off x="1371600" y="2020824"/>
+            <a:ext cx="10332720" cy="411480"/>
+          </a:xfrm>
+          <a:prstGeom prst="rect">
+            <a:avLst/>
+          </a:prstGeom>
+          <a:noFill/>
+          <a:ln/>
+        </p:spPr>
+        <p:txBody>
+          <a:bodyPr wrap="square" rtlCol="0" anchor="ctr"/>
+          <a:lstStyle/>
+          <a:p>
+            <a:pPr indent="0" marL="0">
+              <a:buNone/>
+            </a:pPr>
+            <a:r>
+              <a:rPr lang="en-US" sz="1900" b="1" dirty="0">
+                <a:solidFill>
+                  <a:srgbClr val="7A3B2E"/>
+                </a:solidFill>
+                <a:latin typeface="Cambria" pitchFamily="34" charset="0"/>
+                <a:ea typeface="Cambria" pitchFamily="34" charset="-122"/>
+                <a:cs typeface="Cambria" pitchFamily="34" charset="-120"/>
+              </a:rPr>
+              <a:t>Whose data, at full scale</a:t>
+            </a:r>
+            <a:endParaRPr lang="en-US" sz="1900" dirty="0"/>
+          </a:p>
+        </p:txBody>
+      </p:sp>
+      <p:sp>
+        <p:nvSpPr>
+          <p:cNvPr id="7" name="Text 5"/>
+          <p:cNvSpPr/>
+          <p:nvPr/>
+        </p:nvSpPr>
+        <p:spPr>
+          <a:xfrm>
+            <a:off x="1371600" y="2441448"/>
+            <a:ext cx="10332720" cy="914400"/>
+          </a:xfrm>
+          <a:prstGeom prst="rect">
+            <a:avLst/>
+          </a:prstGeom>
+          <a:noFill/>
+          <a:ln/>
+        </p:spPr>
+        <p:txBody>
+          <a:bodyPr wrap="square" rtlCol="0" anchor="t">
+            <a:spAutoFit/>
+          </a:bodyPr>
+          <a:lstStyle/>
+          <a:p>
+            <a:pPr indent="0" marL="0">
+              <a:lnSpc>
+                <a:spcPct val="112000"/>
+              </a:lnSpc>
+              <a:buNone/>
+            </a:pPr>
+            <a:r>
+              <a:rPr lang="en-US" sz="1450" dirty="0">
+                <a:solidFill>
+                  <a:srgbClr val="1A1A1A"/>
+                </a:solidFill>
+                <a:latin typeface="Calibri" pitchFamily="34" charset="0"/>
+                <a:ea typeface="Calibri" pitchFamily="34" charset="-122"/>
+                <a:cs typeface="Calibri" pitchFamily="34" charset="-120"/>
+              </a:rPr>
+              <a:t>A model is its corpus: bound the corpus and you bound the mind.</a:t>
+            </a:r>
+            <a:endParaRPr lang="en-US" sz="1450" dirty="0"/>
+          </a:p>
+        </p:txBody>
+      </p:sp>
+      <p:sp>
+        <p:nvSpPr>
+          <p:cNvPr id="8" name="Shape 6"/>
+          <p:cNvSpPr/>
+          <p:nvPr/>
+        </p:nvSpPr>
+        <p:spPr>
+          <a:xfrm>
+            <a:off x="640080" y="3520440"/>
+            <a:ext cx="457200" cy="457200"/>
+          </a:xfrm>
+          <a:prstGeom prst="roundRect">
+            <a:avLst>
+              <a:gd name="adj" fmla="val 16000"/>
+            </a:avLst>
+          </a:prstGeom>
+          <a:solidFill>
+            <a:srgbClr val="3F6F5F"/>
+          </a:solidFill>
+          <a:ln/>
+        </p:spPr>
+      </p:sp>
+      <p:sp>
+        <p:nvSpPr>
+          <p:cNvPr id="9" name="Text 7"/>
+          <p:cNvSpPr/>
+          <p:nvPr/>
+        </p:nvSpPr>
+        <p:spPr>
+          <a:xfrm>
+            <a:off x="640080" y="3520440"/>
+            <a:ext cx="457200" cy="457200"/>
+          </a:xfrm>
+          <a:prstGeom prst="rect">
+            <a:avLst/>
+          </a:prstGeom>
+          <a:noFill/>
+          <a:ln/>
+        </p:spPr>
+        <p:txBody>
+          <a:bodyPr wrap="square" rtlCol="0" anchor="ctr"/>
+          <a:lstStyle/>
+          <a:p>
+            <a:pPr algn="ctr" indent="0" marL="0">
+              <a:buNone/>
+            </a:pPr>
+            <a:r>
+              <a:rPr lang="en-US" sz="2000" b="1" dirty="0">
+                <a:solidFill>
+                  <a:srgbClr val="FFFFFF"/>
+                </a:solidFill>
+                <a:latin typeface="Cambria" pitchFamily="34" charset="0"/>
+                <a:ea typeface="Cambria" pitchFamily="34" charset="-122"/>
+                <a:cs typeface="Cambria" pitchFamily="34" charset="-120"/>
+              </a:rPr>
+              <a:t>2</a:t>
+            </a:r>
+            <a:endParaRPr lang="en-US" sz="2000" dirty="0"/>
+          </a:p>
+        </p:txBody>
+      </p:sp>
+      <p:sp>
+        <p:nvSpPr>
+          <p:cNvPr id="10" name="Text 8"/>
+          <p:cNvSpPr/>
+          <p:nvPr/>
+        </p:nvSpPr>
+        <p:spPr>
+          <a:xfrm>
+            <a:off x="1371600" y="3483864"/>
+            <a:ext cx="10332720" cy="411480"/>
+          </a:xfrm>
+          <a:prstGeom prst="rect">
+            <a:avLst/>
+          </a:prstGeom>
+          <a:noFill/>
+          <a:ln/>
+        </p:spPr>
+        <p:txBody>
+          <a:bodyPr wrap="square" rtlCol="0" anchor="ctr"/>
+          <a:lstStyle/>
+          <a:p>
+            <a:pPr indent="0" marL="0">
+              <a:buNone/>
+            </a:pPr>
+            <a:r>
+              <a:rPr lang="en-US" sz="1900" b="1" dirty="0">
+                <a:solidFill>
+                  <a:srgbClr val="3F6F5F"/>
+                </a:solidFill>
+                <a:latin typeface="Cambria" pitchFamily="34" charset="0"/>
+                <a:ea typeface="Cambria" pitchFamily="34" charset="-122"/>
+                <a:cs typeface="Cambria" pitchFamily="34" charset="-120"/>
+              </a:rPr>
+              <a:t>Memorization isn't reading</a:t>
+            </a:r>
+            <a:endParaRPr lang="en-US" sz="1900" dirty="0"/>
+          </a:p>
+        </p:txBody>
+      </p:sp>
+      <p:sp>
+        <p:nvSpPr>
+          <p:cNvPr id="11" name="Text 9"/>
+          <p:cNvSpPr/>
+          <p:nvPr/>
+        </p:nvSpPr>
+        <p:spPr>
+          <a:xfrm>
+            <a:off x="1371600" y="3904488"/>
+            <a:ext cx="10332720" cy="914400"/>
+          </a:xfrm>
+          <a:prstGeom prst="rect">
+            <a:avLst/>
+          </a:prstGeom>
+          <a:noFill/>
+          <a:ln/>
+        </p:spPr>
+        <p:txBody>
+          <a:bodyPr wrap="square" rtlCol="0" anchor="t">
+            <a:spAutoFit/>
+          </a:bodyPr>
+          <a:lstStyle/>
+          <a:p>
+            <a:pPr indent="0" marL="0">
+              <a:lnSpc>
+                <a:spcPct val="112000"/>
+              </a:lnSpc>
+              <a:buNone/>
+            </a:pPr>
+            <a:r>
+              <a:rPr lang="en-US" sz="1450" dirty="0">
+                <a:solidFill>
+                  <a:srgbClr val="1A1A1A"/>
+                </a:solidFill>
+                <a:latin typeface="Calibri" pitchFamily="34" charset="0"/>
+                <a:ea typeface="Calibri" pitchFamily="34" charset="-122"/>
+                <a:cs typeface="Calibri" pitchFamily="34" charset="-120"/>
+              </a:rPr>
+              <a:t>A model may recite your corpus rather than read it, a validity problem, not just ethics.</a:t>
+            </a:r>
+            <a:endParaRPr lang="en-US" sz="1450" dirty="0"/>
+          </a:p>
+        </p:txBody>
+      </p:sp>
+      <p:sp>
+        <p:nvSpPr>
+          <p:cNvPr id="12" name="Shape 10"/>
+          <p:cNvSpPr/>
+          <p:nvPr/>
+        </p:nvSpPr>
+        <p:spPr>
+          <a:xfrm>
+            <a:off x="640080" y="4983480"/>
+            <a:ext cx="457200" cy="457200"/>
+          </a:xfrm>
+          <a:prstGeom prst="roundRect">
+            <a:avLst>
+              <a:gd name="adj" fmla="val 16000"/>
+            </a:avLst>
+          </a:prstGeom>
+          <a:solidFill>
+            <a:srgbClr val="B9852F"/>
+          </a:solidFill>
+          <a:ln/>
+        </p:spPr>
+      </p:sp>
+      <p:sp>
+        <p:nvSpPr>
+          <p:cNvPr id="13" name="Text 11"/>
+          <p:cNvSpPr/>
+          <p:nvPr/>
+        </p:nvSpPr>
+        <p:spPr>
+          <a:xfrm>
+            <a:off x="640080" y="4983480"/>
+            <a:ext cx="457200" cy="457200"/>
+          </a:xfrm>
+          <a:prstGeom prst="rect">
+            <a:avLst/>
+          </a:prstGeom>
+          <a:noFill/>
+          <a:ln/>
+        </p:spPr>
+        <p:txBody>
+          <a:bodyPr wrap="square" rtlCol="0" anchor="ctr"/>
+          <a:lstStyle/>
+          <a:p>
+            <a:pPr algn="ctr" indent="0" marL="0">
+              <a:buNone/>
+            </a:pPr>
+            <a:r>
+              <a:rPr lang="en-US" sz="2000" b="1" dirty="0">
+                <a:solidFill>
+                  <a:srgbClr val="FFFFFF"/>
+                </a:solidFill>
+                <a:latin typeface="Cambria" pitchFamily="34" charset="0"/>
+                <a:ea typeface="Cambria" pitchFamily="34" charset="-122"/>
+                <a:cs typeface="Cambria" pitchFamily="34" charset="-120"/>
+              </a:rPr>
+              <a:t>3</a:t>
+            </a:r>
+            <a:endParaRPr lang="en-US" sz="2000" dirty="0"/>
+          </a:p>
+        </p:txBody>
+      </p:sp>
+      <p:sp>
+        <p:nvSpPr>
+          <p:cNvPr id="14" name="Text 12"/>
+          <p:cNvSpPr/>
+          <p:nvPr/>
+        </p:nvSpPr>
+        <p:spPr>
+          <a:xfrm>
+            <a:off x="1371600" y="4946904"/>
+            <a:ext cx="10332720" cy="411480"/>
+          </a:xfrm>
+          <a:prstGeom prst="rect">
+            <a:avLst/>
+          </a:prstGeom>
+          <a:noFill/>
+          <a:ln/>
+        </p:spPr>
+        <p:txBody>
+          <a:bodyPr wrap="square" rtlCol="0" anchor="ctr"/>
+          <a:lstStyle/>
+          <a:p>
+            <a:pPr indent="0" marL="0">
+              <a:buNone/>
+            </a:pPr>
+            <a:r>
+              <a:rPr lang="en-US" sz="1900" b="1" dirty="0">
+                <a:solidFill>
+                  <a:srgbClr val="B9852F"/>
+                </a:solidFill>
+                <a:latin typeface="Cambria" pitchFamily="34" charset="0"/>
+                <a:ea typeface="Cambria" pitchFamily="34" charset="-122"/>
+                <a:cs typeface="Cambria" pitchFamily="34" charset="-120"/>
+              </a:rPr>
+              <a:t>Kill it, then keep it</a:t>
+            </a:r>
+            <a:endParaRPr lang="en-US" sz="1900" dirty="0"/>
+          </a:p>
+        </p:txBody>
+      </p:sp>
+      <p:sp>
+        <p:nvSpPr>
+          <p:cNvPr id="15" name="Text 13"/>
+          <p:cNvSpPr/>
+          <p:nvPr/>
+        </p:nvSpPr>
+        <p:spPr>
+          <a:xfrm>
+            <a:off x="1371600" y="5367528"/>
+            <a:ext cx="10332720" cy="914400"/>
+          </a:xfrm>
+          <a:prstGeom prst="rect">
+            <a:avLst/>
+          </a:prstGeom>
+          <a:noFill/>
+          <a:ln/>
+        </p:spPr>
+        <p:txBody>
+          <a:bodyPr wrap="square" rtlCol="0" anchor="t">
+            <a:spAutoFit/>
+          </a:bodyPr>
+          <a:lstStyle/>
+          <a:p>
+            <a:pPr indent="0" marL="0">
+              <a:lnSpc>
+                <a:spcPct val="112000"/>
+              </a:lnSpc>
+              <a:buNone/>
+            </a:pPr>
+            <a:r>
+              <a:rPr lang="en-US" sz="1450" dirty="0">
+                <a:solidFill>
+                  <a:srgbClr val="1A1A1A"/>
+                </a:solidFill>
+                <a:latin typeface="Calibri" pitchFamily="34" charset="0"/>
+                <a:ea typeface="Calibri" pitchFamily="34" charset="-122"/>
+                <a:cs typeface="Calibri" pitchFamily="34" charset="-120"/>
+              </a:rPr>
+              <a:t>The Week 2 trial move, now turned on your own finding.</a:t>
+            </a:r>
+            <a:endParaRPr lang="en-US" sz="1450" dirty="0"/>
+          </a:p>
+        </p:txBody>
+      </p:sp>
+    </p:spTree>
+  </p:cSld>
+  <p:clrMapOvr>
+    <a:masterClrMapping/>
+  </p:clrMapOvr>
+</p:sld>
+</file>
+
+<file path=ppt/slides/slide11.xml><?xml version="1.0" encoding="utf-8"?>
+<p:sld xmlns:a="http://schemas.openxmlformats.org/drawingml/2006/main" xmlns:r="http://schemas.openxmlformats.org/officeDocument/2006/relationships" xmlns:p="http://schemas.openxmlformats.org/presentationml/2006/main">
+  <p:cSld name="Slide 11">
+    <p:bg>
+      <p:bgPr>
+        <a:solidFill>
+          <a:srgbClr val="4E261D"/>
+        </a:solidFill>
+      </p:bgPr>
+    </p:bg>
+    <p:spTree>
+      <p:nvGrpSpPr>
+        <p:cNvPr id="1" name=""/>
+        <p:cNvGrpSpPr/>
+        <p:nvPr/>
+      </p:nvGrpSpPr>
+      <p:grpSpPr>
+        <a:xfrm>
+          <a:off x="0" y="0"/>
+          <a:ext cx="0" cy="0"/>
+          <a:chOff x="0" y="0"/>
+          <a:chExt cx="0" cy="0"/>
+        </a:xfrm>
+      </p:grpSpPr>
+      <p:sp>
+        <p:nvSpPr>
+          <p:cNvPr id="2" name="Text 0"/>
+          <p:cNvSpPr/>
+          <p:nvPr/>
+        </p:nvSpPr>
+        <p:spPr>
+          <a:xfrm>
+            <a:off x="640080" y="1005840"/>
+            <a:ext cx="8229600" cy="320040"/>
+          </a:xfrm>
+          <a:prstGeom prst="rect">
+            <a:avLst/>
+          </a:prstGeom>
+          <a:noFill/>
+          <a:ln/>
+        </p:spPr>
+        <p:txBody>
+          <a:bodyPr wrap="square" rtlCol="0" anchor="ctr"/>
+          <a:lstStyle/>
+          <a:p>
+            <a:pPr indent="0" marL="0">
+              <a:buNone/>
+            </a:pPr>
+            <a:r>
+              <a:rPr lang="en-US" sz="1300" b="1" spc="300" kern="0" dirty="0">
+                <a:solidFill>
+                  <a:srgbClr val="B9852F"/>
+                </a:solidFill>
+                <a:latin typeface="Calibri" pitchFamily="34" charset="0"/>
+                <a:ea typeface="Calibri" pitchFamily="34" charset="-122"/>
+                <a:cs typeface="Calibri" pitchFamily="34" charset="-120"/>
+              </a:rPr>
+              <a:t>THE CHECK, AI CLOSED</a:t>
+            </a:r>
+            <a:endParaRPr lang="en-US" sz="1300" dirty="0"/>
+          </a:p>
+        </p:txBody>
+      </p:sp>
+      <p:sp>
+        <p:nvSpPr>
+          <p:cNvPr id="3" name="Text 1"/>
+          <p:cNvSpPr/>
+          <p:nvPr/>
+        </p:nvSpPr>
+        <p:spPr>
+          <a:xfrm>
+            <a:off x="640080" y="1645920"/>
+            <a:ext cx="8686800" cy="3108960"/>
+          </a:xfrm>
+          <a:prstGeom prst="rect">
+            <a:avLst/>
+          </a:prstGeom>
+          <a:noFill/>
+          <a:ln/>
+        </p:spPr>
+        <p:txBody>
+          <a:bodyPr wrap="square" rtlCol="0" anchor="t">
+            <a:spAutoFit/>
+          </a:bodyPr>
+          <a:lstStyle/>
+          <a:p>
+            <a:pPr indent="0" marL="0">
+              <a:lnSpc>
+                <a:spcPct val="115000"/>
+              </a:lnSpc>
+              <a:buNone/>
+            </a:pPr>
+            <a:r>
+              <a:rPr lang="en-US" sz="2600" dirty="0">
+                <a:solidFill>
+                  <a:srgbClr val="FFFFFF"/>
+                </a:solidFill>
+                <a:latin typeface="Cambria" pitchFamily="34" charset="0"/>
+                <a:ea typeface="Cambria" pitchFamily="34" charset="-122"/>
+                <a:cs typeface="Cambria" pitchFamily="34" charset="-120"/>
+              </a:rPr>
+              <a:t>Explain it: your headline finding, and what it does not show. (Competencies 3, 4.)</a:t>
+            </a:r>
+            <a:endParaRPr lang="en-US" sz="2600" dirty="0"/>
+          </a:p>
+        </p:txBody>
+      </p:sp>
+      <p:sp>
+        <p:nvSpPr>
+          <p:cNvPr id="4" name="Text 2"/>
+          <p:cNvSpPr/>
+          <p:nvPr/>
+        </p:nvSpPr>
+        <p:spPr>
+          <a:xfrm>
+            <a:off x="640080" y="6126480"/>
+            <a:ext cx="7315200" cy="365760"/>
+          </a:xfrm>
+          <a:prstGeom prst="rect">
+            <a:avLst/>
+          </a:prstGeom>
+          <a:noFill/>
+          <a:ln/>
+        </p:spPr>
+        <p:txBody>
+          <a:bodyPr wrap="square" rtlCol="0" anchor="ctr"/>
+          <a:lstStyle/>
+          <a:p>
+            <a:pPr indent="0" marL="0">
+              <a:buNone/>
+            </a:pPr>
+            <a:r>
+              <a:rPr lang="en-US" sz="1200" dirty="0">
+                <a:solidFill>
+                  <a:srgbClr val="E8DCD6"/>
+                </a:solidFill>
+                <a:latin typeface="Calibri" pitchFamily="34" charset="0"/>
+                <a:ea typeface="Calibri" pitchFamily="34" charset="-122"/>
+                <a:cs typeface="Calibri" pitchFamily="34" charset="-120"/>
+              </a:rPr>
+              <a:t>Culture as Data  ·  Week 8</a:t>
+            </a:r>
+            <a:endParaRPr lang="en-US" sz="1200" dirty="0"/>
+          </a:p>
+        </p:txBody>
+      </p:sp>
+      <p:sp>
+        <p:nvSpPr>
+          <p:cNvPr id="5" name="Shape 3"/>
+          <p:cNvSpPr/>
+          <p:nvPr/>
+        </p:nvSpPr>
+        <p:spPr>
+          <a:xfrm>
+            <a:off x="10473555" y="5054087"/>
+            <a:ext cx="78741" cy="78741"/>
+          </a:xfrm>
+          <a:prstGeom prst="ellipse">
+            <a:avLst/>
+          </a:prstGeom>
+          <a:solidFill>
+            <a:srgbClr val="7A3B2E"/>
+          </a:solidFill>
+          <a:ln/>
+        </p:spPr>
+      </p:sp>
+      <p:sp>
+        <p:nvSpPr>
+          <p:cNvPr id="6" name="Shape 4"/>
+          <p:cNvSpPr/>
+          <p:nvPr/>
+        </p:nvSpPr>
+        <p:spPr>
+          <a:xfrm>
+            <a:off x="9755671" y="5241251"/>
+            <a:ext cx="78006" cy="78006"/>
+          </a:xfrm>
+          <a:prstGeom prst="ellipse">
+            <a:avLst/>
+          </a:prstGeom>
+          <a:solidFill>
+            <a:srgbClr val="3F6F5F"/>
+          </a:solidFill>
+          <a:ln/>
+        </p:spPr>
+      </p:sp>
+      <p:sp>
+        <p:nvSpPr>
+          <p:cNvPr id="7" name="Shape 5"/>
+          <p:cNvSpPr/>
+          <p:nvPr/>
+        </p:nvSpPr>
+        <p:spPr>
+          <a:xfrm>
+            <a:off x="10383141" y="6003513"/>
+            <a:ext cx="66475" cy="66475"/>
+          </a:xfrm>
+          <a:prstGeom prst="ellipse">
+            <a:avLst/>
+          </a:prstGeom>
+          <a:solidFill>
+            <a:srgbClr val="B9852F"/>
+          </a:solidFill>
+          <a:ln/>
+        </p:spPr>
+      </p:sp>
+      <p:sp>
+        <p:nvSpPr>
+          <p:cNvPr id="8" name="Shape 6"/>
+          <p:cNvSpPr/>
+          <p:nvPr/>
+        </p:nvSpPr>
+        <p:spPr>
+          <a:xfrm>
+            <a:off x="10862443" y="4590054"/>
+            <a:ext cx="67009" cy="67009"/>
+          </a:xfrm>
+          <a:prstGeom prst="ellipse">
+            <a:avLst/>
+          </a:prstGeom>
+          <a:solidFill>
+            <a:srgbClr val="7A3B2E"/>
+          </a:solidFill>
+          <a:ln/>
+        </p:spPr>
+      </p:sp>
+      <p:sp>
+        <p:nvSpPr>
+          <p:cNvPr id="9" name="Shape 7"/>
+          <p:cNvSpPr/>
+          <p:nvPr/>
+        </p:nvSpPr>
+        <p:spPr>
+          <a:xfrm>
+            <a:off x="9700059" y="5199492"/>
+            <a:ext cx="47604" cy="47604"/>
+          </a:xfrm>
+          <a:prstGeom prst="ellipse">
+            <a:avLst/>
+          </a:prstGeom>
+          <a:solidFill>
+            <a:srgbClr val="3F6F5F"/>
+          </a:solidFill>
+          <a:ln/>
+        </p:spPr>
+      </p:sp>
+      <p:sp>
+        <p:nvSpPr>
+          <p:cNvPr id="10" name="Shape 8"/>
+          <p:cNvSpPr/>
+          <p:nvPr/>
+        </p:nvSpPr>
+        <p:spPr>
+          <a:xfrm>
+            <a:off x="10523109" y="5081010"/>
+            <a:ext cx="85984" cy="85984"/>
+          </a:xfrm>
+          <a:prstGeom prst="ellipse">
+            <a:avLst/>
+          </a:prstGeom>
+          <a:solidFill>
+            <a:srgbClr val="B9852F"/>
+          </a:solidFill>
+          <a:ln/>
+        </p:spPr>
+      </p:sp>
+      <p:sp>
+        <p:nvSpPr>
+          <p:cNvPr id="11" name="Shape 9"/>
+          <p:cNvSpPr/>
+          <p:nvPr/>
+        </p:nvSpPr>
+        <p:spPr>
+          <a:xfrm>
+            <a:off x="9277751" y="4958505"/>
+            <a:ext cx="95281" cy="95281"/>
+          </a:xfrm>
+          <a:prstGeom prst="ellipse">
+            <a:avLst/>
+          </a:prstGeom>
+          <a:solidFill>
+            <a:srgbClr val="7A3B2E"/>
+          </a:solidFill>
+          <a:ln/>
+        </p:spPr>
+      </p:sp>
+      <p:sp>
+        <p:nvSpPr>
+          <p:cNvPr id="12" name="Shape 10"/>
+          <p:cNvSpPr/>
+          <p:nvPr/>
+        </p:nvSpPr>
+        <p:spPr>
+          <a:xfrm>
+            <a:off x="9591107" y="5555879"/>
+            <a:ext cx="98355" cy="98355"/>
+          </a:xfrm>
+          <a:prstGeom prst="ellipse">
+            <a:avLst/>
+          </a:prstGeom>
+          <a:solidFill>
+            <a:srgbClr val="3F6F5F"/>
+          </a:solidFill>
+          <a:ln/>
+        </p:spPr>
+      </p:sp>
+      <p:sp>
+        <p:nvSpPr>
+          <p:cNvPr id="13" name="Shape 11"/>
+          <p:cNvSpPr/>
+          <p:nvPr/>
+        </p:nvSpPr>
+        <p:spPr>
+          <a:xfrm>
+            <a:off x="9969657" y="5859671"/>
+            <a:ext cx="63202" cy="63202"/>
+          </a:xfrm>
+          <a:prstGeom prst="ellipse">
+            <a:avLst/>
+          </a:prstGeom>
+          <a:solidFill>
+            <a:srgbClr val="B9852F"/>
+          </a:solidFill>
+          <a:ln/>
+        </p:spPr>
+      </p:sp>
+      <p:sp>
+        <p:nvSpPr>
+          <p:cNvPr id="14" name="Shape 12"/>
+          <p:cNvSpPr/>
+          <p:nvPr/>
+        </p:nvSpPr>
+        <p:spPr>
+          <a:xfrm>
+            <a:off x="11480199" y="4856422"/>
+            <a:ext cx="67546" cy="67546"/>
+          </a:xfrm>
+          <a:prstGeom prst="ellipse">
+            <a:avLst/>
+          </a:prstGeom>
+          <a:solidFill>
+            <a:srgbClr val="7A3B2E"/>
+          </a:solidFill>
+          <a:ln/>
+        </p:spPr>
+      </p:sp>
+      <p:sp>
+        <p:nvSpPr>
+          <p:cNvPr id="15" name="Shape 13"/>
+          <p:cNvSpPr/>
+          <p:nvPr/>
+        </p:nvSpPr>
+        <p:spPr>
+          <a:xfrm>
+            <a:off x="10068896" y="5007391"/>
+            <a:ext cx="79383" cy="79383"/>
+          </a:xfrm>
+          <a:prstGeom prst="ellipse">
+            <a:avLst/>
+          </a:prstGeom>
+          <a:solidFill>
+            <a:srgbClr val="3F6F5F"/>
+          </a:solidFill>
+          <a:ln/>
+        </p:spPr>
+      </p:sp>
+      <p:sp>
+        <p:nvSpPr>
+          <p:cNvPr id="16" name="Shape 14"/>
+          <p:cNvSpPr/>
+          <p:nvPr/>
+        </p:nvSpPr>
+        <p:spPr>
+          <a:xfrm>
+            <a:off x="9362865" y="5299118"/>
+            <a:ext cx="66710" cy="66710"/>
+          </a:xfrm>
+          <a:prstGeom prst="ellipse">
+            <a:avLst/>
+          </a:prstGeom>
+          <a:solidFill>
+            <a:srgbClr val="B9852F"/>
+          </a:solidFill>
+          <a:ln/>
+        </p:spPr>
+      </p:sp>
+      <p:sp>
+        <p:nvSpPr>
+          <p:cNvPr id="17" name="Shape 15"/>
+          <p:cNvSpPr/>
+          <p:nvPr/>
+        </p:nvSpPr>
+        <p:spPr>
+          <a:xfrm>
+            <a:off x="10428908" y="4718144"/>
+            <a:ext cx="52385" cy="52385"/>
+          </a:xfrm>
+          <a:prstGeom prst="ellipse">
+            <a:avLst/>
+          </a:prstGeom>
+          <a:solidFill>
+            <a:srgbClr val="7A3B2E"/>
+          </a:solidFill>
+          <a:ln/>
+        </p:spPr>
+      </p:sp>
+      <p:sp>
+        <p:nvSpPr>
+          <p:cNvPr id="18" name="Shape 16"/>
+          <p:cNvSpPr/>
+          <p:nvPr/>
+        </p:nvSpPr>
+        <p:spPr>
+          <a:xfrm>
+            <a:off x="9213184" y="5725728"/>
+            <a:ext cx="59269" cy="59269"/>
+          </a:xfrm>
+          <a:prstGeom prst="ellipse">
+            <a:avLst/>
+          </a:prstGeom>
+          <a:solidFill>
+            <a:srgbClr val="3F6F5F"/>
+          </a:solidFill>
+          <a:ln/>
+        </p:spPr>
+      </p:sp>
+    </p:spTree>
+  </p:cSld>
+  <p:clrMapOvr>
+    <a:masterClrMapping/>
+  </p:clrMapOvr>
+</p:sld>
+</file>
+
 <file path=ppt/slides/slide2.xml><?xml version="1.0" encoding="utf-8"?>
 <p:sld xmlns:a="http://schemas.openxmlformats.org/drawingml/2006/main" xmlns:r="http://schemas.openxmlformats.org/officeDocument/2006/relationships" xmlns:p="http://schemas.openxmlformats.org/presentationml/2006/main">
   <p:cSld name="Slide 2">
@@ -2461,14 +3704,34 @@
       </p:grpSpPr>
       <p:sp>
         <p:nvSpPr>
-          <p:cNvPr id="2" name="Text 0"/>
-          <p:cNvSpPr/>
-          <p:nvPr/>
-        </p:nvSpPr>
-        <p:spPr>
-          <a:xfrm>
-            <a:off x="640080" y="731520"/>
-            <a:ext cx="10058400" cy="731520"/>
+          <p:cNvPr id="2" name="Shape 0"/>
+          <p:cNvSpPr/>
+          <p:nvPr/>
+        </p:nvSpPr>
+        <p:spPr>
+          <a:xfrm>
+            <a:off x="0" y="0"/>
+            <a:ext cx="164592" cy="6858000"/>
+          </a:xfrm>
+          <a:prstGeom prst="rect">
+            <a:avLst/>
+          </a:prstGeom>
+          <a:solidFill>
+            <a:srgbClr val="7A3B2E"/>
+          </a:solidFill>
+          <a:ln/>
+        </p:spPr>
+      </p:sp>
+      <p:sp>
+        <p:nvSpPr>
+          <p:cNvPr id="3" name="Text 1"/>
+          <p:cNvSpPr/>
+          <p:nvPr/>
+        </p:nvSpPr>
+        <p:spPr>
+          <a:xfrm>
+            <a:off x="640080" y="640080"/>
+            <a:ext cx="10058400" cy="320040"/>
           </a:xfrm>
           <a:prstGeom prst="rect">
             <a:avLst/>
@@ -2478,6 +3741,47 @@
         </p:spPr>
         <p:txBody>
           <a:bodyPr wrap="square" rtlCol="0" anchor="ctr"/>
+          <a:lstStyle/>
+          <a:p>
+            <a:pPr indent="0" marL="0">
+              <a:buNone/>
+            </a:pPr>
+            <a:r>
+              <a:rPr lang="en-US" sz="1200" b="1" spc="300" kern="0" dirty="0">
+                <a:solidFill>
+                  <a:srgbClr val="7A3B2E"/>
+                </a:solidFill>
+                <a:latin typeface="Calibri" pitchFamily="34" charset="0"/>
+                <a:ea typeface="Calibri" pitchFamily="34" charset="-122"/>
+                <a:cs typeface="Calibri" pitchFamily="34" charset="-120"/>
+              </a:rPr>
+              <a:t>WEEK 8 · THE MATERIAL</a:t>
+            </a:r>
+            <a:endParaRPr lang="en-US" sz="1200" dirty="0"/>
+          </a:p>
+        </p:txBody>
+      </p:sp>
+      <p:sp>
+        <p:nvSpPr>
+          <p:cNvPr id="4" name="Text 2"/>
+          <p:cNvSpPr/>
+          <p:nvPr/>
+        </p:nvSpPr>
+        <p:spPr>
+          <a:xfrm>
+            <a:off x="640080" y="1005840"/>
+            <a:ext cx="10881360" cy="914400"/>
+          </a:xfrm>
+          <a:prstGeom prst="rect">
+            <a:avLst/>
+          </a:prstGeom>
+          <a:noFill/>
+          <a:ln/>
+        </p:spPr>
+        <p:txBody>
+          <a:bodyPr wrap="square" rtlCol="0" anchor="t">
+            <a:spAutoFit/>
+          </a:bodyPr>
           <a:lstStyle/>
           <a:p>
             <a:pPr indent="0" marL="0">
@@ -2492,7 +3796,7 @@
                 <a:ea typeface="Cambria" pitchFamily="34" charset="-122"/>
                 <a:cs typeface="Cambria" pitchFamily="34" charset="-120"/>
               </a:rPr>
-              <a:t>Three modes today</a:t>
+              <a:t>Kill it, then keep it</a:t>
             </a:r>
             <a:endParaRPr lang="en-US" sz="3000" dirty="0"/>
           </a:p>
@@ -2500,134 +3804,98 @@
       </p:sp>
       <p:sp>
         <p:nvSpPr>
-          <p:cNvPr id="3" name="Text 1"/>
-          <p:cNvSpPr/>
-          <p:nvPr/>
-        </p:nvSpPr>
-        <p:spPr>
-          <a:xfrm>
-            <a:off x="640080" y="1417320"/>
-            <a:ext cx="10058400" cy="365760"/>
-          </a:xfrm>
-          <a:prstGeom prst="rect">
-            <a:avLst/>
-          </a:prstGeom>
-          <a:noFill/>
-          <a:ln/>
-        </p:spPr>
-        <p:txBody>
-          <a:bodyPr wrap="square" rtlCol="0" anchor="ctr"/>
+          <p:cNvPr id="5" name="Shape 3"/>
+          <p:cNvSpPr/>
+          <p:nvPr/>
+        </p:nvSpPr>
+        <p:spPr>
+          <a:xfrm>
+            <a:off x="640080" y="2331720"/>
+            <a:ext cx="201168" cy="201168"/>
+          </a:xfrm>
+          <a:prstGeom prst="ellipse">
+            <a:avLst/>
+          </a:prstGeom>
+          <a:solidFill>
+            <a:srgbClr val="7A3B2E"/>
+          </a:solidFill>
+          <a:ln/>
+        </p:spPr>
+      </p:sp>
+      <p:sp>
+        <p:nvSpPr>
+          <p:cNvPr id="6" name="Text 4"/>
+          <p:cNvSpPr/>
+          <p:nvPr/>
+        </p:nvSpPr>
+        <p:spPr>
+          <a:xfrm>
+            <a:off x="1097280" y="2240280"/>
+            <a:ext cx="10607040" cy="1017270"/>
+          </a:xfrm>
+          <a:prstGeom prst="rect">
+            <a:avLst/>
+          </a:prstGeom>
+          <a:noFill/>
+          <a:ln/>
+        </p:spPr>
+        <p:txBody>
+          <a:bodyPr wrap="square" rtlCol="0" anchor="t">
+            <a:spAutoFit/>
+          </a:bodyPr>
           <a:lstStyle/>
           <a:p>
             <a:pPr indent="0" marL="0">
-              <a:buNone/>
-            </a:pPr>
-            <a:r>
-              <a:rPr lang="en-US" sz="1400" i="1" dirty="0">
-                <a:solidFill>
-                  <a:srgbClr val="6B6B63"/>
+              <a:lnSpc>
+                <a:spcPct val="112000"/>
+              </a:lnSpc>
+              <a:buNone/>
+            </a:pPr>
+            <a:r>
+              <a:rPr lang="en-US" sz="1650" dirty="0">
+                <a:solidFill>
+                  <a:srgbClr val="1A1A1A"/>
                 </a:solidFill>
                 <a:latin typeface="Calibri" pitchFamily="34" charset="0"/>
                 <a:ea typeface="Calibri" pitchFamily="34" charset="-122"/>
                 <a:cs typeface="Calibri" pitchFamily="34" charset="-120"/>
               </a:rPr>
-              <a:t>about a third of the session each</a:t>
-            </a:r>
-            <a:endParaRPr lang="en-US" sz="1400" dirty="0"/>
-          </a:p>
-        </p:txBody>
-      </p:sp>
-      <p:sp>
-        <p:nvSpPr>
-          <p:cNvPr id="4" name="Shape 2"/>
-          <p:cNvSpPr/>
-          <p:nvPr/>
-        </p:nvSpPr>
-        <p:spPr>
-          <a:xfrm>
-            <a:off x="640080" y="2194560"/>
-            <a:ext cx="3383280" cy="3291840"/>
-          </a:xfrm>
-          <a:prstGeom prst="roundRect">
-            <a:avLst>
-              <a:gd name="adj" fmla="val 3333"/>
-            </a:avLst>
-          </a:prstGeom>
-          <a:solidFill>
-            <a:srgbClr val="F4EEE8"/>
-          </a:solidFill>
-          <a:ln/>
-        </p:spPr>
-      </p:sp>
-      <p:sp>
-        <p:nvSpPr>
-          <p:cNvPr id="5" name="Shape 3"/>
-          <p:cNvSpPr/>
-          <p:nvPr/>
-        </p:nvSpPr>
-        <p:spPr>
-          <a:xfrm>
-            <a:off x="1051560" y="2606040"/>
-            <a:ext cx="548640" cy="548640"/>
+              <a:t>The Bollen move, turned on your own finding: remove the slice that worries you most and re-run.</a:t>
+            </a:r>
+            <a:endParaRPr lang="en-US" sz="1650" dirty="0"/>
+          </a:p>
+        </p:txBody>
+      </p:sp>
+      <p:sp>
+        <p:nvSpPr>
+          <p:cNvPr id="7" name="Shape 5"/>
+          <p:cNvSpPr/>
+          <p:nvPr/>
+        </p:nvSpPr>
+        <p:spPr>
+          <a:xfrm>
+            <a:off x="640080" y="3348990"/>
+            <a:ext cx="201168" cy="201168"/>
           </a:xfrm>
           <a:prstGeom prst="ellipse">
             <a:avLst/>
           </a:prstGeom>
           <a:solidFill>
-            <a:srgbClr val="7A3B2E"/>
-          </a:solidFill>
-          <a:ln/>
-        </p:spPr>
-      </p:sp>
-      <p:sp>
-        <p:nvSpPr>
-          <p:cNvPr id="6" name="Text 4"/>
-          <p:cNvSpPr/>
-          <p:nvPr/>
-        </p:nvSpPr>
-        <p:spPr>
-          <a:xfrm>
-            <a:off x="1005840" y="3383280"/>
-            <a:ext cx="2651760" cy="548640"/>
-          </a:xfrm>
-          <a:prstGeom prst="rect">
-            <a:avLst/>
-          </a:prstGeom>
-          <a:noFill/>
-          <a:ln/>
-        </p:spPr>
-        <p:txBody>
-          <a:bodyPr wrap="square" rtlCol="0" anchor="ctr"/>
-          <a:lstStyle/>
-          <a:p>
-            <a:pPr indent="0" marL="0">
-              <a:buNone/>
-            </a:pPr>
-            <a:r>
-              <a:rPr lang="en-US" sz="2100" b="1" dirty="0">
-                <a:solidFill>
-                  <a:srgbClr val="1A1A1A"/>
-                </a:solidFill>
-                <a:latin typeface="Cambria" pitchFamily="34" charset="0"/>
-                <a:ea typeface="Cambria" pitchFamily="34" charset="-122"/>
-                <a:cs typeface="Cambria" pitchFamily="34" charset="-120"/>
-              </a:rPr>
-              <a:t>Lecture / demo</a:t>
-            </a:r>
-            <a:endParaRPr lang="en-US" sz="2100" dirty="0"/>
-          </a:p>
-        </p:txBody>
-      </p:sp>
-      <p:sp>
-        <p:nvSpPr>
-          <p:cNvPr id="7" name="Text 5"/>
-          <p:cNvSpPr/>
-          <p:nvPr/>
-        </p:nvSpPr>
-        <p:spPr>
-          <a:xfrm>
-            <a:off x="1005840" y="3977640"/>
-            <a:ext cx="2651760" cy="1371600"/>
+            <a:srgbClr val="3F6F5F"/>
+          </a:solidFill>
+          <a:ln/>
+        </p:spPr>
+      </p:sp>
+      <p:sp>
+        <p:nvSpPr>
+          <p:cNvPr id="8" name="Text 6"/>
+          <p:cNvSpPr/>
+          <p:nvPr/>
+        </p:nvSpPr>
+        <p:spPr>
+          <a:xfrm>
+            <a:off x="1097280" y="3257550"/>
+            <a:ext cx="10607040" cy="1017270"/>
           </a:xfrm>
           <a:prstGeom prst="rect">
             <a:avLst/>
@@ -2643,12 +3911,12 @@
           <a:p>
             <a:pPr indent="0" marL="0">
               <a:lnSpc>
-                <a:spcPct val="115000"/>
+                <a:spcPct val="112000"/>
               </a:lnSpc>
               <a:buNone/>
             </a:pPr>
             <a:r>
-              <a:rPr lang="en-US" sz="1500" dirty="0">
+              <a:rPr lang="en-US" sz="1650" dirty="0">
                 <a:solidFill>
                   <a:srgbClr val="1A1A1A"/>
                 </a:solidFill>
@@ -2656,33 +3924,11 @@
                 <a:ea typeface="Calibri" pitchFamily="34" charset="-122"/>
                 <a:cs typeface="Calibri" pitchFamily="34" charset="-120"/>
               </a:rPr>
-              <a:t>What a trained model is: a compression of its corpus</a:t>
-            </a:r>
-            <a:endParaRPr lang="en-US" sz="1500" dirty="0"/>
-          </a:p>
-        </p:txBody>
-      </p:sp>
-      <p:sp>
-        <p:nvSpPr>
-          <p:cNvPr id="8" name="Shape 6"/>
-          <p:cNvSpPr/>
-          <p:nvPr/>
-        </p:nvSpPr>
-        <p:spPr>
-          <a:xfrm>
-            <a:off x="4526280" y="2194560"/>
-            <a:ext cx="3383280" cy="3291840"/>
-          </a:xfrm>
-          <a:prstGeom prst="roundRect">
-            <a:avLst>
-              <a:gd name="adj" fmla="val 3333"/>
-            </a:avLst>
-          </a:prstGeom>
-          <a:solidFill>
-            <a:srgbClr val="F4EEE8"/>
-          </a:solidFill>
-          <a:ln/>
-        </p:spPr>
+              <a:t>Survives? Say so, with the check shown. Dies? You just learned what your finding was made of.</a:t>
+            </a:r>
+            <a:endParaRPr lang="en-US" sz="1650" dirty="0"/>
+          </a:p>
+        </p:txBody>
       </p:sp>
       <p:sp>
         <p:nvSpPr>
@@ -2692,14 +3938,14 @@
         </p:nvSpPr>
         <p:spPr>
           <a:xfrm>
-            <a:off x="4937760" y="2606040"/>
-            <a:ext cx="548640" cy="548640"/>
+            <a:off x="640080" y="4366260"/>
+            <a:ext cx="201168" cy="201168"/>
           </a:xfrm>
           <a:prstGeom prst="ellipse">
             <a:avLst/>
           </a:prstGeom>
           <a:solidFill>
-            <a:srgbClr val="3F6F5F"/>
+            <a:srgbClr val="B9852F"/>
           </a:solidFill>
           <a:ln/>
         </p:spPr>
@@ -2712,47 +3958,8 @@
         </p:nvSpPr>
         <p:spPr>
           <a:xfrm>
-            <a:off x="4892040" y="3383280"/>
-            <a:ext cx="2651760" cy="548640"/>
-          </a:xfrm>
-          <a:prstGeom prst="rect">
-            <a:avLst/>
-          </a:prstGeom>
-          <a:noFill/>
-          <a:ln/>
-        </p:spPr>
-        <p:txBody>
-          <a:bodyPr wrap="square" rtlCol="0" anchor="ctr"/>
-          <a:lstStyle/>
-          <a:p>
-            <a:pPr indent="0" marL="0">
-              <a:buNone/>
-            </a:pPr>
-            <a:r>
-              <a:rPr lang="en-US" sz="2100" b="1" dirty="0">
-                <a:solidFill>
-                  <a:srgbClr val="1A1A1A"/>
-                </a:solidFill>
-                <a:latin typeface="Cambria" pitchFamily="34" charset="0"/>
-                <a:ea typeface="Cambria" pitchFamily="34" charset="-122"/>
-                <a:cs typeface="Cambria" pitchFamily="34" charset="-120"/>
-              </a:rPr>
-              <a:t>Workshop</a:t>
-            </a:r>
-            <a:endParaRPr lang="en-US" sz="2100" dirty="0"/>
-          </a:p>
-        </p:txBody>
-      </p:sp>
-      <p:sp>
-        <p:nvSpPr>
-          <p:cNvPr id="11" name="Text 9"/>
-          <p:cNvSpPr/>
-          <p:nvPr/>
-        </p:nvSpPr>
-        <p:spPr>
-          <a:xfrm>
-            <a:off x="4892040" y="3977640"/>
-            <a:ext cx="2651760" cy="1371600"/>
+            <a:off x="1097280" y="4274820"/>
+            <a:ext cx="10607040" cy="1017270"/>
           </a:xfrm>
           <a:prstGeom prst="rect">
             <a:avLst/>
@@ -2768,12 +3975,12 @@
           <a:p>
             <a:pPr indent="0" marL="0">
               <a:lnSpc>
-                <a:spcPct val="115000"/>
+                <a:spcPct val="112000"/>
               </a:lnSpc>
               <a:buNone/>
             </a:pPr>
             <a:r>
-              <a:rPr lang="en-US" sz="1500" dirty="0">
+              <a:rPr lang="en-US" sz="1650" dirty="0">
                 <a:solidFill>
                   <a:srgbClr val="1A1A1A"/>
                 </a:solidFill>
@@ -2781,103 +3988,42 @@
                 <a:ea typeface="Calibri" pitchFamily="34" charset="-122"/>
                 <a:cs typeface="Calibri" pitchFamily="34" charset="-120"/>
               </a:rPr>
-              <a:t>Build hands-on on your own data.</a:t>
-            </a:r>
-            <a:endParaRPr lang="en-US" sz="1500" dirty="0"/>
-          </a:p>
-        </p:txBody>
-      </p:sp>
-      <p:sp>
-        <p:nvSpPr>
-          <p:cNvPr id="12" name="Shape 10"/>
-          <p:cNvSpPr/>
-          <p:nvPr/>
-        </p:nvSpPr>
-        <p:spPr>
-          <a:xfrm>
-            <a:off x="8412480" y="2194560"/>
-            <a:ext cx="3383280" cy="3291840"/>
-          </a:xfrm>
-          <a:prstGeom prst="roundRect">
-            <a:avLst>
-              <a:gd name="adj" fmla="val 3333"/>
-            </a:avLst>
-          </a:prstGeom>
-          <a:solidFill>
-            <a:srgbClr val="F4EEE8"/>
-          </a:solidFill>
-          <a:ln/>
-        </p:spPr>
-      </p:sp>
-      <p:sp>
-        <p:nvSpPr>
-          <p:cNvPr id="13" name="Shape 11"/>
-          <p:cNvSpPr/>
-          <p:nvPr/>
-        </p:nvSpPr>
-        <p:spPr>
-          <a:xfrm>
-            <a:off x="8823960" y="2606040"/>
-            <a:ext cx="548640" cy="548640"/>
+              <a:t>Minimum bar: ONE robustness check, the one that most threatens your result.</a:t>
+            </a:r>
+            <a:endParaRPr lang="en-US" sz="1650" dirty="0"/>
+          </a:p>
+        </p:txBody>
+      </p:sp>
+      <p:sp>
+        <p:nvSpPr>
+          <p:cNvPr id="11" name="Shape 9"/>
+          <p:cNvSpPr/>
+          <p:nvPr/>
+        </p:nvSpPr>
+        <p:spPr>
+          <a:xfrm>
+            <a:off x="640080" y="5383530"/>
+            <a:ext cx="201168" cy="201168"/>
           </a:xfrm>
           <a:prstGeom prst="ellipse">
             <a:avLst/>
           </a:prstGeom>
           <a:solidFill>
-            <a:srgbClr val="B9852F"/>
-          </a:solidFill>
-          <a:ln/>
-        </p:spPr>
-      </p:sp>
-      <p:sp>
-        <p:nvSpPr>
-          <p:cNvPr id="14" name="Text 12"/>
-          <p:cNvSpPr/>
-          <p:nvPr/>
-        </p:nvSpPr>
-        <p:spPr>
-          <a:xfrm>
-            <a:off x="8778240" y="3383280"/>
-            <a:ext cx="2651760" cy="548640"/>
-          </a:xfrm>
-          <a:prstGeom prst="rect">
-            <a:avLst/>
-          </a:prstGeom>
-          <a:noFill/>
-          <a:ln/>
-        </p:spPr>
-        <p:txBody>
-          <a:bodyPr wrap="square" rtlCol="0" anchor="ctr"/>
-          <a:lstStyle/>
-          <a:p>
-            <a:pPr indent="0" marL="0">
-              <a:buNone/>
-            </a:pPr>
-            <a:r>
-              <a:rPr lang="en-US" sz="2100" b="1" dirty="0">
-                <a:solidFill>
-                  <a:srgbClr val="1A1A1A"/>
-                </a:solidFill>
-                <a:latin typeface="Cambria" pitchFamily="34" charset="0"/>
-                <a:ea typeface="Cambria" pitchFamily="34" charset="-122"/>
-                <a:cs typeface="Cambria" pitchFamily="34" charset="-120"/>
-              </a:rPr>
-              <a:t>Discussion</a:t>
-            </a:r>
-            <a:endParaRPr lang="en-US" sz="2100" dirty="0"/>
-          </a:p>
-        </p:txBody>
-      </p:sp>
-      <p:sp>
-        <p:nvSpPr>
-          <p:cNvPr id="15" name="Text 13"/>
-          <p:cNvSpPr/>
-          <p:nvPr/>
-        </p:nvSpPr>
-        <p:spPr>
-          <a:xfrm>
-            <a:off x="8778240" y="3977640"/>
-            <a:ext cx="2651760" cy="1371600"/>
+            <a:srgbClr val="7A3B2E"/>
+          </a:solidFill>
+          <a:ln/>
+        </p:spPr>
+      </p:sp>
+      <p:sp>
+        <p:nvSpPr>
+          <p:cNvPr id="12" name="Text 10"/>
+          <p:cNvSpPr/>
+          <p:nvPr/>
+        </p:nvSpPr>
+        <p:spPr>
+          <a:xfrm>
+            <a:off x="1097280" y="5292090"/>
+            <a:ext cx="10607040" cy="1017270"/>
           </a:xfrm>
           <a:prstGeom prst="rect">
             <a:avLst/>
@@ -2893,12 +4039,12 @@
           <a:p>
             <a:pPr indent="0" marL="0">
               <a:lnSpc>
-                <a:spcPct val="115000"/>
+                <a:spcPct val="112000"/>
               </a:lnSpc>
               <a:buNone/>
             </a:pPr>
             <a:r>
-              <a:rPr lang="en-US" sz="1500" dirty="0">
+              <a:rPr lang="en-US" sz="1650" dirty="0">
                 <a:solidFill>
                   <a:srgbClr val="1A1A1A"/>
                 </a:solidFill>
@@ -2906,9 +4052,9 @@
                 <a:ea typeface="Calibri" pitchFamily="34" charset="-122"/>
                 <a:cs typeface="Calibri" pitchFamily="34" charset="-120"/>
               </a:rPr>
-              <a:t>Interrogate the study, debate it, or critique each other's work.</a:t>
-            </a:r>
-            <a:endParaRPr lang="en-US" sz="1500" dirty="0"/>
+              <a:t>"I expected X, the data doesn't show it, here's how I know" is a complete, publishable result.</a:t>
+            </a:r>
+            <a:endParaRPr lang="en-US" sz="1650" dirty="0"/>
           </a:p>
         </p:txBody>
       </p:sp>
@@ -2946,14 +4092,34 @@
       </p:grpSpPr>
       <p:sp>
         <p:nvSpPr>
-          <p:cNvPr id="2" name="Text 0"/>
+          <p:cNvPr id="2" name="Shape 0"/>
+          <p:cNvSpPr/>
+          <p:nvPr/>
+        </p:nvSpPr>
+        <p:spPr>
+          <a:xfrm>
+            <a:off x="0" y="0"/>
+            <a:ext cx="164592" cy="6858000"/>
+          </a:xfrm>
+          <a:prstGeom prst="rect">
+            <a:avLst/>
+          </a:prstGeom>
+          <a:solidFill>
+            <a:srgbClr val="3F6F5F"/>
+          </a:solidFill>
+          <a:ln/>
+        </p:spPr>
+      </p:sp>
+      <p:sp>
+        <p:nvSpPr>
+          <p:cNvPr id="3" name="Text 1"/>
           <p:cNvSpPr/>
           <p:nvPr/>
         </p:nvSpPr>
         <p:spPr>
           <a:xfrm>
             <a:off x="640080" y="640080"/>
-            <a:ext cx="10058400" cy="731520"/>
+            <a:ext cx="10058400" cy="320040"/>
           </a:xfrm>
           <a:prstGeom prst="rect">
             <a:avLst/>
@@ -2963,6 +4129,47 @@
         </p:spPr>
         <p:txBody>
           <a:bodyPr wrap="square" rtlCol="0" anchor="ctr"/>
+          <a:lstStyle/>
+          <a:p>
+            <a:pPr indent="0" marL="0">
+              <a:buNone/>
+            </a:pPr>
+            <a:r>
+              <a:rPr lang="en-US" sz="1200" b="1" spc="300" kern="0" dirty="0">
+                <a:solidFill>
+                  <a:srgbClr val="3F6F5F"/>
+                </a:solidFill>
+                <a:latin typeface="Calibri" pitchFamily="34" charset="0"/>
+                <a:ea typeface="Calibri" pitchFamily="34" charset="-122"/>
+                <a:cs typeface="Calibri" pitchFamily="34" charset="-120"/>
+              </a:rPr>
+              <a:t>WEEK 8 · THE MATERIAL</a:t>
+            </a:r>
+            <a:endParaRPr lang="en-US" sz="1200" dirty="0"/>
+          </a:p>
+        </p:txBody>
+      </p:sp>
+      <p:sp>
+        <p:nvSpPr>
+          <p:cNvPr id="4" name="Text 2"/>
+          <p:cNvSpPr/>
+          <p:nvPr/>
+        </p:nvSpPr>
+        <p:spPr>
+          <a:xfrm>
+            <a:off x="640080" y="1005840"/>
+            <a:ext cx="10881360" cy="914400"/>
+          </a:xfrm>
+          <a:prstGeom prst="rect">
+            <a:avLst/>
+          </a:prstGeom>
+          <a:noFill/>
+          <a:ln/>
+        </p:spPr>
+        <p:txBody>
+          <a:bodyPr wrap="square" rtlCol="0" anchor="t">
+            <a:spAutoFit/>
+          </a:bodyPr>
           <a:lstStyle/>
           <a:p>
             <a:pPr indent="0" marL="0">
@@ -2977,7 +4184,7 @@
                 <a:ea typeface="Cambria" pitchFamily="34" charset="-122"/>
                 <a:cs typeface="Cambria" pitchFamily="34" charset="-120"/>
               </a:rPr>
-              <a:t>The session</a:t>
+              <a:t>Memorization isn't reading</a:t>
             </a:r>
             <a:endParaRPr lang="en-US" sz="3000" dirty="0"/>
           </a:p>
@@ -2985,19 +4192,17 @@
       </p:sp>
       <p:sp>
         <p:nvSpPr>
-          <p:cNvPr id="3" name="Shape 1"/>
-          <p:cNvSpPr/>
-          <p:nvPr/>
-        </p:nvSpPr>
-        <p:spPr>
-          <a:xfrm>
-            <a:off x="640080" y="1572768"/>
-            <a:ext cx="868680" cy="457200"/>
-          </a:xfrm>
-          <a:prstGeom prst="roundRect">
-            <a:avLst>
-              <a:gd name="adj" fmla="val 12000"/>
-            </a:avLst>
+          <p:cNvPr id="5" name="Shape 3"/>
+          <p:cNvSpPr/>
+          <p:nvPr/>
+        </p:nvSpPr>
+        <p:spPr>
+          <a:xfrm>
+            <a:off x="640080" y="2331720"/>
+            <a:ext cx="201168" cy="201168"/>
+          </a:xfrm>
+          <a:prstGeom prst="ellipse">
+            <a:avLst/>
           </a:prstGeom>
           <a:solidFill>
             <a:srgbClr val="7A3B2E"/>
@@ -3007,71 +4212,99 @@
       </p:sp>
       <p:sp>
         <p:nvSpPr>
-          <p:cNvPr id="4" name="Text 2"/>
-          <p:cNvSpPr/>
-          <p:nvPr/>
-        </p:nvSpPr>
-        <p:spPr>
-          <a:xfrm>
-            <a:off x="640080" y="1572768"/>
-            <a:ext cx="868680" cy="457200"/>
-          </a:xfrm>
-          <a:prstGeom prst="rect">
-            <a:avLst/>
-          </a:prstGeom>
-          <a:noFill/>
-          <a:ln/>
-        </p:spPr>
-        <p:txBody>
-          <a:bodyPr wrap="square" rtlCol="0" anchor="ctr"/>
-          <a:lstStyle/>
-          <a:p>
-            <a:pPr algn="ctr" indent="0" marL="0">
-              <a:buNone/>
-            </a:pPr>
-            <a:r>
-              <a:rPr lang="en-US" sz="1100" b="1" dirty="0">
-                <a:solidFill>
-                  <a:srgbClr val="FFFFFF"/>
+          <p:cNvPr id="6" name="Text 4"/>
+          <p:cNvSpPr/>
+          <p:nvPr/>
+        </p:nvSpPr>
+        <p:spPr>
+          <a:xfrm>
+            <a:off x="1097280" y="2240280"/>
+            <a:ext cx="10607040" cy="1017270"/>
+          </a:xfrm>
+          <a:prstGeom prst="rect">
+            <a:avLst/>
+          </a:prstGeom>
+          <a:noFill/>
+          <a:ln/>
+        </p:spPr>
+        <p:txBody>
+          <a:bodyPr wrap="square" rtlCol="0" anchor="t">
+            <a:spAutoFit/>
+          </a:bodyPr>
+          <a:lstStyle/>
+          <a:p>
+            <a:pPr indent="0" marL="0">
+              <a:lnSpc>
+                <a:spcPct val="112000"/>
+              </a:lnSpc>
+              <a:buNone/>
+            </a:pPr>
+            <a:r>
+              <a:rPr lang="en-US" sz="1650" dirty="0">
+                <a:solidFill>
+                  <a:srgbClr val="1A1A1A"/>
                 </a:solidFill>
                 <a:latin typeface="Calibri" pitchFamily="34" charset="0"/>
                 <a:ea typeface="Calibri" pitchFamily="34" charset="-122"/>
                 <a:cs typeface="Calibri" pitchFamily="34" charset="-120"/>
               </a:rPr>
-              <a:t>0:00</a:t>
-            </a:r>
-            <a:endParaRPr lang="en-US" sz="1100" dirty="0"/>
-          </a:p>
-        </p:txBody>
-      </p:sp>
-      <p:sp>
-        <p:nvSpPr>
-          <p:cNvPr id="5" name="Text 3"/>
-          <p:cNvSpPr/>
-          <p:nvPr/>
-        </p:nvSpPr>
-        <p:spPr>
-          <a:xfrm>
-            <a:off x="1691640" y="1554480"/>
-            <a:ext cx="9646920" cy="566928"/>
-          </a:xfrm>
-          <a:prstGeom prst="rect">
-            <a:avLst/>
-          </a:prstGeom>
-          <a:noFill/>
-          <a:ln/>
-        </p:spPr>
-        <p:txBody>
-          <a:bodyPr wrap="square" rtlCol="0" anchor="ctr">
+              <a:t>Speak, Memory (Chang et al., 2023): name-cloze tests show GPT-4 has memorized many novels; it fills in "___ Bennet" without reading anything.</a:t>
+            </a:r>
+            <a:endParaRPr lang="en-US" sz="1650" dirty="0"/>
+          </a:p>
+        </p:txBody>
+      </p:sp>
+      <p:sp>
+        <p:nvSpPr>
+          <p:cNvPr id="7" name="Shape 5"/>
+          <p:cNvSpPr/>
+          <p:nvPr/>
+        </p:nvSpPr>
+        <p:spPr>
+          <a:xfrm>
+            <a:off x="640080" y="3348990"/>
+            <a:ext cx="201168" cy="201168"/>
+          </a:xfrm>
+          <a:prstGeom prst="ellipse">
+            <a:avLst/>
+          </a:prstGeom>
+          <a:solidFill>
+            <a:srgbClr val="3F6F5F"/>
+          </a:solidFill>
+          <a:ln/>
+        </p:spPr>
+      </p:sp>
+      <p:sp>
+        <p:nvSpPr>
+          <p:cNvPr id="8" name="Text 6"/>
+          <p:cNvSpPr/>
+          <p:nvPr/>
+        </p:nvSpPr>
+        <p:spPr>
+          <a:xfrm>
+            <a:off x="1097280" y="3257550"/>
+            <a:ext cx="10607040" cy="1017270"/>
+          </a:xfrm>
+          <a:prstGeom prst="rect">
+            <a:avLst/>
+          </a:prstGeom>
+          <a:noFill/>
+          <a:ln/>
+        </p:spPr>
+        <p:txBody>
+          <a:bodyPr wrap="square" rtlCol="0" anchor="t">
             <a:spAutoFit/>
           </a:bodyPr>
           <a:lstStyle/>
           <a:p>
             <a:pPr indent="0" marL="0">
-              <a:buNone/>
-            </a:pPr>
-            <a:r>
-              <a:rPr lang="en-US" sz="1250" dirty="0">
+              <a:lnSpc>
+                <a:spcPct val="112000"/>
+              </a:lnSpc>
+              <a:buNone/>
+            </a:pPr>
+            <a:r>
+              <a:rPr lang="en-US" sz="1650" dirty="0">
                 <a:solidFill>
                   <a:srgbClr val="1A1A1A"/>
                 </a:solidFill>
@@ -3079,101 +4312,127 @@
                 <a:ea typeface="Calibri" pitchFamily="34" charset="-122"/>
                 <a:cs typeface="Calibri" pitchFamily="34" charset="-120"/>
               </a:rPr>
-              <a:t>Warm-up + Look at This: TimeCapsuleLLM and "Speak, Memory," screenshots ready. (These period models, and supplements like MonadGPT and MacBERTh, live on Hugging Face, where you can download and run open models, or fine-tune your own.)</a:t>
-            </a:r>
-            <a:endParaRPr lang="en-US" sz="1250" dirty="0"/>
-          </a:p>
-        </p:txBody>
-      </p:sp>
-      <p:sp>
-        <p:nvSpPr>
-          <p:cNvPr id="6" name="Shape 4"/>
-          <p:cNvSpPr/>
-          <p:nvPr/>
-        </p:nvSpPr>
-        <p:spPr>
-          <a:xfrm>
-            <a:off x="640080" y="2139696"/>
-            <a:ext cx="868680" cy="457200"/>
-          </a:xfrm>
-          <a:prstGeom prst="roundRect">
-            <a:avLst>
-              <a:gd name="adj" fmla="val 12000"/>
-            </a:avLst>
-          </a:prstGeom>
-          <a:solidFill>
-            <a:srgbClr val="7A3B2E"/>
-          </a:solidFill>
-          <a:ln/>
-        </p:spPr>
-      </p:sp>
-      <p:sp>
-        <p:nvSpPr>
-          <p:cNvPr id="7" name="Text 5"/>
-          <p:cNvSpPr/>
-          <p:nvPr/>
-        </p:nvSpPr>
-        <p:spPr>
-          <a:xfrm>
-            <a:off x="640080" y="2139696"/>
-            <a:ext cx="868680" cy="457200"/>
-          </a:xfrm>
-          <a:prstGeom prst="rect">
-            <a:avLst/>
-          </a:prstGeom>
-          <a:noFill/>
-          <a:ln/>
-        </p:spPr>
-        <p:txBody>
-          <a:bodyPr wrap="square" rtlCol="0" anchor="ctr"/>
-          <a:lstStyle/>
-          <a:p>
-            <a:pPr algn="ctr" indent="0" marL="0">
-              <a:buNone/>
-            </a:pPr>
-            <a:r>
-              <a:rPr lang="en-US" sz="1100" b="1" dirty="0">
-                <a:solidFill>
-                  <a:srgbClr val="FFFFFF"/>
+              <a:t>A model may be reciting your corpus rather than analyzing it: a validity problem, not only an ethics one.</a:t>
+            </a:r>
+            <a:endParaRPr lang="en-US" sz="1650" dirty="0"/>
+          </a:p>
+        </p:txBody>
+      </p:sp>
+      <p:sp>
+        <p:nvSpPr>
+          <p:cNvPr id="9" name="Shape 7"/>
+          <p:cNvSpPr/>
+          <p:nvPr/>
+        </p:nvSpPr>
+        <p:spPr>
+          <a:xfrm>
+            <a:off x="640080" y="4366260"/>
+            <a:ext cx="201168" cy="201168"/>
+          </a:xfrm>
+          <a:prstGeom prst="ellipse">
+            <a:avLst/>
+          </a:prstGeom>
+          <a:solidFill>
+            <a:srgbClr val="B9852F"/>
+          </a:solidFill>
+          <a:ln/>
+        </p:spPr>
+      </p:sp>
+      <p:sp>
+        <p:nvSpPr>
+          <p:cNvPr id="10" name="Text 8"/>
+          <p:cNvSpPr/>
+          <p:nvPr/>
+        </p:nvSpPr>
+        <p:spPr>
+          <a:xfrm>
+            <a:off x="1097280" y="4274820"/>
+            <a:ext cx="10607040" cy="1017270"/>
+          </a:xfrm>
+          <a:prstGeom prst="rect">
+            <a:avLst/>
+          </a:prstGeom>
+          <a:noFill/>
+          <a:ln/>
+        </p:spPr>
+        <p:txBody>
+          <a:bodyPr wrap="square" rtlCol="0" anchor="t">
+            <a:spAutoFit/>
+          </a:bodyPr>
+          <a:lstStyle/>
+          <a:p>
+            <a:pPr indent="0" marL="0">
+              <a:lnSpc>
+                <a:spcPct val="112000"/>
+              </a:lnSpc>
+              <a:buNone/>
+            </a:pPr>
+            <a:r>
+              <a:rPr lang="en-US" sz="1650" dirty="0">
+                <a:solidFill>
+                  <a:srgbClr val="1A1A1A"/>
                 </a:solidFill>
                 <a:latin typeface="Calibri" pitchFamily="34" charset="0"/>
                 <a:ea typeface="Calibri" pitchFamily="34" charset="-122"/>
                 <a:cs typeface="Calibri" pitchFamily="34" charset="-120"/>
               </a:rPr>
-              <a:t>0:07</a:t>
-            </a:r>
-            <a:endParaRPr lang="en-US" sz="1100" dirty="0"/>
-          </a:p>
-        </p:txBody>
-      </p:sp>
-      <p:sp>
-        <p:nvSpPr>
-          <p:cNvPr id="8" name="Text 6"/>
-          <p:cNvSpPr/>
-          <p:nvPr/>
-        </p:nvSpPr>
-        <p:spPr>
-          <a:xfrm>
-            <a:off x="1691640" y="2121408"/>
-            <a:ext cx="9646920" cy="566928"/>
-          </a:xfrm>
-          <a:prstGeom prst="rect">
-            <a:avLst/>
-          </a:prstGeom>
-          <a:noFill/>
-          <a:ln/>
-        </p:spPr>
-        <p:txBody>
-          <a:bodyPr wrap="square" rtlCol="0" anchor="ctr">
+              <a:t>TimeCapsuleLLM: train only on 1800s London text and the model speaks its era. A corpus bounds a mind.</a:t>
+            </a:r>
+            <a:endParaRPr lang="en-US" sz="1650" dirty="0"/>
+          </a:p>
+        </p:txBody>
+      </p:sp>
+      <p:sp>
+        <p:nvSpPr>
+          <p:cNvPr id="11" name="Shape 9"/>
+          <p:cNvSpPr/>
+          <p:nvPr/>
+        </p:nvSpPr>
+        <p:spPr>
+          <a:xfrm>
+            <a:off x="640080" y="5383530"/>
+            <a:ext cx="201168" cy="201168"/>
+          </a:xfrm>
+          <a:prstGeom prst="ellipse">
+            <a:avLst/>
+          </a:prstGeom>
+          <a:solidFill>
+            <a:srgbClr val="7A3B2E"/>
+          </a:solidFill>
+          <a:ln/>
+        </p:spPr>
+      </p:sp>
+      <p:sp>
+        <p:nvSpPr>
+          <p:cNvPr id="12" name="Text 10"/>
+          <p:cNvSpPr/>
+          <p:nvPr/>
+        </p:nvSpPr>
+        <p:spPr>
+          <a:xfrm>
+            <a:off x="1097280" y="5292090"/>
+            <a:ext cx="10607040" cy="1017270"/>
+          </a:xfrm>
+          <a:prstGeom prst="rect">
+            <a:avLst/>
+          </a:prstGeom>
+          <a:noFill/>
+          <a:ln/>
+        </p:spPr>
+        <p:txBody>
+          <a:bodyPr wrap="square" rtlCol="0" anchor="t">
             <a:spAutoFit/>
           </a:bodyPr>
           <a:lstStyle/>
           <a:p>
             <a:pPr indent="0" marL="0">
-              <a:buNone/>
-            </a:pPr>
-            <a:r>
-              <a:rPr lang="en-US" sz="1250" dirty="0">
+              <a:lnSpc>
+                <a:spcPct val="112000"/>
+              </a:lnSpc>
+              <a:buNone/>
+            </a:pPr>
+            <a:r>
+              <a:rPr lang="en-US" sz="1650" dirty="0">
                 <a:solidFill>
                   <a:srgbClr val="1A1A1A"/>
                 </a:solidFill>
@@ -3181,417 +4440,9 @@
                 <a:ea typeface="Calibri" pitchFamily="34" charset="-122"/>
                 <a:cs typeface="Calibri" pitchFamily="34" charset="-120"/>
               </a:rPr>
-              <a:t>Kill it, then keep what survives, one continuous arc on your own results: shuffle the labels and re-run; split the corpus in half; ask "compared to what?". Then compress whatever survived into one headline sentence.</a:t>
-            </a:r>
-            <a:endParaRPr lang="en-US" sz="1250" dirty="0"/>
-          </a:p>
-        </p:txBody>
-      </p:sp>
-      <p:sp>
-        <p:nvSpPr>
-          <p:cNvPr id="9" name="Shape 7"/>
-          <p:cNvSpPr/>
-          <p:nvPr/>
-        </p:nvSpPr>
-        <p:spPr>
-          <a:xfrm>
-            <a:off x="640080" y="2706624"/>
-            <a:ext cx="868680" cy="457200"/>
-          </a:xfrm>
-          <a:prstGeom prst="roundRect">
-            <a:avLst>
-              <a:gd name="adj" fmla="val 12000"/>
-            </a:avLst>
-          </a:prstGeom>
-          <a:solidFill>
-            <a:srgbClr val="7A3B2E"/>
-          </a:solidFill>
-          <a:ln/>
-        </p:spPr>
-      </p:sp>
-      <p:sp>
-        <p:nvSpPr>
-          <p:cNvPr id="10" name="Text 8"/>
-          <p:cNvSpPr/>
-          <p:nvPr/>
-        </p:nvSpPr>
-        <p:spPr>
-          <a:xfrm>
-            <a:off x="640080" y="2706624"/>
-            <a:ext cx="868680" cy="457200"/>
-          </a:xfrm>
-          <a:prstGeom prst="rect">
-            <a:avLst/>
-          </a:prstGeom>
-          <a:noFill/>
-          <a:ln/>
-        </p:spPr>
-        <p:txBody>
-          <a:bodyPr wrap="square" rtlCol="0" anchor="ctr"/>
-          <a:lstStyle/>
-          <a:p>
-            <a:pPr algn="ctr" indent="0" marL="0">
-              <a:buNone/>
-            </a:pPr>
-            <a:r>
-              <a:rPr lang="en-US" sz="1100" b="1" dirty="0">
-                <a:solidFill>
-                  <a:srgbClr val="FFFFFF"/>
-                </a:solidFill>
-                <a:latin typeface="Calibri" pitchFamily="34" charset="0"/>
-                <a:ea typeface="Calibri" pitchFamily="34" charset="-122"/>
-                <a:cs typeface="Calibri" pitchFamily="34" charset="-120"/>
-              </a:rPr>
-              <a:t>0:52</a:t>
-            </a:r>
-            <a:endParaRPr lang="en-US" sz="1100" dirty="0"/>
-          </a:p>
-        </p:txBody>
-      </p:sp>
-      <p:sp>
-        <p:nvSpPr>
-          <p:cNvPr id="11" name="Text 9"/>
-          <p:cNvSpPr/>
-          <p:nvPr/>
-        </p:nvSpPr>
-        <p:spPr>
-          <a:xfrm>
-            <a:off x="1691640" y="2688336"/>
-            <a:ext cx="9646920" cy="566928"/>
-          </a:xfrm>
-          <a:prstGeom prst="rect">
-            <a:avLst/>
-          </a:prstGeom>
-          <a:noFill/>
-          <a:ln/>
-        </p:spPr>
-        <p:txBody>
-          <a:bodyPr wrap="square" rtlCol="0" anchor="ctr">
-            <a:spAutoFit/>
-          </a:bodyPr>
-          <a:lstStyle/>
-          <a:p>
-            <a:pPr indent="0" marL="0">
-              <a:buNone/>
-            </a:pPr>
-            <a:r>
-              <a:rPr lang="en-US" sz="1250" dirty="0">
-                <a:solidFill>
-                  <a:srgbClr val="1A1A1A"/>
-                </a:solidFill>
-                <a:latin typeface="Calibri" pitchFamily="34" charset="0"/>
-                <a:ea typeface="Calibri" pitchFamily="34" charset="-122"/>
-                <a:cs typeface="Calibri" pitchFamily="34" charset="-120"/>
-              </a:rPr>
-              <a:t>Break</a:t>
-            </a:r>
-            <a:endParaRPr lang="en-US" sz="1250" dirty="0"/>
-          </a:p>
-        </p:txBody>
-      </p:sp>
-      <p:sp>
-        <p:nvSpPr>
-          <p:cNvPr id="12" name="Shape 10"/>
-          <p:cNvSpPr/>
-          <p:nvPr/>
-        </p:nvSpPr>
-        <p:spPr>
-          <a:xfrm>
-            <a:off x="640080" y="3273552"/>
-            <a:ext cx="868680" cy="457200"/>
-          </a:xfrm>
-          <a:prstGeom prst="roundRect">
-            <a:avLst>
-              <a:gd name="adj" fmla="val 12000"/>
-            </a:avLst>
-          </a:prstGeom>
-          <a:solidFill>
-            <a:srgbClr val="7A3B2E"/>
-          </a:solidFill>
-          <a:ln/>
-        </p:spPr>
-      </p:sp>
-      <p:sp>
-        <p:nvSpPr>
-          <p:cNvPr id="13" name="Text 11"/>
-          <p:cNvSpPr/>
-          <p:nvPr/>
-        </p:nvSpPr>
-        <p:spPr>
-          <a:xfrm>
-            <a:off x="640080" y="3273552"/>
-            <a:ext cx="868680" cy="457200"/>
-          </a:xfrm>
-          <a:prstGeom prst="rect">
-            <a:avLst/>
-          </a:prstGeom>
-          <a:noFill/>
-          <a:ln/>
-        </p:spPr>
-        <p:txBody>
-          <a:bodyPr wrap="square" rtlCol="0" anchor="ctr"/>
-          <a:lstStyle/>
-          <a:p>
-            <a:pPr algn="ctr" indent="0" marL="0">
-              <a:buNone/>
-            </a:pPr>
-            <a:r>
-              <a:rPr lang="en-US" sz="1100" b="1" dirty="0">
-                <a:solidFill>
-                  <a:srgbClr val="FFFFFF"/>
-                </a:solidFill>
-                <a:latin typeface="Calibri" pitchFamily="34" charset="0"/>
-                <a:ea typeface="Calibri" pitchFamily="34" charset="-122"/>
-                <a:cs typeface="Calibri" pitchFamily="34" charset="-120"/>
-              </a:rPr>
-              <a:t>1:02</a:t>
-            </a:r>
-            <a:endParaRPr lang="en-US" sz="1100" dirty="0"/>
-          </a:p>
-        </p:txBody>
-      </p:sp>
-      <p:sp>
-        <p:nvSpPr>
-          <p:cNvPr id="14" name="Text 12"/>
-          <p:cNvSpPr/>
-          <p:nvPr/>
-        </p:nvSpPr>
-        <p:spPr>
-          <a:xfrm>
-            <a:off x="1691640" y="3255264"/>
-            <a:ext cx="9646920" cy="566928"/>
-          </a:xfrm>
-          <a:prstGeom prst="rect">
-            <a:avLst/>
-          </a:prstGeom>
-          <a:noFill/>
-          <a:ln/>
-        </p:spPr>
-        <p:txBody>
-          <a:bodyPr wrap="square" rtlCol="0" anchor="ctr">
-            <a:spAutoFit/>
-          </a:bodyPr>
-          <a:lstStyle/>
-          <a:p>
-            <a:pPr indent="0" marL="0">
-              <a:buNone/>
-            </a:pPr>
-            <a:r>
-              <a:rPr lang="en-US" sz="1250" dirty="0">
-                <a:solidFill>
-                  <a:srgbClr val="1A1A1A"/>
-                </a:solidFill>
-                <a:latin typeface="Calibri" pitchFamily="34" charset="0"/>
-                <a:ea typeface="Calibri" pitchFamily="34" charset="-122"/>
-                <a:cs typeface="Calibri" pitchFamily="34" charset="-120"/>
-              </a:rPr>
-              <a:t>Gemini-free writing block: write your one-sentence interpretation yourself.</a:t>
-            </a:r>
-            <a:endParaRPr lang="en-US" sz="1250" dirty="0"/>
-          </a:p>
-        </p:txBody>
-      </p:sp>
-      <p:sp>
-        <p:nvSpPr>
-          <p:cNvPr id="15" name="Shape 13"/>
-          <p:cNvSpPr/>
-          <p:nvPr/>
-        </p:nvSpPr>
-        <p:spPr>
-          <a:xfrm>
-            <a:off x="640080" y="3840480"/>
-            <a:ext cx="868680" cy="457200"/>
-          </a:xfrm>
-          <a:prstGeom prst="roundRect">
-            <a:avLst>
-              <a:gd name="adj" fmla="val 12000"/>
-            </a:avLst>
-          </a:prstGeom>
-          <a:solidFill>
-            <a:srgbClr val="7A3B2E"/>
-          </a:solidFill>
-          <a:ln/>
-        </p:spPr>
-      </p:sp>
-      <p:sp>
-        <p:nvSpPr>
-          <p:cNvPr id="16" name="Text 14"/>
-          <p:cNvSpPr/>
-          <p:nvPr/>
-        </p:nvSpPr>
-        <p:spPr>
-          <a:xfrm>
-            <a:off x="640080" y="3840480"/>
-            <a:ext cx="868680" cy="457200"/>
-          </a:xfrm>
-          <a:prstGeom prst="rect">
-            <a:avLst/>
-          </a:prstGeom>
-          <a:noFill/>
-          <a:ln/>
-        </p:spPr>
-        <p:txBody>
-          <a:bodyPr wrap="square" rtlCol="0" anchor="ctr"/>
-          <a:lstStyle/>
-          <a:p>
-            <a:pPr algn="ctr" indent="0" marL="0">
-              <a:buNone/>
-            </a:pPr>
-            <a:r>
-              <a:rPr lang="en-US" sz="1100" b="1" dirty="0">
-                <a:solidFill>
-                  <a:srgbClr val="FFFFFF"/>
-                </a:solidFill>
-                <a:latin typeface="Calibri" pitchFamily="34" charset="0"/>
-                <a:ea typeface="Calibri" pitchFamily="34" charset="-122"/>
-                <a:cs typeface="Calibri" pitchFamily="34" charset="-120"/>
-              </a:rPr>
-              <a:t>1:22</a:t>
-            </a:r>
-            <a:endParaRPr lang="en-US" sz="1100" dirty="0"/>
-          </a:p>
-        </p:txBody>
-      </p:sp>
-      <p:sp>
-        <p:nvSpPr>
-          <p:cNvPr id="17" name="Text 15"/>
-          <p:cNvSpPr/>
-          <p:nvPr/>
-        </p:nvSpPr>
-        <p:spPr>
-          <a:xfrm>
-            <a:off x="1691640" y="3822192"/>
-            <a:ext cx="9646920" cy="566928"/>
-          </a:xfrm>
-          <a:prstGeom prst="rect">
-            <a:avLst/>
-          </a:prstGeom>
-          <a:noFill/>
-          <a:ln/>
-        </p:spPr>
-        <p:txBody>
-          <a:bodyPr wrap="square" rtlCol="0" anchor="ctr">
-            <a:spAutoFit/>
-          </a:bodyPr>
-          <a:lstStyle/>
-          <a:p>
-            <a:pPr indent="0" marL="0">
-              <a:buNone/>
-            </a:pPr>
-            <a:r>
-              <a:rPr lang="en-US" sz="1250" dirty="0">
-                <a:solidFill>
-                  <a:srgbClr val="1A1A1A"/>
-                </a:solidFill>
-                <a:latin typeface="Calibri" pitchFamily="34" charset="0"/>
-                <a:ea typeface="Calibri" pitchFamily="34" charset="-122"/>
-                <a:cs typeface="Calibri" pitchFamily="34" charset="-120"/>
-              </a:rPr>
-              <a:t>Writing workshop: opening question, what you found, what it does not show, the choices you made. Distill the Data Biography into the corpus note.</a:t>
-            </a:r>
-            <a:endParaRPr lang="en-US" sz="1250" dirty="0"/>
-          </a:p>
-        </p:txBody>
-      </p:sp>
-      <p:sp>
-        <p:nvSpPr>
-          <p:cNvPr id="18" name="Shape 16"/>
-          <p:cNvSpPr/>
-          <p:nvPr/>
-        </p:nvSpPr>
-        <p:spPr>
-          <a:xfrm>
-            <a:off x="640080" y="4407408"/>
-            <a:ext cx="868680" cy="457200"/>
-          </a:xfrm>
-          <a:prstGeom prst="roundRect">
-            <a:avLst>
-              <a:gd name="adj" fmla="val 12000"/>
-            </a:avLst>
-          </a:prstGeom>
-          <a:solidFill>
-            <a:srgbClr val="7A3B2E"/>
-          </a:solidFill>
-          <a:ln/>
-        </p:spPr>
-      </p:sp>
-      <p:sp>
-        <p:nvSpPr>
-          <p:cNvPr id="19" name="Text 17"/>
-          <p:cNvSpPr/>
-          <p:nvPr/>
-        </p:nvSpPr>
-        <p:spPr>
-          <a:xfrm>
-            <a:off x="640080" y="4407408"/>
-            <a:ext cx="868680" cy="457200"/>
-          </a:xfrm>
-          <a:prstGeom prst="rect">
-            <a:avLst/>
-          </a:prstGeom>
-          <a:noFill/>
-          <a:ln/>
-        </p:spPr>
-        <p:txBody>
-          <a:bodyPr wrap="square" rtlCol="0" anchor="ctr"/>
-          <a:lstStyle/>
-          <a:p>
-            <a:pPr algn="ctr" indent="0" marL="0">
-              <a:buNone/>
-            </a:pPr>
-            <a:r>
-              <a:rPr lang="en-US" sz="1100" b="1" dirty="0">
-                <a:solidFill>
-                  <a:srgbClr val="FFFFFF"/>
-                </a:solidFill>
-                <a:latin typeface="Calibri" pitchFamily="34" charset="0"/>
-                <a:ea typeface="Calibri" pitchFamily="34" charset="-122"/>
-                <a:cs typeface="Calibri" pitchFamily="34" charset="-120"/>
-              </a:rPr>
-              <a:t>1:50</a:t>
-            </a:r>
-            <a:endParaRPr lang="en-US" sz="1100" dirty="0"/>
-          </a:p>
-        </p:txBody>
-      </p:sp>
-      <p:sp>
-        <p:nvSpPr>
-          <p:cNvPr id="20" name="Text 18"/>
-          <p:cNvSpPr/>
-          <p:nvPr/>
-        </p:nvSpPr>
-        <p:spPr>
-          <a:xfrm>
-            <a:off x="1691640" y="4389120"/>
-            <a:ext cx="9646920" cy="566928"/>
-          </a:xfrm>
-          <a:prstGeom prst="rect">
-            <a:avLst/>
-          </a:prstGeom>
-          <a:noFill/>
-          <a:ln/>
-        </p:spPr>
-        <p:txBody>
-          <a:bodyPr wrap="square" rtlCol="0" anchor="ctr">
-            <a:spAutoFit/>
-          </a:bodyPr>
-          <a:lstStyle/>
-          <a:p>
-            <a:pPr indent="0" marL="0">
-              <a:buNone/>
-            </a:pPr>
-            <a:r>
-              <a:rPr lang="en-US" sz="1250" dirty="0">
-                <a:solidFill>
-                  <a:srgbClr val="1A1A1A"/>
-                </a:solidFill>
-                <a:latin typeface="Calibri" pitchFamily="34" charset="0"/>
-                <a:ea typeface="Calibri" pitchFamily="34" charset="-122"/>
-                <a:cs typeface="Calibri" pitchFamily="34" charset="-120"/>
-              </a:rPr>
-              <a:t>Check and check-out.</a:t>
-            </a:r>
-            <a:endParaRPr lang="en-US" sz="1250" dirty="0"/>
+              <a:t>Ask of every model you used: what was in its training data, and does that undercut MY claim?</a:t>
+            </a:r>
+            <a:endParaRPr lang="en-US" sz="1650" dirty="0"/>
           </a:p>
         </p:txBody>
       </p:sp>
@@ -3629,14 +4480,34 @@
       </p:grpSpPr>
       <p:sp>
         <p:nvSpPr>
-          <p:cNvPr id="2" name="Text 0"/>
+          <p:cNvPr id="2" name="Shape 0"/>
+          <p:cNvSpPr/>
+          <p:nvPr/>
+        </p:nvSpPr>
+        <p:spPr>
+          <a:xfrm>
+            <a:off x="0" y="0"/>
+            <a:ext cx="164592" cy="6858000"/>
+          </a:xfrm>
+          <a:prstGeom prst="rect">
+            <a:avLst/>
+          </a:prstGeom>
+          <a:solidFill>
+            <a:srgbClr val="B9852F"/>
+          </a:solidFill>
+          <a:ln/>
+        </p:spPr>
+      </p:sp>
+      <p:sp>
+        <p:nvSpPr>
+          <p:cNvPr id="3" name="Text 1"/>
           <p:cNvSpPr/>
           <p:nvPr/>
         </p:nvSpPr>
         <p:spPr>
           <a:xfrm>
             <a:off x="640080" y="640080"/>
-            <a:ext cx="10058400" cy="731520"/>
+            <a:ext cx="10058400" cy="320040"/>
           </a:xfrm>
           <a:prstGeom prst="rect">
             <a:avLst/>
@@ -3646,6 +4517,47 @@
         </p:spPr>
         <p:txBody>
           <a:bodyPr wrap="square" rtlCol="0" anchor="ctr"/>
+          <a:lstStyle/>
+          <a:p>
+            <a:pPr indent="0" marL="0">
+              <a:buNone/>
+            </a:pPr>
+            <a:r>
+              <a:rPr lang="en-US" sz="1200" b="1" spc="300" kern="0" dirty="0">
+                <a:solidFill>
+                  <a:srgbClr val="B9852F"/>
+                </a:solidFill>
+                <a:latin typeface="Calibri" pitchFamily="34" charset="0"/>
+                <a:ea typeface="Calibri" pitchFamily="34" charset="-122"/>
+                <a:cs typeface="Calibri" pitchFamily="34" charset="-120"/>
+              </a:rPr>
+              <a:t>WEEK 8 · THE MATERIAL</a:t>
+            </a:r>
+            <a:endParaRPr lang="en-US" sz="1200" dirty="0"/>
+          </a:p>
+        </p:txBody>
+      </p:sp>
+      <p:sp>
+        <p:nvSpPr>
+          <p:cNvPr id="4" name="Text 2"/>
+          <p:cNvSpPr/>
+          <p:nvPr/>
+        </p:nvSpPr>
+        <p:spPr>
+          <a:xfrm>
+            <a:off x="640080" y="1005840"/>
+            <a:ext cx="10881360" cy="914400"/>
+          </a:xfrm>
+          <a:prstGeom prst="rect">
+            <a:avLst/>
+          </a:prstGeom>
+          <a:noFill/>
+          <a:ln/>
+        </p:spPr>
+        <p:txBody>
+          <a:bodyPr wrap="square" rtlCol="0" anchor="t">
+            <a:spAutoFit/>
+          </a:bodyPr>
           <a:lstStyle/>
           <a:p>
             <a:pPr indent="0" marL="0">
@@ -3660,7 +4572,7 @@
                 <a:ea typeface="Cambria" pitchFamily="34" charset="-122"/>
                 <a:cs typeface="Cambria" pitchFamily="34" charset="-120"/>
               </a:rPr>
-              <a:t>Reading &amp; homework</a:t>
+              <a:t>The show-your-work appendix</a:t>
             </a:r>
             <a:endParaRPr lang="en-US" sz="3000" dirty="0"/>
           </a:p>
@@ -3668,14 +4580,14 @@
       </p:sp>
       <p:sp>
         <p:nvSpPr>
-          <p:cNvPr id="3" name="Shape 1"/>
-          <p:cNvSpPr/>
-          <p:nvPr/>
-        </p:nvSpPr>
-        <p:spPr>
-          <a:xfrm>
-            <a:off x="640080" y="1810512"/>
-            <a:ext cx="219456" cy="219456"/>
+          <p:cNvPr id="5" name="Shape 3"/>
+          <p:cNvSpPr/>
+          <p:nvPr/>
+        </p:nvSpPr>
+        <p:spPr>
+          <a:xfrm>
+            <a:off x="640080" y="2331720"/>
+            <a:ext cx="201168" cy="201168"/>
           </a:xfrm>
           <a:prstGeom prst="ellipse">
             <a:avLst/>
@@ -3688,53 +4600,78 @@
       </p:sp>
       <p:sp>
         <p:nvSpPr>
-          <p:cNvPr id="4" name="Text 2"/>
-          <p:cNvSpPr/>
-          <p:nvPr/>
-        </p:nvSpPr>
-        <p:spPr>
-          <a:xfrm>
-            <a:off x="1051560" y="1737360"/>
-            <a:ext cx="10424160" cy="365760"/>
-          </a:xfrm>
-          <a:prstGeom prst="rect">
-            <a:avLst/>
-          </a:prstGeom>
-          <a:noFill/>
-          <a:ln/>
-        </p:spPr>
-        <p:txBody>
-          <a:bodyPr wrap="square" rtlCol="0" anchor="ctr"/>
+          <p:cNvPr id="6" name="Text 4"/>
+          <p:cNvSpPr/>
+          <p:nvPr/>
+        </p:nvSpPr>
+        <p:spPr>
+          <a:xfrm>
+            <a:off x="1097280" y="2240280"/>
+            <a:ext cx="10607040" cy="1051560"/>
+          </a:xfrm>
+          <a:prstGeom prst="rect">
+            <a:avLst/>
+          </a:prstGeom>
+          <a:noFill/>
+          <a:ln/>
+        </p:spPr>
+        <p:txBody>
+          <a:bodyPr wrap="square" rtlCol="0" anchor="t">
+            <a:spAutoFit/>
+          </a:bodyPr>
           <a:lstStyle/>
           <a:p>
             <a:pPr indent="0" marL="0">
-              <a:buNone/>
-            </a:pPr>
-            <a:r>
-              <a:rPr lang="en-US" sz="1500" b="1" dirty="0">
-                <a:solidFill>
-                  <a:srgbClr val="7A3B2E"/>
+              <a:lnSpc>
+                <a:spcPct val="112000"/>
+              </a:lnSpc>
+              <a:buNone/>
+            </a:pPr>
+            <a:r>
+              <a:rPr lang="en-US" sz="1650" dirty="0">
+                <a:solidFill>
+                  <a:srgbClr val="1A1A1A"/>
                 </a:solidFill>
                 <a:latin typeface="Calibri" pitchFamily="34" charset="0"/>
                 <a:ea typeface="Calibri" pitchFamily="34" charset="-122"/>
                 <a:cs typeface="Calibri" pitchFamily="34" charset="-120"/>
               </a:rPr>
-              <a:t>Reading</a:t>
-            </a:r>
-            <a:endParaRPr lang="en-US" sz="1500" dirty="0"/>
-          </a:p>
-        </p:txBody>
-      </p:sp>
-      <p:sp>
-        <p:nvSpPr>
-          <p:cNvPr id="5" name="Text 3"/>
-          <p:cNvSpPr/>
-          <p:nvPr/>
-        </p:nvSpPr>
-        <p:spPr>
-          <a:xfrm>
-            <a:off x="1051560" y="2121408"/>
-            <a:ext cx="10424160" cy="731520"/>
+              <a:t>Your method choices, your moments of doubt, what you cut, what the AI got wrong.</a:t>
+            </a:r>
+            <a:endParaRPr lang="en-US" sz="1650" dirty="0"/>
+          </a:p>
+        </p:txBody>
+      </p:sp>
+      <p:sp>
+        <p:nvSpPr>
+          <p:cNvPr id="7" name="Shape 5"/>
+          <p:cNvSpPr/>
+          <p:nvPr/>
+        </p:nvSpPr>
+        <p:spPr>
+          <a:xfrm>
+            <a:off x="640080" y="3383280"/>
+            <a:ext cx="201168" cy="201168"/>
+          </a:xfrm>
+          <a:prstGeom prst="ellipse">
+            <a:avLst/>
+          </a:prstGeom>
+          <a:solidFill>
+            <a:srgbClr val="3F6F5F"/>
+          </a:solidFill>
+          <a:ln/>
+        </p:spPr>
+      </p:sp>
+      <p:sp>
+        <p:nvSpPr>
+          <p:cNvPr id="8" name="Text 6"/>
+          <p:cNvSpPr/>
+          <p:nvPr/>
+        </p:nvSpPr>
+        <p:spPr>
+          <a:xfrm>
+            <a:off x="1097280" y="3291840"/>
+            <a:ext cx="10607040" cy="1051560"/>
           </a:xfrm>
           <a:prstGeom prst="rect">
             <a:avLst/>
@@ -3749,10 +4686,13 @@
           <a:lstStyle/>
           <a:p>
             <a:pPr indent="0" marL="0">
-              <a:buNone/>
-            </a:pPr>
-            <a:r>
-              <a:rPr lang="en-US" sz="1400" dirty="0">
+              <a:lnSpc>
+                <a:spcPct val="112000"/>
+              </a:lnSpc>
+              <a:buNone/>
+            </a:pPr>
+            <a:r>
+              <a:rPr lang="en-US" sz="1650" dirty="0">
                 <a:solidFill>
                   <a:srgbClr val="1A1A1A"/>
                 </a:solidFill>
@@ -3760,309 +4700,73 @@
                 <a:ea typeface="Calibri" pitchFamily="34" charset="-122"/>
                 <a:cs typeface="Calibri" pitchFamily="34" charset="-120"/>
               </a:rPr>
-              <a:t>None required</a:t>
-            </a:r>
-            <a:endParaRPr lang="en-US" sz="1400" dirty="0"/>
-          </a:p>
-        </p:txBody>
-      </p:sp>
-      <p:sp>
-        <p:nvSpPr>
-          <p:cNvPr id="6" name="Shape 4"/>
-          <p:cNvSpPr/>
-          <p:nvPr/>
-        </p:nvSpPr>
-        <p:spPr>
-          <a:xfrm>
-            <a:off x="640080" y="2953512"/>
-            <a:ext cx="219456" cy="219456"/>
+              <a:t>Name where a reader could reasonably disagree with you, before they do.</a:t>
+            </a:r>
+            <a:endParaRPr lang="en-US" sz="1650" dirty="0"/>
+          </a:p>
+        </p:txBody>
+      </p:sp>
+      <p:sp>
+        <p:nvSpPr>
+          <p:cNvPr id="9" name="Shape 7"/>
+          <p:cNvSpPr/>
+          <p:nvPr/>
+        </p:nvSpPr>
+        <p:spPr>
+          <a:xfrm>
+            <a:off x="640080" y="4434840"/>
+            <a:ext cx="201168" cy="201168"/>
           </a:xfrm>
           <a:prstGeom prst="ellipse">
             <a:avLst/>
           </a:prstGeom>
           <a:solidFill>
-            <a:srgbClr val="3F6F5F"/>
-          </a:solidFill>
-          <a:ln/>
-        </p:spPr>
-      </p:sp>
-      <p:sp>
-        <p:nvSpPr>
-          <p:cNvPr id="7" name="Text 5"/>
-          <p:cNvSpPr/>
-          <p:nvPr/>
-        </p:nvSpPr>
-        <p:spPr>
-          <a:xfrm>
-            <a:off x="1051560" y="2880360"/>
-            <a:ext cx="10424160" cy="365760"/>
-          </a:xfrm>
-          <a:prstGeom prst="rect">
-            <a:avLst/>
-          </a:prstGeom>
-          <a:noFill/>
-          <a:ln/>
-        </p:spPr>
-        <p:txBody>
-          <a:bodyPr wrap="square" rtlCol="0" anchor="ctr"/>
+            <a:srgbClr val="B9852F"/>
+          </a:solidFill>
+          <a:ln/>
+        </p:spPr>
+      </p:sp>
+      <p:sp>
+        <p:nvSpPr>
+          <p:cNvPr id="10" name="Text 8"/>
+          <p:cNvSpPr/>
+          <p:nvPr/>
+        </p:nvSpPr>
+        <p:spPr>
+          <a:xfrm>
+            <a:off x="1097280" y="4343400"/>
+            <a:ext cx="10607040" cy="1051560"/>
+          </a:xfrm>
+          <a:prstGeom prst="rect">
+            <a:avLst/>
+          </a:prstGeom>
+          <a:noFill/>
+          <a:ln/>
+        </p:spPr>
+        <p:txBody>
+          <a:bodyPr wrap="square" rtlCol="0" anchor="t">
+            <a:spAutoFit/>
+          </a:bodyPr>
           <a:lstStyle/>
           <a:p>
             <a:pPr indent="0" marL="0">
-              <a:buNone/>
-            </a:pPr>
-            <a:r>
-              <a:rPr lang="en-US" sz="1500" b="1" dirty="0">
-                <a:solidFill>
-                  <a:srgbClr val="3F6F5F"/>
+              <a:lnSpc>
+                <a:spcPct val="112000"/>
+              </a:lnSpc>
+              <a:buNone/>
+            </a:pPr>
+            <a:r>
+              <a:rPr lang="en-US" sz="1650" dirty="0">
+                <a:solidFill>
+                  <a:srgbClr val="1A1A1A"/>
                 </a:solidFill>
                 <a:latin typeface="Calibri" pitchFamily="34" charset="0"/>
                 <a:ea typeface="Calibri" pitchFamily="34" charset="-122"/>
                 <a:cs typeface="Calibri" pitchFamily="34" charset="-120"/>
               </a:rPr>
-              <a:t>Supplement</a:t>
-            </a:r>
-            <a:endParaRPr lang="en-US" sz="1500" dirty="0"/>
-          </a:p>
-        </p:txBody>
-      </p:sp>
-      <p:sp>
-        <p:nvSpPr>
-          <p:cNvPr id="8" name="Text 6"/>
-          <p:cNvSpPr/>
-          <p:nvPr/>
-        </p:nvSpPr>
-        <p:spPr>
-          <a:xfrm>
-            <a:off x="1051560" y="3264408"/>
-            <a:ext cx="10424160" cy="731520"/>
-          </a:xfrm>
-          <a:prstGeom prst="rect">
-            <a:avLst/>
-          </a:prstGeom>
-          <a:noFill/>
-          <a:ln/>
-        </p:spPr>
-        <p:txBody>
-          <a:bodyPr wrap="square" rtlCol="0" anchor="t">
-            <a:spAutoFit/>
-          </a:bodyPr>
-          <a:lstStyle/>
-          <a:p>
-            <a:pPr indent="0" marL="0">
-              <a:buNone/>
-            </a:pPr>
-            <a:r>
-              <a:rPr lang="en-US" sz="1400" dirty="0">
-                <a:solidFill>
-                  <a:srgbClr val="1A1A1A"/>
-                </a:solidFill>
-                <a:latin typeface="Calibri" pitchFamily="34" charset="0"/>
-                <a:ea typeface="Calibri" pitchFamily="34" charset="-122"/>
-                <a:cs typeface="Calibri" pitchFamily="34" charset="-120"/>
-              </a:rPr>
-              <a:t>TimeCapsuleLLM and Speak, Memory; period models MonadGPT and MacBERTh</a:t>
-            </a:r>
-            <a:endParaRPr lang="en-US" sz="1400" dirty="0"/>
-          </a:p>
-        </p:txBody>
-      </p:sp>
-      <p:sp>
-        <p:nvSpPr>
-          <p:cNvPr id="9" name="Shape 7"/>
-          <p:cNvSpPr/>
-          <p:nvPr/>
-        </p:nvSpPr>
-        <p:spPr>
-          <a:xfrm>
-            <a:off x="640080" y="4096512"/>
-            <a:ext cx="219456" cy="219456"/>
-          </a:xfrm>
-          <a:prstGeom prst="ellipse">
-            <a:avLst/>
-          </a:prstGeom>
-          <a:solidFill>
-            <a:srgbClr val="B9852F"/>
-          </a:solidFill>
-          <a:ln/>
-        </p:spPr>
-      </p:sp>
-      <p:sp>
-        <p:nvSpPr>
-          <p:cNvPr id="10" name="Text 8"/>
-          <p:cNvSpPr/>
-          <p:nvPr/>
-        </p:nvSpPr>
-        <p:spPr>
-          <a:xfrm>
-            <a:off x="1051560" y="4023360"/>
-            <a:ext cx="10424160" cy="365760"/>
-          </a:xfrm>
-          <a:prstGeom prst="rect">
-            <a:avLst/>
-          </a:prstGeom>
-          <a:noFill/>
-          <a:ln/>
-        </p:spPr>
-        <p:txBody>
-          <a:bodyPr wrap="square" rtlCol="0" anchor="ctr"/>
-          <a:lstStyle/>
-          <a:p>
-            <a:pPr indent="0" marL="0">
-              <a:buNone/>
-            </a:pPr>
-            <a:r>
-              <a:rPr lang="en-US" sz="1500" b="1" dirty="0">
-                <a:solidFill>
-                  <a:srgbClr val="B9852F"/>
-                </a:solidFill>
-                <a:latin typeface="Calibri" pitchFamily="34" charset="0"/>
-                <a:ea typeface="Calibri" pitchFamily="34" charset="-122"/>
-                <a:cs typeface="Calibri" pitchFamily="34" charset="-120"/>
-              </a:rPr>
-              <a:t>Sketch</a:t>
-            </a:r>
-            <a:endParaRPr lang="en-US" sz="1500" dirty="0"/>
-          </a:p>
-        </p:txBody>
-      </p:sp>
-      <p:sp>
-        <p:nvSpPr>
-          <p:cNvPr id="11" name="Text 9"/>
-          <p:cNvSpPr/>
-          <p:nvPr/>
-        </p:nvSpPr>
-        <p:spPr>
-          <a:xfrm>
-            <a:off x="1051560" y="4407408"/>
-            <a:ext cx="10424160" cy="731520"/>
-          </a:xfrm>
-          <a:prstGeom prst="rect">
-            <a:avLst/>
-          </a:prstGeom>
-          <a:noFill/>
-          <a:ln/>
-        </p:spPr>
-        <p:txBody>
-          <a:bodyPr wrap="square" rtlCol="0" anchor="t">
-            <a:spAutoFit/>
-          </a:bodyPr>
-          <a:lstStyle/>
-          <a:p>
-            <a:pPr indent="0" marL="0">
-              <a:buNone/>
-            </a:pPr>
-            <a:r>
-              <a:rPr lang="en-US" sz="1400" dirty="0">
-                <a:solidFill>
-                  <a:srgbClr val="1A1A1A"/>
-                </a:solidFill>
-                <a:latin typeface="Calibri" pitchFamily="34" charset="0"/>
-                <a:ea typeface="Calibri" pitchFamily="34" charset="-122"/>
-                <a:cs typeface="Calibri" pitchFamily="34" charset="-120"/>
-              </a:rPr>
-              <a:t>Expand to 600 to 1,000 words; write your show-your-work appendix and which checks survived.</a:t>
-            </a:r>
-            <a:endParaRPr lang="en-US" sz="1400" dirty="0"/>
-          </a:p>
-        </p:txBody>
-      </p:sp>
-      <p:sp>
-        <p:nvSpPr>
-          <p:cNvPr id="12" name="Shape 10"/>
-          <p:cNvSpPr/>
-          <p:nvPr/>
-        </p:nvSpPr>
-        <p:spPr>
-          <a:xfrm>
-            <a:off x="640080" y="5239512"/>
-            <a:ext cx="219456" cy="219456"/>
-          </a:xfrm>
-          <a:prstGeom prst="ellipse">
-            <a:avLst/>
-          </a:prstGeom>
-          <a:solidFill>
-            <a:srgbClr val="7A3B2E"/>
-          </a:solidFill>
-          <a:ln/>
-        </p:spPr>
-      </p:sp>
-      <p:sp>
-        <p:nvSpPr>
-          <p:cNvPr id="13" name="Text 11"/>
-          <p:cNvSpPr/>
-          <p:nvPr/>
-        </p:nvSpPr>
-        <p:spPr>
-          <a:xfrm>
-            <a:off x="1051560" y="5166360"/>
-            <a:ext cx="10424160" cy="365760"/>
-          </a:xfrm>
-          <a:prstGeom prst="rect">
-            <a:avLst/>
-          </a:prstGeom>
-          <a:noFill/>
-          <a:ln/>
-        </p:spPr>
-        <p:txBody>
-          <a:bodyPr wrap="square" rtlCol="0" anchor="ctr"/>
-          <a:lstStyle/>
-          <a:p>
-            <a:pPr indent="0" marL="0">
-              <a:buNone/>
-            </a:pPr>
-            <a:r>
-              <a:rPr lang="en-US" sz="1500" b="1" dirty="0">
-                <a:solidFill>
-                  <a:srgbClr val="7A3B2E"/>
-                </a:solidFill>
-                <a:latin typeface="Calibri" pitchFamily="34" charset="0"/>
-                <a:ea typeface="Calibri" pitchFamily="34" charset="-122"/>
-                <a:cs typeface="Calibri" pitchFamily="34" charset="-120"/>
-              </a:rPr>
-              <a:t>Check (AI closed)</a:t>
-            </a:r>
-            <a:endParaRPr lang="en-US" sz="1500" dirty="0"/>
-          </a:p>
-        </p:txBody>
-      </p:sp>
-      <p:sp>
-        <p:nvSpPr>
-          <p:cNvPr id="14" name="Text 12"/>
-          <p:cNvSpPr/>
-          <p:nvPr/>
-        </p:nvSpPr>
-        <p:spPr>
-          <a:xfrm>
-            <a:off x="1051560" y="5550408"/>
-            <a:ext cx="10424160" cy="731520"/>
-          </a:xfrm>
-          <a:prstGeom prst="rect">
-            <a:avLst/>
-          </a:prstGeom>
-          <a:noFill/>
-          <a:ln/>
-        </p:spPr>
-        <p:txBody>
-          <a:bodyPr wrap="square" rtlCol="0" anchor="t">
-            <a:spAutoFit/>
-          </a:bodyPr>
-          <a:lstStyle/>
-          <a:p>
-            <a:pPr indent="0" marL="0">
-              <a:buNone/>
-            </a:pPr>
-            <a:r>
-              <a:rPr lang="en-US" sz="1400" dirty="0">
-                <a:solidFill>
-                  <a:srgbClr val="1A1A1A"/>
-                </a:solidFill>
-                <a:latin typeface="Calibri" pitchFamily="34" charset="0"/>
-                <a:ea typeface="Calibri" pitchFamily="34" charset="-122"/>
-                <a:cs typeface="Calibri" pitchFamily="34" charset="-120"/>
-              </a:rPr>
-              <a:t>Explain it: your headline finding, and what it does not show. (Competencies 3, 4.)</a:t>
-            </a:r>
-            <a:endParaRPr lang="en-US" sz="1400" dirty="0"/>
+              <a:t>The honesty you demanded of published work all term, turned on yourself. (Data Feminism's practice, run quietly all course.)</a:t>
+            </a:r>
+            <a:endParaRPr lang="en-US" sz="1650" dirty="0"/>
           </a:p>
         </p:txBody>
       </p:sp>
@@ -4106,8 +4810,8 @@
         </p:nvSpPr>
         <p:spPr>
           <a:xfrm>
-            <a:off x="640080" y="640080"/>
-            <a:ext cx="10058400" cy="320040"/>
+            <a:off x="640080" y="731520"/>
+            <a:ext cx="10058400" cy="731520"/>
           </a:xfrm>
           <a:prstGeom prst="rect">
             <a:avLst/>
@@ -4123,30 +4827,111 @@
               <a:buNone/>
             </a:pPr>
             <a:r>
-              <a:rPr lang="en-US" sz="1300" b="1" spc="300" kern="0" dirty="0">
-                <a:solidFill>
-                  <a:srgbClr val="7A3B2E"/>
+              <a:rPr lang="en-US" sz="3000" b="1" dirty="0">
+                <a:solidFill>
+                  <a:srgbClr val="1A1A1A"/>
+                </a:solidFill>
+                <a:latin typeface="Cambria" pitchFamily="34" charset="0"/>
+                <a:ea typeface="Cambria" pitchFamily="34" charset="-122"/>
+                <a:cs typeface="Cambria" pitchFamily="34" charset="-120"/>
+              </a:rPr>
+              <a:t>Three modes today</a:t>
+            </a:r>
+            <a:endParaRPr lang="en-US" sz="3000" dirty="0"/>
+          </a:p>
+        </p:txBody>
+      </p:sp>
+      <p:sp>
+        <p:nvSpPr>
+          <p:cNvPr id="3" name="Text 1"/>
+          <p:cNvSpPr/>
+          <p:nvPr/>
+        </p:nvSpPr>
+        <p:spPr>
+          <a:xfrm>
+            <a:off x="640080" y="1417320"/>
+            <a:ext cx="10058400" cy="365760"/>
+          </a:xfrm>
+          <a:prstGeom prst="rect">
+            <a:avLst/>
+          </a:prstGeom>
+          <a:noFill/>
+          <a:ln/>
+        </p:spPr>
+        <p:txBody>
+          <a:bodyPr wrap="square" rtlCol="0" anchor="ctr"/>
+          <a:lstStyle/>
+          <a:p>
+            <a:pPr indent="0" marL="0">
+              <a:buNone/>
+            </a:pPr>
+            <a:r>
+              <a:rPr lang="en-US" sz="1400" i="1" dirty="0">
+                <a:solidFill>
+                  <a:srgbClr val="6B6B63"/>
                 </a:solidFill>
                 <a:latin typeface="Calibri" pitchFamily="34" charset="0"/>
                 <a:ea typeface="Calibri" pitchFamily="34" charset="-122"/>
                 <a:cs typeface="Calibri" pitchFamily="34" charset="-120"/>
               </a:rPr>
-              <a:t>HOW THIS WEEK CONNECTS</a:t>
-            </a:r>
-            <a:endParaRPr lang="en-US" sz="1300" dirty="0"/>
-          </a:p>
-        </p:txBody>
-      </p:sp>
-      <p:sp>
-        <p:nvSpPr>
-          <p:cNvPr id="3" name="Text 1"/>
-          <p:cNvSpPr/>
-          <p:nvPr/>
-        </p:nvSpPr>
-        <p:spPr>
-          <a:xfrm>
-            <a:off x="640080" y="987552"/>
-            <a:ext cx="10058400" cy="640080"/>
+              <a:t>about a third of the session each</a:t>
+            </a:r>
+            <a:endParaRPr lang="en-US" sz="1400" dirty="0"/>
+          </a:p>
+        </p:txBody>
+      </p:sp>
+      <p:sp>
+        <p:nvSpPr>
+          <p:cNvPr id="4" name="Shape 2"/>
+          <p:cNvSpPr/>
+          <p:nvPr/>
+        </p:nvSpPr>
+        <p:spPr>
+          <a:xfrm>
+            <a:off x="640080" y="2194560"/>
+            <a:ext cx="3383280" cy="3291840"/>
+          </a:xfrm>
+          <a:prstGeom prst="roundRect">
+            <a:avLst>
+              <a:gd name="adj" fmla="val 3333"/>
+            </a:avLst>
+          </a:prstGeom>
+          <a:solidFill>
+            <a:srgbClr val="F4EEE8"/>
+          </a:solidFill>
+          <a:ln/>
+        </p:spPr>
+      </p:sp>
+      <p:sp>
+        <p:nvSpPr>
+          <p:cNvPr id="5" name="Shape 3"/>
+          <p:cNvSpPr/>
+          <p:nvPr/>
+        </p:nvSpPr>
+        <p:spPr>
+          <a:xfrm>
+            <a:off x="1051560" y="2606040"/>
+            <a:ext cx="548640" cy="548640"/>
+          </a:xfrm>
+          <a:prstGeom prst="ellipse">
+            <a:avLst/>
+          </a:prstGeom>
+          <a:solidFill>
+            <a:srgbClr val="7A3B2E"/>
+          </a:solidFill>
+          <a:ln/>
+        </p:spPr>
+      </p:sp>
+      <p:sp>
+        <p:nvSpPr>
+          <p:cNvPr id="6" name="Text 4"/>
+          <p:cNvSpPr/>
+          <p:nvPr/>
+        </p:nvSpPr>
+        <p:spPr>
+          <a:xfrm>
+            <a:off x="1005840" y="3383280"/>
+            <a:ext cx="2651760" cy="548640"/>
           </a:xfrm>
           <a:prstGeom prst="rect">
             <a:avLst/>
@@ -4162,7 +4947,7 @@
               <a:buNone/>
             </a:pPr>
             <a:r>
-              <a:rPr lang="en-US" sz="2800" b="1" dirty="0">
+              <a:rPr lang="en-US" sz="2100" b="1" dirty="0">
                 <a:solidFill>
                   <a:srgbClr val="1A1A1A"/>
                 </a:solidFill>
@@ -4170,44 +4955,108 @@
                 <a:ea typeface="Cambria" pitchFamily="34" charset="-122"/>
                 <a:cs typeface="Cambria" pitchFamily="34" charset="-120"/>
               </a:rPr>
-              <a:t>The course's through-lines</a:t>
-            </a:r>
-            <a:endParaRPr lang="en-US" sz="2800" dirty="0"/>
-          </a:p>
-        </p:txBody>
-      </p:sp>
-      <p:sp>
-        <p:nvSpPr>
-          <p:cNvPr id="4" name="Shape 2"/>
-          <p:cNvSpPr/>
-          <p:nvPr/>
-        </p:nvSpPr>
-        <p:spPr>
-          <a:xfrm>
-            <a:off x="640080" y="2057400"/>
-            <a:ext cx="457200" cy="457200"/>
+              <a:t>Lecture / demo</a:t>
+            </a:r>
+            <a:endParaRPr lang="en-US" sz="2100" dirty="0"/>
+          </a:p>
+        </p:txBody>
+      </p:sp>
+      <p:sp>
+        <p:nvSpPr>
+          <p:cNvPr id="7" name="Text 5"/>
+          <p:cNvSpPr/>
+          <p:nvPr/>
+        </p:nvSpPr>
+        <p:spPr>
+          <a:xfrm>
+            <a:off x="1005840" y="3977640"/>
+            <a:ext cx="2651760" cy="1371600"/>
+          </a:xfrm>
+          <a:prstGeom prst="rect">
+            <a:avLst/>
+          </a:prstGeom>
+          <a:noFill/>
+          <a:ln/>
+        </p:spPr>
+        <p:txBody>
+          <a:bodyPr wrap="square" rtlCol="0" anchor="t">
+            <a:spAutoFit/>
+          </a:bodyPr>
+          <a:lstStyle/>
+          <a:p>
+            <a:pPr indent="0" marL="0">
+              <a:lnSpc>
+                <a:spcPct val="115000"/>
+              </a:lnSpc>
+              <a:buNone/>
+            </a:pPr>
+            <a:r>
+              <a:rPr lang="en-US" sz="1500" dirty="0">
+                <a:solidFill>
+                  <a:srgbClr val="1A1A1A"/>
+                </a:solidFill>
+                <a:latin typeface="Calibri" pitchFamily="34" charset="0"/>
+                <a:ea typeface="Calibri" pitchFamily="34" charset="-122"/>
+                <a:cs typeface="Calibri" pitchFamily="34" charset="-120"/>
+              </a:rPr>
+              <a:t>What a trained model is: a compression of its corpus</a:t>
+            </a:r>
+            <a:endParaRPr lang="en-US" sz="1500" dirty="0"/>
+          </a:p>
+        </p:txBody>
+      </p:sp>
+      <p:sp>
+        <p:nvSpPr>
+          <p:cNvPr id="8" name="Shape 6"/>
+          <p:cNvSpPr/>
+          <p:nvPr/>
+        </p:nvSpPr>
+        <p:spPr>
+          <a:xfrm>
+            <a:off x="4526280" y="2194560"/>
+            <a:ext cx="3383280" cy="3291840"/>
           </a:xfrm>
           <a:prstGeom prst="roundRect">
             <a:avLst>
-              <a:gd name="adj" fmla="val 16000"/>
+              <a:gd name="adj" fmla="val 3333"/>
             </a:avLst>
           </a:prstGeom>
           <a:solidFill>
-            <a:srgbClr val="7A3B2E"/>
-          </a:solidFill>
-          <a:ln/>
-        </p:spPr>
-      </p:sp>
-      <p:sp>
-        <p:nvSpPr>
-          <p:cNvPr id="5" name="Text 3"/>
-          <p:cNvSpPr/>
-          <p:nvPr/>
-        </p:nvSpPr>
-        <p:spPr>
-          <a:xfrm>
-            <a:off x="640080" y="2057400"/>
-            <a:ext cx="457200" cy="457200"/>
+            <a:srgbClr val="F4EEE8"/>
+          </a:solidFill>
+          <a:ln/>
+        </p:spPr>
+      </p:sp>
+      <p:sp>
+        <p:nvSpPr>
+          <p:cNvPr id="9" name="Shape 7"/>
+          <p:cNvSpPr/>
+          <p:nvPr/>
+        </p:nvSpPr>
+        <p:spPr>
+          <a:xfrm>
+            <a:off x="4937760" y="2606040"/>
+            <a:ext cx="548640" cy="548640"/>
+          </a:xfrm>
+          <a:prstGeom prst="ellipse">
+            <a:avLst/>
+          </a:prstGeom>
+          <a:solidFill>
+            <a:srgbClr val="3F6F5F"/>
+          </a:solidFill>
+          <a:ln/>
+        </p:spPr>
+      </p:sp>
+      <p:sp>
+        <p:nvSpPr>
+          <p:cNvPr id="10" name="Text 8"/>
+          <p:cNvSpPr/>
+          <p:nvPr/>
+        </p:nvSpPr>
+        <p:spPr>
+          <a:xfrm>
+            <a:off x="4892040" y="3383280"/>
+            <a:ext cx="2651760" cy="548640"/>
           </a:xfrm>
           <a:prstGeom prst="rect">
             <a:avLst/>
@@ -4219,34 +5068,120 @@
           <a:bodyPr wrap="square" rtlCol="0" anchor="ctr"/>
           <a:lstStyle/>
           <a:p>
-            <a:pPr algn="ctr" indent="0" marL="0">
-              <a:buNone/>
-            </a:pPr>
-            <a:r>
-              <a:rPr lang="en-US" sz="2000" b="1" dirty="0">
-                <a:solidFill>
-                  <a:srgbClr val="FFFFFF"/>
+            <a:pPr indent="0" marL="0">
+              <a:buNone/>
+            </a:pPr>
+            <a:r>
+              <a:rPr lang="en-US" sz="2100" b="1" dirty="0">
+                <a:solidFill>
+                  <a:srgbClr val="1A1A1A"/>
                 </a:solidFill>
                 <a:latin typeface="Cambria" pitchFamily="34" charset="0"/>
                 <a:ea typeface="Cambria" pitchFamily="34" charset="-122"/>
                 <a:cs typeface="Cambria" pitchFamily="34" charset="-120"/>
               </a:rPr>
-              <a:t>1</a:t>
-            </a:r>
-            <a:endParaRPr lang="en-US" sz="2000" dirty="0"/>
-          </a:p>
-        </p:txBody>
-      </p:sp>
-      <p:sp>
-        <p:nvSpPr>
-          <p:cNvPr id="6" name="Text 4"/>
-          <p:cNvSpPr/>
-          <p:nvPr/>
-        </p:nvSpPr>
-        <p:spPr>
-          <a:xfrm>
-            <a:off x="1371600" y="2020824"/>
-            <a:ext cx="10332720" cy="411480"/>
+              <a:t>Workshop</a:t>
+            </a:r>
+            <a:endParaRPr lang="en-US" sz="2100" dirty="0"/>
+          </a:p>
+        </p:txBody>
+      </p:sp>
+      <p:sp>
+        <p:nvSpPr>
+          <p:cNvPr id="11" name="Text 9"/>
+          <p:cNvSpPr/>
+          <p:nvPr/>
+        </p:nvSpPr>
+        <p:spPr>
+          <a:xfrm>
+            <a:off x="4892040" y="3977640"/>
+            <a:ext cx="2651760" cy="1371600"/>
+          </a:xfrm>
+          <a:prstGeom prst="rect">
+            <a:avLst/>
+          </a:prstGeom>
+          <a:noFill/>
+          <a:ln/>
+        </p:spPr>
+        <p:txBody>
+          <a:bodyPr wrap="square" rtlCol="0" anchor="t">
+            <a:spAutoFit/>
+          </a:bodyPr>
+          <a:lstStyle/>
+          <a:p>
+            <a:pPr indent="0" marL="0">
+              <a:lnSpc>
+                <a:spcPct val="115000"/>
+              </a:lnSpc>
+              <a:buNone/>
+            </a:pPr>
+            <a:r>
+              <a:rPr lang="en-US" sz="1500" dirty="0">
+                <a:solidFill>
+                  <a:srgbClr val="1A1A1A"/>
+                </a:solidFill>
+                <a:latin typeface="Calibri" pitchFamily="34" charset="0"/>
+                <a:ea typeface="Calibri" pitchFamily="34" charset="-122"/>
+                <a:cs typeface="Calibri" pitchFamily="34" charset="-120"/>
+              </a:rPr>
+              <a:t>Build hands-on on your own data.</a:t>
+            </a:r>
+            <a:endParaRPr lang="en-US" sz="1500" dirty="0"/>
+          </a:p>
+        </p:txBody>
+      </p:sp>
+      <p:sp>
+        <p:nvSpPr>
+          <p:cNvPr id="12" name="Shape 10"/>
+          <p:cNvSpPr/>
+          <p:nvPr/>
+        </p:nvSpPr>
+        <p:spPr>
+          <a:xfrm>
+            <a:off x="8412480" y="2194560"/>
+            <a:ext cx="3383280" cy="3291840"/>
+          </a:xfrm>
+          <a:prstGeom prst="roundRect">
+            <a:avLst>
+              <a:gd name="adj" fmla="val 3333"/>
+            </a:avLst>
+          </a:prstGeom>
+          <a:solidFill>
+            <a:srgbClr val="F4EEE8"/>
+          </a:solidFill>
+          <a:ln/>
+        </p:spPr>
+      </p:sp>
+      <p:sp>
+        <p:nvSpPr>
+          <p:cNvPr id="13" name="Shape 11"/>
+          <p:cNvSpPr/>
+          <p:nvPr/>
+        </p:nvSpPr>
+        <p:spPr>
+          <a:xfrm>
+            <a:off x="8823960" y="2606040"/>
+            <a:ext cx="548640" cy="548640"/>
+          </a:xfrm>
+          <a:prstGeom prst="ellipse">
+            <a:avLst/>
+          </a:prstGeom>
+          <a:solidFill>
+            <a:srgbClr val="B9852F"/>
+          </a:solidFill>
+          <a:ln/>
+        </p:spPr>
+      </p:sp>
+      <p:sp>
+        <p:nvSpPr>
+          <p:cNvPr id="14" name="Text 12"/>
+          <p:cNvSpPr/>
+          <p:nvPr/>
+        </p:nvSpPr>
+        <p:spPr>
+          <a:xfrm>
+            <a:off x="8778240" y="3383280"/>
+            <a:ext cx="2651760" cy="548640"/>
           </a:xfrm>
           <a:prstGeom prst="rect">
             <a:avLst/>
@@ -4262,30 +5197,30 @@
               <a:buNone/>
             </a:pPr>
             <a:r>
-              <a:rPr lang="en-US" sz="1900" b="1" dirty="0">
-                <a:solidFill>
-                  <a:srgbClr val="7A3B2E"/>
+              <a:rPr lang="en-US" sz="2100" b="1" dirty="0">
+                <a:solidFill>
+                  <a:srgbClr val="1A1A1A"/>
                 </a:solidFill>
                 <a:latin typeface="Cambria" pitchFamily="34" charset="0"/>
                 <a:ea typeface="Cambria" pitchFamily="34" charset="-122"/>
                 <a:cs typeface="Cambria" pitchFamily="34" charset="-120"/>
               </a:rPr>
-              <a:t>Whose data, at full scale</a:t>
-            </a:r>
-            <a:endParaRPr lang="en-US" sz="1900" dirty="0"/>
-          </a:p>
-        </p:txBody>
-      </p:sp>
-      <p:sp>
-        <p:nvSpPr>
-          <p:cNvPr id="7" name="Text 5"/>
-          <p:cNvSpPr/>
-          <p:nvPr/>
-        </p:nvSpPr>
-        <p:spPr>
-          <a:xfrm>
-            <a:off x="1371600" y="2441448"/>
-            <a:ext cx="10332720" cy="914400"/>
+              <a:t>Discussion</a:t>
+            </a:r>
+            <a:endParaRPr lang="en-US" sz="2100" dirty="0"/>
+          </a:p>
+        </p:txBody>
+      </p:sp>
+      <p:sp>
+        <p:nvSpPr>
+          <p:cNvPr id="15" name="Text 13"/>
+          <p:cNvSpPr/>
+          <p:nvPr/>
+        </p:nvSpPr>
+        <p:spPr>
+          <a:xfrm>
+            <a:off x="8778240" y="3977640"/>
+            <a:ext cx="2651760" cy="1371600"/>
           </a:xfrm>
           <a:prstGeom prst="rect">
             <a:avLst/>
@@ -4301,12 +5236,12 @@
           <a:p>
             <a:pPr indent="0" marL="0">
               <a:lnSpc>
-                <a:spcPct val="112000"/>
+                <a:spcPct val="115000"/>
               </a:lnSpc>
               <a:buNone/>
             </a:pPr>
             <a:r>
-              <a:rPr lang="en-US" sz="1450" dirty="0">
+              <a:rPr lang="en-US" sz="1500" dirty="0">
                 <a:solidFill>
                   <a:srgbClr val="1A1A1A"/>
                 </a:solidFill>
@@ -4314,297 +5249,9 @@
                 <a:ea typeface="Calibri" pitchFamily="34" charset="-122"/>
                 <a:cs typeface="Calibri" pitchFamily="34" charset="-120"/>
               </a:rPr>
-              <a:t>A model is its corpus: bound the corpus and you bound the mind.</a:t>
-            </a:r>
-            <a:endParaRPr lang="en-US" sz="1450" dirty="0"/>
-          </a:p>
-        </p:txBody>
-      </p:sp>
-      <p:sp>
-        <p:nvSpPr>
-          <p:cNvPr id="8" name="Shape 6"/>
-          <p:cNvSpPr/>
-          <p:nvPr/>
-        </p:nvSpPr>
-        <p:spPr>
-          <a:xfrm>
-            <a:off x="640080" y="3520440"/>
-            <a:ext cx="457200" cy="457200"/>
-          </a:xfrm>
-          <a:prstGeom prst="roundRect">
-            <a:avLst>
-              <a:gd name="adj" fmla="val 16000"/>
-            </a:avLst>
-          </a:prstGeom>
-          <a:solidFill>
-            <a:srgbClr val="3F6F5F"/>
-          </a:solidFill>
-          <a:ln/>
-        </p:spPr>
-      </p:sp>
-      <p:sp>
-        <p:nvSpPr>
-          <p:cNvPr id="9" name="Text 7"/>
-          <p:cNvSpPr/>
-          <p:nvPr/>
-        </p:nvSpPr>
-        <p:spPr>
-          <a:xfrm>
-            <a:off x="640080" y="3520440"/>
-            <a:ext cx="457200" cy="457200"/>
-          </a:xfrm>
-          <a:prstGeom prst="rect">
-            <a:avLst/>
-          </a:prstGeom>
-          <a:noFill/>
-          <a:ln/>
-        </p:spPr>
-        <p:txBody>
-          <a:bodyPr wrap="square" rtlCol="0" anchor="ctr"/>
-          <a:lstStyle/>
-          <a:p>
-            <a:pPr algn="ctr" indent="0" marL="0">
-              <a:buNone/>
-            </a:pPr>
-            <a:r>
-              <a:rPr lang="en-US" sz="2000" b="1" dirty="0">
-                <a:solidFill>
-                  <a:srgbClr val="FFFFFF"/>
-                </a:solidFill>
-                <a:latin typeface="Cambria" pitchFamily="34" charset="0"/>
-                <a:ea typeface="Cambria" pitchFamily="34" charset="-122"/>
-                <a:cs typeface="Cambria" pitchFamily="34" charset="-120"/>
-              </a:rPr>
-              <a:t>2</a:t>
-            </a:r>
-            <a:endParaRPr lang="en-US" sz="2000" dirty="0"/>
-          </a:p>
-        </p:txBody>
-      </p:sp>
-      <p:sp>
-        <p:nvSpPr>
-          <p:cNvPr id="10" name="Text 8"/>
-          <p:cNvSpPr/>
-          <p:nvPr/>
-        </p:nvSpPr>
-        <p:spPr>
-          <a:xfrm>
-            <a:off x="1371600" y="3483864"/>
-            <a:ext cx="10332720" cy="411480"/>
-          </a:xfrm>
-          <a:prstGeom prst="rect">
-            <a:avLst/>
-          </a:prstGeom>
-          <a:noFill/>
-          <a:ln/>
-        </p:spPr>
-        <p:txBody>
-          <a:bodyPr wrap="square" rtlCol="0" anchor="ctr"/>
-          <a:lstStyle/>
-          <a:p>
-            <a:pPr indent="0" marL="0">
-              <a:buNone/>
-            </a:pPr>
-            <a:r>
-              <a:rPr lang="en-US" sz="1900" b="1" dirty="0">
-                <a:solidFill>
-                  <a:srgbClr val="3F6F5F"/>
-                </a:solidFill>
-                <a:latin typeface="Cambria" pitchFamily="34" charset="0"/>
-                <a:ea typeface="Cambria" pitchFamily="34" charset="-122"/>
-                <a:cs typeface="Cambria" pitchFamily="34" charset="-120"/>
-              </a:rPr>
-              <a:t>Memorization isn't reading</a:t>
-            </a:r>
-            <a:endParaRPr lang="en-US" sz="1900" dirty="0"/>
-          </a:p>
-        </p:txBody>
-      </p:sp>
-      <p:sp>
-        <p:nvSpPr>
-          <p:cNvPr id="11" name="Text 9"/>
-          <p:cNvSpPr/>
-          <p:nvPr/>
-        </p:nvSpPr>
-        <p:spPr>
-          <a:xfrm>
-            <a:off x="1371600" y="3904488"/>
-            <a:ext cx="10332720" cy="914400"/>
-          </a:xfrm>
-          <a:prstGeom prst="rect">
-            <a:avLst/>
-          </a:prstGeom>
-          <a:noFill/>
-          <a:ln/>
-        </p:spPr>
-        <p:txBody>
-          <a:bodyPr wrap="square" rtlCol="0" anchor="t">
-            <a:spAutoFit/>
-          </a:bodyPr>
-          <a:lstStyle/>
-          <a:p>
-            <a:pPr indent="0" marL="0">
-              <a:lnSpc>
-                <a:spcPct val="112000"/>
-              </a:lnSpc>
-              <a:buNone/>
-            </a:pPr>
-            <a:r>
-              <a:rPr lang="en-US" sz="1450" dirty="0">
-                <a:solidFill>
-                  <a:srgbClr val="1A1A1A"/>
-                </a:solidFill>
-                <a:latin typeface="Calibri" pitchFamily="34" charset="0"/>
-                <a:ea typeface="Calibri" pitchFamily="34" charset="-122"/>
-                <a:cs typeface="Calibri" pitchFamily="34" charset="-120"/>
-              </a:rPr>
-              <a:t>A model may recite your corpus rather than read it, a validity problem, not just ethics.</a:t>
-            </a:r>
-            <a:endParaRPr lang="en-US" sz="1450" dirty="0"/>
-          </a:p>
-        </p:txBody>
-      </p:sp>
-      <p:sp>
-        <p:nvSpPr>
-          <p:cNvPr id="12" name="Shape 10"/>
-          <p:cNvSpPr/>
-          <p:nvPr/>
-        </p:nvSpPr>
-        <p:spPr>
-          <a:xfrm>
-            <a:off x="640080" y="4983480"/>
-            <a:ext cx="457200" cy="457200"/>
-          </a:xfrm>
-          <a:prstGeom prst="roundRect">
-            <a:avLst>
-              <a:gd name="adj" fmla="val 16000"/>
-            </a:avLst>
-          </a:prstGeom>
-          <a:solidFill>
-            <a:srgbClr val="B9852F"/>
-          </a:solidFill>
-          <a:ln/>
-        </p:spPr>
-      </p:sp>
-      <p:sp>
-        <p:nvSpPr>
-          <p:cNvPr id="13" name="Text 11"/>
-          <p:cNvSpPr/>
-          <p:nvPr/>
-        </p:nvSpPr>
-        <p:spPr>
-          <a:xfrm>
-            <a:off x="640080" y="4983480"/>
-            <a:ext cx="457200" cy="457200"/>
-          </a:xfrm>
-          <a:prstGeom prst="rect">
-            <a:avLst/>
-          </a:prstGeom>
-          <a:noFill/>
-          <a:ln/>
-        </p:spPr>
-        <p:txBody>
-          <a:bodyPr wrap="square" rtlCol="0" anchor="ctr"/>
-          <a:lstStyle/>
-          <a:p>
-            <a:pPr algn="ctr" indent="0" marL="0">
-              <a:buNone/>
-            </a:pPr>
-            <a:r>
-              <a:rPr lang="en-US" sz="2000" b="1" dirty="0">
-                <a:solidFill>
-                  <a:srgbClr val="FFFFFF"/>
-                </a:solidFill>
-                <a:latin typeface="Cambria" pitchFamily="34" charset="0"/>
-                <a:ea typeface="Cambria" pitchFamily="34" charset="-122"/>
-                <a:cs typeface="Cambria" pitchFamily="34" charset="-120"/>
-              </a:rPr>
-              <a:t>3</a:t>
-            </a:r>
-            <a:endParaRPr lang="en-US" sz="2000" dirty="0"/>
-          </a:p>
-        </p:txBody>
-      </p:sp>
-      <p:sp>
-        <p:nvSpPr>
-          <p:cNvPr id="14" name="Text 12"/>
-          <p:cNvSpPr/>
-          <p:nvPr/>
-        </p:nvSpPr>
-        <p:spPr>
-          <a:xfrm>
-            <a:off x="1371600" y="4946904"/>
-            <a:ext cx="10332720" cy="411480"/>
-          </a:xfrm>
-          <a:prstGeom prst="rect">
-            <a:avLst/>
-          </a:prstGeom>
-          <a:noFill/>
-          <a:ln/>
-        </p:spPr>
-        <p:txBody>
-          <a:bodyPr wrap="square" rtlCol="0" anchor="ctr"/>
-          <a:lstStyle/>
-          <a:p>
-            <a:pPr indent="0" marL="0">
-              <a:buNone/>
-            </a:pPr>
-            <a:r>
-              <a:rPr lang="en-US" sz="1900" b="1" dirty="0">
-                <a:solidFill>
-                  <a:srgbClr val="B9852F"/>
-                </a:solidFill>
-                <a:latin typeface="Cambria" pitchFamily="34" charset="0"/>
-                <a:ea typeface="Cambria" pitchFamily="34" charset="-122"/>
-                <a:cs typeface="Cambria" pitchFamily="34" charset="-120"/>
-              </a:rPr>
-              <a:t>Kill it, then keep it</a:t>
-            </a:r>
-            <a:endParaRPr lang="en-US" sz="1900" dirty="0"/>
-          </a:p>
-        </p:txBody>
-      </p:sp>
-      <p:sp>
-        <p:nvSpPr>
-          <p:cNvPr id="15" name="Text 13"/>
-          <p:cNvSpPr/>
-          <p:nvPr/>
-        </p:nvSpPr>
-        <p:spPr>
-          <a:xfrm>
-            <a:off x="1371600" y="5367528"/>
-            <a:ext cx="10332720" cy="914400"/>
-          </a:xfrm>
-          <a:prstGeom prst="rect">
-            <a:avLst/>
-          </a:prstGeom>
-          <a:noFill/>
-          <a:ln/>
-        </p:spPr>
-        <p:txBody>
-          <a:bodyPr wrap="square" rtlCol="0" anchor="t">
-            <a:spAutoFit/>
-          </a:bodyPr>
-          <a:lstStyle/>
-          <a:p>
-            <a:pPr indent="0" marL="0">
-              <a:lnSpc>
-                <a:spcPct val="112000"/>
-              </a:lnSpc>
-              <a:buNone/>
-            </a:pPr>
-            <a:r>
-              <a:rPr lang="en-US" sz="1450" dirty="0">
-                <a:solidFill>
-                  <a:srgbClr val="1A1A1A"/>
-                </a:solidFill>
-                <a:latin typeface="Calibri" pitchFamily="34" charset="0"/>
-                <a:ea typeface="Calibri" pitchFamily="34" charset="-122"/>
-                <a:cs typeface="Calibri" pitchFamily="34" charset="-120"/>
-              </a:rPr>
-              <a:t>The Week 2 trial move, now turned on your own finding.</a:t>
-            </a:r>
-            <a:endParaRPr lang="en-US" sz="1450" dirty="0"/>
+              <a:t>Interrogate the study, debate it, or critique each other's work.</a:t>
+            </a:r>
+            <a:endParaRPr lang="en-US" sz="1500" dirty="0"/>
           </a:p>
         </p:txBody>
       </p:sp>
@@ -4622,7 +5269,7 @@
     <p:bg>
       <p:bgPr>
         <a:solidFill>
-          <a:srgbClr val="4E261D"/>
+          <a:srgbClr val="FFFFFF"/>
         </a:solidFill>
       </p:bgPr>
     </p:bg>
@@ -4648,8 +5295,8 @@
         </p:nvSpPr>
         <p:spPr>
           <a:xfrm>
-            <a:off x="640080" y="1005840"/>
-            <a:ext cx="8229600" cy="320040"/>
+            <a:off x="640080" y="640080"/>
+            <a:ext cx="10058400" cy="731520"/>
           </a:xfrm>
           <a:prstGeom prst="rect">
             <a:avLst/>
@@ -4665,30 +5312,772 @@
               <a:buNone/>
             </a:pPr>
             <a:r>
-              <a:rPr lang="en-US" sz="1300" b="1" spc="300" kern="0" dirty="0">
-                <a:solidFill>
-                  <a:srgbClr val="B9852F"/>
+              <a:rPr lang="en-US" sz="3000" b="1" dirty="0">
+                <a:solidFill>
+                  <a:srgbClr val="1A1A1A"/>
+                </a:solidFill>
+                <a:latin typeface="Cambria" pitchFamily="34" charset="0"/>
+                <a:ea typeface="Cambria" pitchFamily="34" charset="-122"/>
+                <a:cs typeface="Cambria" pitchFamily="34" charset="-120"/>
+              </a:rPr>
+              <a:t>The session</a:t>
+            </a:r>
+            <a:endParaRPr lang="en-US" sz="3000" dirty="0"/>
+          </a:p>
+        </p:txBody>
+      </p:sp>
+      <p:sp>
+        <p:nvSpPr>
+          <p:cNvPr id="3" name="Shape 1"/>
+          <p:cNvSpPr/>
+          <p:nvPr/>
+        </p:nvSpPr>
+        <p:spPr>
+          <a:xfrm>
+            <a:off x="640080" y="1572768"/>
+            <a:ext cx="868680" cy="457200"/>
+          </a:xfrm>
+          <a:prstGeom prst="roundRect">
+            <a:avLst>
+              <a:gd name="adj" fmla="val 12000"/>
+            </a:avLst>
+          </a:prstGeom>
+          <a:solidFill>
+            <a:srgbClr val="7A3B2E"/>
+          </a:solidFill>
+          <a:ln/>
+        </p:spPr>
+      </p:sp>
+      <p:sp>
+        <p:nvSpPr>
+          <p:cNvPr id="4" name="Text 2"/>
+          <p:cNvSpPr/>
+          <p:nvPr/>
+        </p:nvSpPr>
+        <p:spPr>
+          <a:xfrm>
+            <a:off x="640080" y="1572768"/>
+            <a:ext cx="868680" cy="457200"/>
+          </a:xfrm>
+          <a:prstGeom prst="rect">
+            <a:avLst/>
+          </a:prstGeom>
+          <a:noFill/>
+          <a:ln/>
+        </p:spPr>
+        <p:txBody>
+          <a:bodyPr wrap="square" rtlCol="0" anchor="ctr"/>
+          <a:lstStyle/>
+          <a:p>
+            <a:pPr algn="ctr" indent="0" marL="0">
+              <a:buNone/>
+            </a:pPr>
+            <a:r>
+              <a:rPr lang="en-US" sz="1100" b="1" dirty="0">
+                <a:solidFill>
+                  <a:srgbClr val="FFFFFF"/>
                 </a:solidFill>
                 <a:latin typeface="Calibri" pitchFamily="34" charset="0"/>
                 <a:ea typeface="Calibri" pitchFamily="34" charset="-122"/>
                 <a:cs typeface="Calibri" pitchFamily="34" charset="-120"/>
               </a:rPr>
-              <a:t>THE CHECK, AI CLOSED</a:t>
-            </a:r>
-            <a:endParaRPr lang="en-US" sz="1300" dirty="0"/>
-          </a:p>
-        </p:txBody>
-      </p:sp>
-      <p:sp>
-        <p:nvSpPr>
-          <p:cNvPr id="3" name="Text 1"/>
-          <p:cNvSpPr/>
-          <p:nvPr/>
-        </p:nvSpPr>
-        <p:spPr>
-          <a:xfrm>
-            <a:off x="640080" y="1645920"/>
-            <a:ext cx="8686800" cy="3108960"/>
+              <a:t>0:00</a:t>
+            </a:r>
+            <a:endParaRPr lang="en-US" sz="1100" dirty="0"/>
+          </a:p>
+        </p:txBody>
+      </p:sp>
+      <p:sp>
+        <p:nvSpPr>
+          <p:cNvPr id="5" name="Text 3"/>
+          <p:cNvSpPr/>
+          <p:nvPr/>
+        </p:nvSpPr>
+        <p:spPr>
+          <a:xfrm>
+            <a:off x="1691640" y="1554480"/>
+            <a:ext cx="9646920" cy="566928"/>
+          </a:xfrm>
+          <a:prstGeom prst="rect">
+            <a:avLst/>
+          </a:prstGeom>
+          <a:noFill/>
+          <a:ln/>
+        </p:spPr>
+        <p:txBody>
+          <a:bodyPr wrap="square" rtlCol="0" anchor="ctr">
+            <a:spAutoFit/>
+          </a:bodyPr>
+          <a:lstStyle/>
+          <a:p>
+            <a:pPr indent="0" marL="0">
+              <a:buNone/>
+            </a:pPr>
+            <a:r>
+              <a:rPr lang="en-US" sz="1250" dirty="0">
+                <a:solidFill>
+                  <a:srgbClr val="1A1A1A"/>
+                </a:solidFill>
+                <a:latin typeface="Calibri" pitchFamily="34" charset="0"/>
+                <a:ea typeface="Calibri" pitchFamily="34" charset="-122"/>
+                <a:cs typeface="Calibri" pitchFamily="34" charset="-120"/>
+              </a:rPr>
+              <a:t>Warm-up + Look at This: TimeCapsuleLLM and "Speak, Memory," screenshots ready. (These period models, and supplements like MonadGPT and MacBERTh, live on Hugging Face, where you can download and run open models, or fine-tune your own.)</a:t>
+            </a:r>
+            <a:endParaRPr lang="en-US" sz="1250" dirty="0"/>
+          </a:p>
+        </p:txBody>
+      </p:sp>
+      <p:sp>
+        <p:nvSpPr>
+          <p:cNvPr id="6" name="Shape 4"/>
+          <p:cNvSpPr/>
+          <p:nvPr/>
+        </p:nvSpPr>
+        <p:spPr>
+          <a:xfrm>
+            <a:off x="640080" y="2139696"/>
+            <a:ext cx="868680" cy="457200"/>
+          </a:xfrm>
+          <a:prstGeom prst="roundRect">
+            <a:avLst>
+              <a:gd name="adj" fmla="val 12000"/>
+            </a:avLst>
+          </a:prstGeom>
+          <a:solidFill>
+            <a:srgbClr val="7A3B2E"/>
+          </a:solidFill>
+          <a:ln/>
+        </p:spPr>
+      </p:sp>
+      <p:sp>
+        <p:nvSpPr>
+          <p:cNvPr id="7" name="Text 5"/>
+          <p:cNvSpPr/>
+          <p:nvPr/>
+        </p:nvSpPr>
+        <p:spPr>
+          <a:xfrm>
+            <a:off x="640080" y="2139696"/>
+            <a:ext cx="868680" cy="457200"/>
+          </a:xfrm>
+          <a:prstGeom prst="rect">
+            <a:avLst/>
+          </a:prstGeom>
+          <a:noFill/>
+          <a:ln/>
+        </p:spPr>
+        <p:txBody>
+          <a:bodyPr wrap="square" rtlCol="0" anchor="ctr"/>
+          <a:lstStyle/>
+          <a:p>
+            <a:pPr algn="ctr" indent="0" marL="0">
+              <a:buNone/>
+            </a:pPr>
+            <a:r>
+              <a:rPr lang="en-US" sz="1100" b="1" dirty="0">
+                <a:solidFill>
+                  <a:srgbClr val="FFFFFF"/>
+                </a:solidFill>
+                <a:latin typeface="Calibri" pitchFamily="34" charset="0"/>
+                <a:ea typeface="Calibri" pitchFamily="34" charset="-122"/>
+                <a:cs typeface="Calibri" pitchFamily="34" charset="-120"/>
+              </a:rPr>
+              <a:t>0:07</a:t>
+            </a:r>
+            <a:endParaRPr lang="en-US" sz="1100" dirty="0"/>
+          </a:p>
+        </p:txBody>
+      </p:sp>
+      <p:sp>
+        <p:nvSpPr>
+          <p:cNvPr id="8" name="Text 6"/>
+          <p:cNvSpPr/>
+          <p:nvPr/>
+        </p:nvSpPr>
+        <p:spPr>
+          <a:xfrm>
+            <a:off x="1691640" y="2121408"/>
+            <a:ext cx="9646920" cy="566928"/>
+          </a:xfrm>
+          <a:prstGeom prst="rect">
+            <a:avLst/>
+          </a:prstGeom>
+          <a:noFill/>
+          <a:ln/>
+        </p:spPr>
+        <p:txBody>
+          <a:bodyPr wrap="square" rtlCol="0" anchor="ctr">
+            <a:spAutoFit/>
+          </a:bodyPr>
+          <a:lstStyle/>
+          <a:p>
+            <a:pPr indent="0" marL="0">
+              <a:buNone/>
+            </a:pPr>
+            <a:r>
+              <a:rPr lang="en-US" sz="1250" dirty="0">
+                <a:solidFill>
+                  <a:srgbClr val="1A1A1A"/>
+                </a:solidFill>
+                <a:latin typeface="Calibri" pitchFamily="34" charset="0"/>
+                <a:ea typeface="Calibri" pitchFamily="34" charset="-122"/>
+                <a:cs typeface="Calibri" pitchFamily="34" charset="-120"/>
+              </a:rPr>
+              <a:t>Kill it, then keep what survives, one continuous arc on your own results: shuffle the labels and re-run; split the corpus in half; ask "compared to what?". Then compress whatever survived into one headline sentence.</a:t>
+            </a:r>
+            <a:endParaRPr lang="en-US" sz="1250" dirty="0"/>
+          </a:p>
+        </p:txBody>
+      </p:sp>
+      <p:sp>
+        <p:nvSpPr>
+          <p:cNvPr id="9" name="Shape 7"/>
+          <p:cNvSpPr/>
+          <p:nvPr/>
+        </p:nvSpPr>
+        <p:spPr>
+          <a:xfrm>
+            <a:off x="640080" y="2706624"/>
+            <a:ext cx="868680" cy="457200"/>
+          </a:xfrm>
+          <a:prstGeom prst="roundRect">
+            <a:avLst>
+              <a:gd name="adj" fmla="val 12000"/>
+            </a:avLst>
+          </a:prstGeom>
+          <a:solidFill>
+            <a:srgbClr val="7A3B2E"/>
+          </a:solidFill>
+          <a:ln/>
+        </p:spPr>
+      </p:sp>
+      <p:sp>
+        <p:nvSpPr>
+          <p:cNvPr id="10" name="Text 8"/>
+          <p:cNvSpPr/>
+          <p:nvPr/>
+        </p:nvSpPr>
+        <p:spPr>
+          <a:xfrm>
+            <a:off x="640080" y="2706624"/>
+            <a:ext cx="868680" cy="457200"/>
+          </a:xfrm>
+          <a:prstGeom prst="rect">
+            <a:avLst/>
+          </a:prstGeom>
+          <a:noFill/>
+          <a:ln/>
+        </p:spPr>
+        <p:txBody>
+          <a:bodyPr wrap="square" rtlCol="0" anchor="ctr"/>
+          <a:lstStyle/>
+          <a:p>
+            <a:pPr algn="ctr" indent="0" marL="0">
+              <a:buNone/>
+            </a:pPr>
+            <a:r>
+              <a:rPr lang="en-US" sz="1100" b="1" dirty="0">
+                <a:solidFill>
+                  <a:srgbClr val="FFFFFF"/>
+                </a:solidFill>
+                <a:latin typeface="Calibri" pitchFamily="34" charset="0"/>
+                <a:ea typeface="Calibri" pitchFamily="34" charset="-122"/>
+                <a:cs typeface="Calibri" pitchFamily="34" charset="-120"/>
+              </a:rPr>
+              <a:t>0:52</a:t>
+            </a:r>
+            <a:endParaRPr lang="en-US" sz="1100" dirty="0"/>
+          </a:p>
+        </p:txBody>
+      </p:sp>
+      <p:sp>
+        <p:nvSpPr>
+          <p:cNvPr id="11" name="Text 9"/>
+          <p:cNvSpPr/>
+          <p:nvPr/>
+        </p:nvSpPr>
+        <p:spPr>
+          <a:xfrm>
+            <a:off x="1691640" y="2688336"/>
+            <a:ext cx="9646920" cy="566928"/>
+          </a:xfrm>
+          <a:prstGeom prst="rect">
+            <a:avLst/>
+          </a:prstGeom>
+          <a:noFill/>
+          <a:ln/>
+        </p:spPr>
+        <p:txBody>
+          <a:bodyPr wrap="square" rtlCol="0" anchor="ctr">
+            <a:spAutoFit/>
+          </a:bodyPr>
+          <a:lstStyle/>
+          <a:p>
+            <a:pPr indent="0" marL="0">
+              <a:buNone/>
+            </a:pPr>
+            <a:r>
+              <a:rPr lang="en-US" sz="1250" dirty="0">
+                <a:solidFill>
+                  <a:srgbClr val="1A1A1A"/>
+                </a:solidFill>
+                <a:latin typeface="Calibri" pitchFamily="34" charset="0"/>
+                <a:ea typeface="Calibri" pitchFamily="34" charset="-122"/>
+                <a:cs typeface="Calibri" pitchFamily="34" charset="-120"/>
+              </a:rPr>
+              <a:t>Break</a:t>
+            </a:r>
+            <a:endParaRPr lang="en-US" sz="1250" dirty="0"/>
+          </a:p>
+        </p:txBody>
+      </p:sp>
+      <p:sp>
+        <p:nvSpPr>
+          <p:cNvPr id="12" name="Shape 10"/>
+          <p:cNvSpPr/>
+          <p:nvPr/>
+        </p:nvSpPr>
+        <p:spPr>
+          <a:xfrm>
+            <a:off x="640080" y="3273552"/>
+            <a:ext cx="868680" cy="457200"/>
+          </a:xfrm>
+          <a:prstGeom prst="roundRect">
+            <a:avLst>
+              <a:gd name="adj" fmla="val 12000"/>
+            </a:avLst>
+          </a:prstGeom>
+          <a:solidFill>
+            <a:srgbClr val="7A3B2E"/>
+          </a:solidFill>
+          <a:ln/>
+        </p:spPr>
+      </p:sp>
+      <p:sp>
+        <p:nvSpPr>
+          <p:cNvPr id="13" name="Text 11"/>
+          <p:cNvSpPr/>
+          <p:nvPr/>
+        </p:nvSpPr>
+        <p:spPr>
+          <a:xfrm>
+            <a:off x="640080" y="3273552"/>
+            <a:ext cx="868680" cy="457200"/>
+          </a:xfrm>
+          <a:prstGeom prst="rect">
+            <a:avLst/>
+          </a:prstGeom>
+          <a:noFill/>
+          <a:ln/>
+        </p:spPr>
+        <p:txBody>
+          <a:bodyPr wrap="square" rtlCol="0" anchor="ctr"/>
+          <a:lstStyle/>
+          <a:p>
+            <a:pPr algn="ctr" indent="0" marL="0">
+              <a:buNone/>
+            </a:pPr>
+            <a:r>
+              <a:rPr lang="en-US" sz="1100" b="1" dirty="0">
+                <a:solidFill>
+                  <a:srgbClr val="FFFFFF"/>
+                </a:solidFill>
+                <a:latin typeface="Calibri" pitchFamily="34" charset="0"/>
+                <a:ea typeface="Calibri" pitchFamily="34" charset="-122"/>
+                <a:cs typeface="Calibri" pitchFamily="34" charset="-120"/>
+              </a:rPr>
+              <a:t>1:02</a:t>
+            </a:r>
+            <a:endParaRPr lang="en-US" sz="1100" dirty="0"/>
+          </a:p>
+        </p:txBody>
+      </p:sp>
+      <p:sp>
+        <p:nvSpPr>
+          <p:cNvPr id="14" name="Text 12"/>
+          <p:cNvSpPr/>
+          <p:nvPr/>
+        </p:nvSpPr>
+        <p:spPr>
+          <a:xfrm>
+            <a:off x="1691640" y="3255264"/>
+            <a:ext cx="9646920" cy="566928"/>
+          </a:xfrm>
+          <a:prstGeom prst="rect">
+            <a:avLst/>
+          </a:prstGeom>
+          <a:noFill/>
+          <a:ln/>
+        </p:spPr>
+        <p:txBody>
+          <a:bodyPr wrap="square" rtlCol="0" anchor="ctr">
+            <a:spAutoFit/>
+          </a:bodyPr>
+          <a:lstStyle/>
+          <a:p>
+            <a:pPr indent="0" marL="0">
+              <a:buNone/>
+            </a:pPr>
+            <a:r>
+              <a:rPr lang="en-US" sz="1250" dirty="0">
+                <a:solidFill>
+                  <a:srgbClr val="1A1A1A"/>
+                </a:solidFill>
+                <a:latin typeface="Calibri" pitchFamily="34" charset="0"/>
+                <a:ea typeface="Calibri" pitchFamily="34" charset="-122"/>
+                <a:cs typeface="Calibri" pitchFamily="34" charset="-120"/>
+              </a:rPr>
+              <a:t>Gemini-free writing block: write your one-sentence interpretation yourself.</a:t>
+            </a:r>
+            <a:endParaRPr lang="en-US" sz="1250" dirty="0"/>
+          </a:p>
+        </p:txBody>
+      </p:sp>
+      <p:sp>
+        <p:nvSpPr>
+          <p:cNvPr id="15" name="Shape 13"/>
+          <p:cNvSpPr/>
+          <p:nvPr/>
+        </p:nvSpPr>
+        <p:spPr>
+          <a:xfrm>
+            <a:off x="640080" y="3840480"/>
+            <a:ext cx="868680" cy="457200"/>
+          </a:xfrm>
+          <a:prstGeom prst="roundRect">
+            <a:avLst>
+              <a:gd name="adj" fmla="val 12000"/>
+            </a:avLst>
+          </a:prstGeom>
+          <a:solidFill>
+            <a:srgbClr val="7A3B2E"/>
+          </a:solidFill>
+          <a:ln/>
+        </p:spPr>
+      </p:sp>
+      <p:sp>
+        <p:nvSpPr>
+          <p:cNvPr id="16" name="Text 14"/>
+          <p:cNvSpPr/>
+          <p:nvPr/>
+        </p:nvSpPr>
+        <p:spPr>
+          <a:xfrm>
+            <a:off x="640080" y="3840480"/>
+            <a:ext cx="868680" cy="457200"/>
+          </a:xfrm>
+          <a:prstGeom prst="rect">
+            <a:avLst/>
+          </a:prstGeom>
+          <a:noFill/>
+          <a:ln/>
+        </p:spPr>
+        <p:txBody>
+          <a:bodyPr wrap="square" rtlCol="0" anchor="ctr"/>
+          <a:lstStyle/>
+          <a:p>
+            <a:pPr algn="ctr" indent="0" marL="0">
+              <a:buNone/>
+            </a:pPr>
+            <a:r>
+              <a:rPr lang="en-US" sz="1100" b="1" dirty="0">
+                <a:solidFill>
+                  <a:srgbClr val="FFFFFF"/>
+                </a:solidFill>
+                <a:latin typeface="Calibri" pitchFamily="34" charset="0"/>
+                <a:ea typeface="Calibri" pitchFamily="34" charset="-122"/>
+                <a:cs typeface="Calibri" pitchFamily="34" charset="-120"/>
+              </a:rPr>
+              <a:t>1:22</a:t>
+            </a:r>
+            <a:endParaRPr lang="en-US" sz="1100" dirty="0"/>
+          </a:p>
+        </p:txBody>
+      </p:sp>
+      <p:sp>
+        <p:nvSpPr>
+          <p:cNvPr id="17" name="Text 15"/>
+          <p:cNvSpPr/>
+          <p:nvPr/>
+        </p:nvSpPr>
+        <p:spPr>
+          <a:xfrm>
+            <a:off x="1691640" y="3822192"/>
+            <a:ext cx="9646920" cy="566928"/>
+          </a:xfrm>
+          <a:prstGeom prst="rect">
+            <a:avLst/>
+          </a:prstGeom>
+          <a:noFill/>
+          <a:ln/>
+        </p:spPr>
+        <p:txBody>
+          <a:bodyPr wrap="square" rtlCol="0" anchor="ctr">
+            <a:spAutoFit/>
+          </a:bodyPr>
+          <a:lstStyle/>
+          <a:p>
+            <a:pPr indent="0" marL="0">
+              <a:buNone/>
+            </a:pPr>
+            <a:r>
+              <a:rPr lang="en-US" sz="1250" dirty="0">
+                <a:solidFill>
+                  <a:srgbClr val="1A1A1A"/>
+                </a:solidFill>
+                <a:latin typeface="Calibri" pitchFamily="34" charset="0"/>
+                <a:ea typeface="Calibri" pitchFamily="34" charset="-122"/>
+                <a:cs typeface="Calibri" pitchFamily="34" charset="-120"/>
+              </a:rPr>
+              <a:t>Writing workshop: opening question, what you found, what it does not show, the choices you made. Distill the Data Biography into the corpus note.</a:t>
+            </a:r>
+            <a:endParaRPr lang="en-US" sz="1250" dirty="0"/>
+          </a:p>
+        </p:txBody>
+      </p:sp>
+      <p:sp>
+        <p:nvSpPr>
+          <p:cNvPr id="18" name="Shape 16"/>
+          <p:cNvSpPr/>
+          <p:nvPr/>
+        </p:nvSpPr>
+        <p:spPr>
+          <a:xfrm>
+            <a:off x="640080" y="4407408"/>
+            <a:ext cx="868680" cy="457200"/>
+          </a:xfrm>
+          <a:prstGeom prst="roundRect">
+            <a:avLst>
+              <a:gd name="adj" fmla="val 12000"/>
+            </a:avLst>
+          </a:prstGeom>
+          <a:solidFill>
+            <a:srgbClr val="7A3B2E"/>
+          </a:solidFill>
+          <a:ln/>
+        </p:spPr>
+      </p:sp>
+      <p:sp>
+        <p:nvSpPr>
+          <p:cNvPr id="19" name="Text 17"/>
+          <p:cNvSpPr/>
+          <p:nvPr/>
+        </p:nvSpPr>
+        <p:spPr>
+          <a:xfrm>
+            <a:off x="640080" y="4407408"/>
+            <a:ext cx="868680" cy="457200"/>
+          </a:xfrm>
+          <a:prstGeom prst="rect">
+            <a:avLst/>
+          </a:prstGeom>
+          <a:noFill/>
+          <a:ln/>
+        </p:spPr>
+        <p:txBody>
+          <a:bodyPr wrap="square" rtlCol="0" anchor="ctr"/>
+          <a:lstStyle/>
+          <a:p>
+            <a:pPr algn="ctr" indent="0" marL="0">
+              <a:buNone/>
+            </a:pPr>
+            <a:r>
+              <a:rPr lang="en-US" sz="1100" b="1" dirty="0">
+                <a:solidFill>
+                  <a:srgbClr val="FFFFFF"/>
+                </a:solidFill>
+                <a:latin typeface="Calibri" pitchFamily="34" charset="0"/>
+                <a:ea typeface="Calibri" pitchFamily="34" charset="-122"/>
+                <a:cs typeface="Calibri" pitchFamily="34" charset="-120"/>
+              </a:rPr>
+              <a:t>1:50</a:t>
+            </a:r>
+            <a:endParaRPr lang="en-US" sz="1100" dirty="0"/>
+          </a:p>
+        </p:txBody>
+      </p:sp>
+      <p:sp>
+        <p:nvSpPr>
+          <p:cNvPr id="20" name="Text 18"/>
+          <p:cNvSpPr/>
+          <p:nvPr/>
+        </p:nvSpPr>
+        <p:spPr>
+          <a:xfrm>
+            <a:off x="1691640" y="4389120"/>
+            <a:ext cx="9646920" cy="566928"/>
+          </a:xfrm>
+          <a:prstGeom prst="rect">
+            <a:avLst/>
+          </a:prstGeom>
+          <a:noFill/>
+          <a:ln/>
+        </p:spPr>
+        <p:txBody>
+          <a:bodyPr wrap="square" rtlCol="0" anchor="ctr">
+            <a:spAutoFit/>
+          </a:bodyPr>
+          <a:lstStyle/>
+          <a:p>
+            <a:pPr indent="0" marL="0">
+              <a:buNone/>
+            </a:pPr>
+            <a:r>
+              <a:rPr lang="en-US" sz="1250" dirty="0">
+                <a:solidFill>
+                  <a:srgbClr val="1A1A1A"/>
+                </a:solidFill>
+                <a:latin typeface="Calibri" pitchFamily="34" charset="0"/>
+                <a:ea typeface="Calibri" pitchFamily="34" charset="-122"/>
+                <a:cs typeface="Calibri" pitchFamily="34" charset="-120"/>
+              </a:rPr>
+              <a:t>Check and check-out.</a:t>
+            </a:r>
+            <a:endParaRPr lang="en-US" sz="1250" dirty="0"/>
+          </a:p>
+        </p:txBody>
+      </p:sp>
+    </p:spTree>
+  </p:cSld>
+  <p:clrMapOvr>
+    <a:masterClrMapping/>
+  </p:clrMapOvr>
+</p:sld>
+</file>
+
+<file path=ppt/slides/slide9.xml><?xml version="1.0" encoding="utf-8"?>
+<p:sld xmlns:a="http://schemas.openxmlformats.org/drawingml/2006/main" xmlns:r="http://schemas.openxmlformats.org/officeDocument/2006/relationships" xmlns:p="http://schemas.openxmlformats.org/presentationml/2006/main">
+  <p:cSld name="Slide 9">
+    <p:bg>
+      <p:bgPr>
+        <a:solidFill>
+          <a:srgbClr val="FFFFFF"/>
+        </a:solidFill>
+      </p:bgPr>
+    </p:bg>
+    <p:spTree>
+      <p:nvGrpSpPr>
+        <p:cNvPr id="1" name=""/>
+        <p:cNvGrpSpPr/>
+        <p:nvPr/>
+      </p:nvGrpSpPr>
+      <p:grpSpPr>
+        <a:xfrm>
+          <a:off x="0" y="0"/>
+          <a:ext cx="0" cy="0"/>
+          <a:chOff x="0" y="0"/>
+          <a:chExt cx="0" cy="0"/>
+        </a:xfrm>
+      </p:grpSpPr>
+      <p:sp>
+        <p:nvSpPr>
+          <p:cNvPr id="2" name="Text 0"/>
+          <p:cNvSpPr/>
+          <p:nvPr/>
+        </p:nvSpPr>
+        <p:spPr>
+          <a:xfrm>
+            <a:off x="640080" y="640080"/>
+            <a:ext cx="10058400" cy="731520"/>
+          </a:xfrm>
+          <a:prstGeom prst="rect">
+            <a:avLst/>
+          </a:prstGeom>
+          <a:noFill/>
+          <a:ln/>
+        </p:spPr>
+        <p:txBody>
+          <a:bodyPr wrap="square" rtlCol="0" anchor="ctr"/>
+          <a:lstStyle/>
+          <a:p>
+            <a:pPr indent="0" marL="0">
+              <a:buNone/>
+            </a:pPr>
+            <a:r>
+              <a:rPr lang="en-US" sz="3000" b="1" dirty="0">
+                <a:solidFill>
+                  <a:srgbClr val="1A1A1A"/>
+                </a:solidFill>
+                <a:latin typeface="Cambria" pitchFamily="34" charset="0"/>
+                <a:ea typeface="Cambria" pitchFamily="34" charset="-122"/>
+                <a:cs typeface="Cambria" pitchFamily="34" charset="-120"/>
+              </a:rPr>
+              <a:t>Reading &amp; homework</a:t>
+            </a:r>
+            <a:endParaRPr lang="en-US" sz="3000" dirty="0"/>
+          </a:p>
+        </p:txBody>
+      </p:sp>
+      <p:sp>
+        <p:nvSpPr>
+          <p:cNvPr id="3" name="Shape 1"/>
+          <p:cNvSpPr/>
+          <p:nvPr/>
+        </p:nvSpPr>
+        <p:spPr>
+          <a:xfrm>
+            <a:off x="640080" y="1810512"/>
+            <a:ext cx="219456" cy="219456"/>
+          </a:xfrm>
+          <a:prstGeom prst="ellipse">
+            <a:avLst/>
+          </a:prstGeom>
+          <a:solidFill>
+            <a:srgbClr val="7A3B2E"/>
+          </a:solidFill>
+          <a:ln/>
+        </p:spPr>
+      </p:sp>
+      <p:sp>
+        <p:nvSpPr>
+          <p:cNvPr id="4" name="Text 2"/>
+          <p:cNvSpPr/>
+          <p:nvPr/>
+        </p:nvSpPr>
+        <p:spPr>
+          <a:xfrm>
+            <a:off x="1051560" y="1737360"/>
+            <a:ext cx="10424160" cy="365760"/>
+          </a:xfrm>
+          <a:prstGeom prst="rect">
+            <a:avLst/>
+          </a:prstGeom>
+          <a:noFill/>
+          <a:ln/>
+        </p:spPr>
+        <p:txBody>
+          <a:bodyPr wrap="square" rtlCol="0" anchor="ctr"/>
+          <a:lstStyle/>
+          <a:p>
+            <a:pPr indent="0" marL="0">
+              <a:buNone/>
+            </a:pPr>
+            <a:r>
+              <a:rPr lang="en-US" sz="1500" b="1" dirty="0">
+                <a:solidFill>
+                  <a:srgbClr val="7A3B2E"/>
+                </a:solidFill>
+                <a:latin typeface="Calibri" pitchFamily="34" charset="0"/>
+                <a:ea typeface="Calibri" pitchFamily="34" charset="-122"/>
+                <a:cs typeface="Calibri" pitchFamily="34" charset="-120"/>
+              </a:rPr>
+              <a:t>Reading</a:t>
+            </a:r>
+            <a:endParaRPr lang="en-US" sz="1500" dirty="0"/>
+          </a:p>
+        </p:txBody>
+      </p:sp>
+      <p:sp>
+        <p:nvSpPr>
+          <p:cNvPr id="5" name="Text 3"/>
+          <p:cNvSpPr/>
+          <p:nvPr/>
+        </p:nvSpPr>
+        <p:spPr>
+          <a:xfrm>
+            <a:off x="1051560" y="2121408"/>
+            <a:ext cx="10424160" cy="731520"/>
           </a:xfrm>
           <a:prstGeom prst="rect">
             <a:avLst/>
@@ -4703,80 +6092,238 @@
           <a:lstStyle/>
           <a:p>
             <a:pPr indent="0" marL="0">
-              <a:lnSpc>
-                <a:spcPct val="115000"/>
-              </a:lnSpc>
-              <a:buNone/>
-            </a:pPr>
-            <a:r>
-              <a:rPr lang="en-US" sz="2600" dirty="0">
-                <a:solidFill>
-                  <a:srgbClr val="FFFFFF"/>
-                </a:solidFill>
-                <a:latin typeface="Cambria" pitchFamily="34" charset="0"/>
-                <a:ea typeface="Cambria" pitchFamily="34" charset="-122"/>
-                <a:cs typeface="Cambria" pitchFamily="34" charset="-120"/>
-              </a:rPr>
-              <a:t>Explain it: your headline finding, and what it does not show. (Competencies 3, 4.)</a:t>
-            </a:r>
-            <a:endParaRPr lang="en-US" sz="2600" dirty="0"/>
-          </a:p>
-        </p:txBody>
-      </p:sp>
-      <p:sp>
-        <p:nvSpPr>
-          <p:cNvPr id="4" name="Text 2"/>
-          <p:cNvSpPr/>
-          <p:nvPr/>
-        </p:nvSpPr>
-        <p:spPr>
-          <a:xfrm>
-            <a:off x="640080" y="6126480"/>
-            <a:ext cx="7315200" cy="365760"/>
-          </a:xfrm>
-          <a:prstGeom prst="rect">
-            <a:avLst/>
-          </a:prstGeom>
-          <a:noFill/>
-          <a:ln/>
-        </p:spPr>
-        <p:txBody>
-          <a:bodyPr wrap="square" rtlCol="0" anchor="ctr"/>
-          <a:lstStyle/>
-          <a:p>
-            <a:pPr indent="0" marL="0">
-              <a:buNone/>
-            </a:pPr>
-            <a:r>
-              <a:rPr lang="en-US" sz="1200" dirty="0">
-                <a:solidFill>
-                  <a:srgbClr val="E8DCD6"/>
+              <a:buNone/>
+            </a:pPr>
+            <a:r>
+              <a:rPr lang="en-US" sz="1400" dirty="0">
+                <a:solidFill>
+                  <a:srgbClr val="1A1A1A"/>
                 </a:solidFill>
                 <a:latin typeface="Calibri" pitchFamily="34" charset="0"/>
                 <a:ea typeface="Calibri" pitchFamily="34" charset="-122"/>
                 <a:cs typeface="Calibri" pitchFamily="34" charset="-120"/>
               </a:rPr>
-              <a:t>Culture as Data  ·  Week 8</a:t>
-            </a:r>
-            <a:endParaRPr lang="en-US" sz="1200" dirty="0"/>
-          </a:p>
-        </p:txBody>
-      </p:sp>
-      <p:sp>
-        <p:nvSpPr>
-          <p:cNvPr id="5" name="Shape 3"/>
-          <p:cNvSpPr/>
-          <p:nvPr/>
-        </p:nvSpPr>
-        <p:spPr>
-          <a:xfrm>
-            <a:off x="10473555" y="5054087"/>
-            <a:ext cx="78741" cy="78741"/>
+              <a:t>None required</a:t>
+            </a:r>
+            <a:endParaRPr lang="en-US" sz="1400" dirty="0"/>
+          </a:p>
+        </p:txBody>
+      </p:sp>
+      <p:sp>
+        <p:nvSpPr>
+          <p:cNvPr id="6" name="Shape 4"/>
+          <p:cNvSpPr/>
+          <p:nvPr/>
+        </p:nvSpPr>
+        <p:spPr>
+          <a:xfrm>
+            <a:off x="640080" y="2953512"/>
+            <a:ext cx="219456" cy="219456"/>
           </a:xfrm>
           <a:prstGeom prst="ellipse">
             <a:avLst/>
           </a:prstGeom>
           <a:solidFill>
+            <a:srgbClr val="3F6F5F"/>
+          </a:solidFill>
+          <a:ln/>
+        </p:spPr>
+      </p:sp>
+      <p:sp>
+        <p:nvSpPr>
+          <p:cNvPr id="7" name="Text 5"/>
+          <p:cNvSpPr/>
+          <p:nvPr/>
+        </p:nvSpPr>
+        <p:spPr>
+          <a:xfrm>
+            <a:off x="1051560" y="2880360"/>
+            <a:ext cx="10424160" cy="365760"/>
+          </a:xfrm>
+          <a:prstGeom prst="rect">
+            <a:avLst/>
+          </a:prstGeom>
+          <a:noFill/>
+          <a:ln/>
+        </p:spPr>
+        <p:txBody>
+          <a:bodyPr wrap="square" rtlCol="0" anchor="ctr"/>
+          <a:lstStyle/>
+          <a:p>
+            <a:pPr indent="0" marL="0">
+              <a:buNone/>
+            </a:pPr>
+            <a:r>
+              <a:rPr lang="en-US" sz="1500" b="1" dirty="0">
+                <a:solidFill>
+                  <a:srgbClr val="3F6F5F"/>
+                </a:solidFill>
+                <a:latin typeface="Calibri" pitchFamily="34" charset="0"/>
+                <a:ea typeface="Calibri" pitchFamily="34" charset="-122"/>
+                <a:cs typeface="Calibri" pitchFamily="34" charset="-120"/>
+              </a:rPr>
+              <a:t>Supplement</a:t>
+            </a:r>
+            <a:endParaRPr lang="en-US" sz="1500" dirty="0"/>
+          </a:p>
+        </p:txBody>
+      </p:sp>
+      <p:sp>
+        <p:nvSpPr>
+          <p:cNvPr id="8" name="Text 6"/>
+          <p:cNvSpPr/>
+          <p:nvPr/>
+        </p:nvSpPr>
+        <p:spPr>
+          <a:xfrm>
+            <a:off x="1051560" y="3264408"/>
+            <a:ext cx="10424160" cy="731520"/>
+          </a:xfrm>
+          <a:prstGeom prst="rect">
+            <a:avLst/>
+          </a:prstGeom>
+          <a:noFill/>
+          <a:ln/>
+        </p:spPr>
+        <p:txBody>
+          <a:bodyPr wrap="square" rtlCol="0" anchor="t">
+            <a:spAutoFit/>
+          </a:bodyPr>
+          <a:lstStyle/>
+          <a:p>
+            <a:pPr indent="0" marL="0">
+              <a:buNone/>
+            </a:pPr>
+            <a:r>
+              <a:rPr lang="en-US" sz="1400" dirty="0">
+                <a:solidFill>
+                  <a:srgbClr val="1A1A1A"/>
+                </a:solidFill>
+                <a:latin typeface="Calibri" pitchFamily="34" charset="0"/>
+                <a:ea typeface="Calibri" pitchFamily="34" charset="-122"/>
+                <a:cs typeface="Calibri" pitchFamily="34" charset="-120"/>
+              </a:rPr>
+              <a:t>TimeCapsuleLLM and Speak, Memory; period models MonadGPT and MacBERTh</a:t>
+            </a:r>
+            <a:endParaRPr lang="en-US" sz="1400" dirty="0"/>
+          </a:p>
+        </p:txBody>
+      </p:sp>
+      <p:sp>
+        <p:nvSpPr>
+          <p:cNvPr id="9" name="Shape 7"/>
+          <p:cNvSpPr/>
+          <p:nvPr/>
+        </p:nvSpPr>
+        <p:spPr>
+          <a:xfrm>
+            <a:off x="640080" y="4096512"/>
+            <a:ext cx="219456" cy="219456"/>
+          </a:xfrm>
+          <a:prstGeom prst="ellipse">
+            <a:avLst/>
+          </a:prstGeom>
+          <a:solidFill>
+            <a:srgbClr val="B9852F"/>
+          </a:solidFill>
+          <a:ln/>
+        </p:spPr>
+      </p:sp>
+      <p:sp>
+        <p:nvSpPr>
+          <p:cNvPr id="10" name="Text 8"/>
+          <p:cNvSpPr/>
+          <p:nvPr/>
+        </p:nvSpPr>
+        <p:spPr>
+          <a:xfrm>
+            <a:off x="1051560" y="4023360"/>
+            <a:ext cx="10424160" cy="365760"/>
+          </a:xfrm>
+          <a:prstGeom prst="rect">
+            <a:avLst/>
+          </a:prstGeom>
+          <a:noFill/>
+          <a:ln/>
+        </p:spPr>
+        <p:txBody>
+          <a:bodyPr wrap="square" rtlCol="0" anchor="ctr"/>
+          <a:lstStyle/>
+          <a:p>
+            <a:pPr indent="0" marL="0">
+              <a:buNone/>
+            </a:pPr>
+            <a:r>
+              <a:rPr lang="en-US" sz="1500" b="1" dirty="0">
+                <a:solidFill>
+                  <a:srgbClr val="B9852F"/>
+                </a:solidFill>
+                <a:latin typeface="Calibri" pitchFamily="34" charset="0"/>
+                <a:ea typeface="Calibri" pitchFamily="34" charset="-122"/>
+                <a:cs typeface="Calibri" pitchFamily="34" charset="-120"/>
+              </a:rPr>
+              <a:t>Sketch</a:t>
+            </a:r>
+            <a:endParaRPr lang="en-US" sz="1500" dirty="0"/>
+          </a:p>
+        </p:txBody>
+      </p:sp>
+      <p:sp>
+        <p:nvSpPr>
+          <p:cNvPr id="11" name="Text 9"/>
+          <p:cNvSpPr/>
+          <p:nvPr/>
+        </p:nvSpPr>
+        <p:spPr>
+          <a:xfrm>
+            <a:off x="1051560" y="4407408"/>
+            <a:ext cx="10424160" cy="731520"/>
+          </a:xfrm>
+          <a:prstGeom prst="rect">
+            <a:avLst/>
+          </a:prstGeom>
+          <a:noFill/>
+          <a:ln/>
+        </p:spPr>
+        <p:txBody>
+          <a:bodyPr wrap="square" rtlCol="0" anchor="t">
+            <a:spAutoFit/>
+          </a:bodyPr>
+          <a:lstStyle/>
+          <a:p>
+            <a:pPr indent="0" marL="0">
+              <a:buNone/>
+            </a:pPr>
+            <a:r>
+              <a:rPr lang="en-US" sz="1400" dirty="0">
+                <a:solidFill>
+                  <a:srgbClr val="1A1A1A"/>
+                </a:solidFill>
+                <a:latin typeface="Calibri" pitchFamily="34" charset="0"/>
+                <a:ea typeface="Calibri" pitchFamily="34" charset="-122"/>
+                <a:cs typeface="Calibri" pitchFamily="34" charset="-120"/>
+              </a:rPr>
+              <a:t>Expand to 600 to 1,000 words; write your show-your-work appendix and which checks survived.</a:t>
+            </a:r>
+            <a:endParaRPr lang="en-US" sz="1400" dirty="0"/>
+          </a:p>
+        </p:txBody>
+      </p:sp>
+      <p:sp>
+        <p:nvSpPr>
+          <p:cNvPr id="12" name="Shape 10"/>
+          <p:cNvSpPr/>
+          <p:nvPr/>
+        </p:nvSpPr>
+        <p:spPr>
+          <a:xfrm>
+            <a:off x="640080" y="5239512"/>
+            <a:ext cx="219456" cy="219456"/>
+          </a:xfrm>
+          <a:prstGeom prst="ellipse">
+            <a:avLst/>
+          </a:prstGeom>
+          <a:solidFill>
             <a:srgbClr val="7A3B2E"/>
           </a:solidFill>
           <a:ln/>
@@ -4784,263 +6331,83 @@
       </p:sp>
       <p:sp>
         <p:nvSpPr>
-          <p:cNvPr id="6" name="Shape 4"/>
-          <p:cNvSpPr/>
-          <p:nvPr/>
-        </p:nvSpPr>
-        <p:spPr>
-          <a:xfrm>
-            <a:off x="9755671" y="5241251"/>
-            <a:ext cx="78006" cy="78006"/>
-          </a:xfrm>
-          <a:prstGeom prst="ellipse">
-            <a:avLst/>
-          </a:prstGeom>
-          <a:solidFill>
-            <a:srgbClr val="3F6F5F"/>
-          </a:solidFill>
-          <a:ln/>
-        </p:spPr>
-      </p:sp>
-      <p:sp>
-        <p:nvSpPr>
-          <p:cNvPr id="7" name="Shape 5"/>
-          <p:cNvSpPr/>
-          <p:nvPr/>
-        </p:nvSpPr>
-        <p:spPr>
-          <a:xfrm>
-            <a:off x="10383141" y="6003513"/>
-            <a:ext cx="66475" cy="66475"/>
-          </a:xfrm>
-          <a:prstGeom prst="ellipse">
-            <a:avLst/>
-          </a:prstGeom>
-          <a:solidFill>
-            <a:srgbClr val="B9852F"/>
-          </a:solidFill>
-          <a:ln/>
-        </p:spPr>
-      </p:sp>
-      <p:sp>
-        <p:nvSpPr>
-          <p:cNvPr id="8" name="Shape 6"/>
-          <p:cNvSpPr/>
-          <p:nvPr/>
-        </p:nvSpPr>
-        <p:spPr>
-          <a:xfrm>
-            <a:off x="10862443" y="4590054"/>
-            <a:ext cx="67009" cy="67009"/>
-          </a:xfrm>
-          <a:prstGeom prst="ellipse">
-            <a:avLst/>
-          </a:prstGeom>
-          <a:solidFill>
-            <a:srgbClr val="7A3B2E"/>
-          </a:solidFill>
-          <a:ln/>
-        </p:spPr>
-      </p:sp>
-      <p:sp>
-        <p:nvSpPr>
-          <p:cNvPr id="9" name="Shape 7"/>
-          <p:cNvSpPr/>
-          <p:nvPr/>
-        </p:nvSpPr>
-        <p:spPr>
-          <a:xfrm>
-            <a:off x="9700059" y="5199492"/>
-            <a:ext cx="47604" cy="47604"/>
-          </a:xfrm>
-          <a:prstGeom prst="ellipse">
-            <a:avLst/>
-          </a:prstGeom>
-          <a:solidFill>
-            <a:srgbClr val="3F6F5F"/>
-          </a:solidFill>
-          <a:ln/>
-        </p:spPr>
-      </p:sp>
-      <p:sp>
-        <p:nvSpPr>
-          <p:cNvPr id="10" name="Shape 8"/>
-          <p:cNvSpPr/>
-          <p:nvPr/>
-        </p:nvSpPr>
-        <p:spPr>
-          <a:xfrm>
-            <a:off x="10523109" y="5081010"/>
-            <a:ext cx="85984" cy="85984"/>
-          </a:xfrm>
-          <a:prstGeom prst="ellipse">
-            <a:avLst/>
-          </a:prstGeom>
-          <a:solidFill>
-            <a:srgbClr val="B9852F"/>
-          </a:solidFill>
-          <a:ln/>
-        </p:spPr>
-      </p:sp>
-      <p:sp>
-        <p:nvSpPr>
-          <p:cNvPr id="11" name="Shape 9"/>
-          <p:cNvSpPr/>
-          <p:nvPr/>
-        </p:nvSpPr>
-        <p:spPr>
-          <a:xfrm>
-            <a:off x="9277751" y="4958505"/>
-            <a:ext cx="95281" cy="95281"/>
-          </a:xfrm>
-          <a:prstGeom prst="ellipse">
-            <a:avLst/>
-          </a:prstGeom>
-          <a:solidFill>
-            <a:srgbClr val="7A3B2E"/>
-          </a:solidFill>
-          <a:ln/>
-        </p:spPr>
-      </p:sp>
-      <p:sp>
-        <p:nvSpPr>
-          <p:cNvPr id="12" name="Shape 10"/>
-          <p:cNvSpPr/>
-          <p:nvPr/>
-        </p:nvSpPr>
-        <p:spPr>
-          <a:xfrm>
-            <a:off x="9591107" y="5555879"/>
-            <a:ext cx="98355" cy="98355"/>
-          </a:xfrm>
-          <a:prstGeom prst="ellipse">
-            <a:avLst/>
-          </a:prstGeom>
-          <a:solidFill>
-            <a:srgbClr val="3F6F5F"/>
-          </a:solidFill>
-          <a:ln/>
-        </p:spPr>
-      </p:sp>
-      <p:sp>
-        <p:nvSpPr>
-          <p:cNvPr id="13" name="Shape 11"/>
-          <p:cNvSpPr/>
-          <p:nvPr/>
-        </p:nvSpPr>
-        <p:spPr>
-          <a:xfrm>
-            <a:off x="9969657" y="5859671"/>
-            <a:ext cx="63202" cy="63202"/>
-          </a:xfrm>
-          <a:prstGeom prst="ellipse">
-            <a:avLst/>
-          </a:prstGeom>
-          <a:solidFill>
-            <a:srgbClr val="B9852F"/>
-          </a:solidFill>
-          <a:ln/>
-        </p:spPr>
-      </p:sp>
-      <p:sp>
-        <p:nvSpPr>
-          <p:cNvPr id="14" name="Shape 12"/>
-          <p:cNvSpPr/>
-          <p:nvPr/>
-        </p:nvSpPr>
-        <p:spPr>
-          <a:xfrm>
-            <a:off x="11480199" y="4856422"/>
-            <a:ext cx="67546" cy="67546"/>
-          </a:xfrm>
-          <a:prstGeom prst="ellipse">
-            <a:avLst/>
-          </a:prstGeom>
-          <a:solidFill>
-            <a:srgbClr val="7A3B2E"/>
-          </a:solidFill>
-          <a:ln/>
-        </p:spPr>
-      </p:sp>
-      <p:sp>
-        <p:nvSpPr>
-          <p:cNvPr id="15" name="Shape 13"/>
-          <p:cNvSpPr/>
-          <p:nvPr/>
-        </p:nvSpPr>
-        <p:spPr>
-          <a:xfrm>
-            <a:off x="10068896" y="5007391"/>
-            <a:ext cx="79383" cy="79383"/>
-          </a:xfrm>
-          <a:prstGeom prst="ellipse">
-            <a:avLst/>
-          </a:prstGeom>
-          <a:solidFill>
-            <a:srgbClr val="3F6F5F"/>
-          </a:solidFill>
-          <a:ln/>
-        </p:spPr>
-      </p:sp>
-      <p:sp>
-        <p:nvSpPr>
-          <p:cNvPr id="16" name="Shape 14"/>
-          <p:cNvSpPr/>
-          <p:nvPr/>
-        </p:nvSpPr>
-        <p:spPr>
-          <a:xfrm>
-            <a:off x="9362865" y="5299118"/>
-            <a:ext cx="66710" cy="66710"/>
-          </a:xfrm>
-          <a:prstGeom prst="ellipse">
-            <a:avLst/>
-          </a:prstGeom>
-          <a:solidFill>
-            <a:srgbClr val="B9852F"/>
-          </a:solidFill>
-          <a:ln/>
-        </p:spPr>
-      </p:sp>
-      <p:sp>
-        <p:nvSpPr>
-          <p:cNvPr id="17" name="Shape 15"/>
-          <p:cNvSpPr/>
-          <p:nvPr/>
-        </p:nvSpPr>
-        <p:spPr>
-          <a:xfrm>
-            <a:off x="10428908" y="4718144"/>
-            <a:ext cx="52385" cy="52385"/>
-          </a:xfrm>
-          <a:prstGeom prst="ellipse">
-            <a:avLst/>
-          </a:prstGeom>
-          <a:solidFill>
-            <a:srgbClr val="7A3B2E"/>
-          </a:solidFill>
-          <a:ln/>
-        </p:spPr>
-      </p:sp>
-      <p:sp>
-        <p:nvSpPr>
-          <p:cNvPr id="18" name="Shape 16"/>
-          <p:cNvSpPr/>
-          <p:nvPr/>
-        </p:nvSpPr>
-        <p:spPr>
-          <a:xfrm>
-            <a:off x="9213184" y="5725728"/>
-            <a:ext cx="59269" cy="59269"/>
-          </a:xfrm>
-          <a:prstGeom prst="ellipse">
-            <a:avLst/>
-          </a:prstGeom>
-          <a:solidFill>
-            <a:srgbClr val="3F6F5F"/>
-          </a:solidFill>
-          <a:ln/>
-        </p:spPr>
+          <p:cNvPr id="13" name="Text 11"/>
+          <p:cNvSpPr/>
+          <p:nvPr/>
+        </p:nvSpPr>
+        <p:spPr>
+          <a:xfrm>
+            <a:off x="1051560" y="5166360"/>
+            <a:ext cx="10424160" cy="365760"/>
+          </a:xfrm>
+          <a:prstGeom prst="rect">
+            <a:avLst/>
+          </a:prstGeom>
+          <a:noFill/>
+          <a:ln/>
+        </p:spPr>
+        <p:txBody>
+          <a:bodyPr wrap="square" rtlCol="0" anchor="ctr"/>
+          <a:lstStyle/>
+          <a:p>
+            <a:pPr indent="0" marL="0">
+              <a:buNone/>
+            </a:pPr>
+            <a:r>
+              <a:rPr lang="en-US" sz="1500" b="1" dirty="0">
+                <a:solidFill>
+                  <a:srgbClr val="7A3B2E"/>
+                </a:solidFill>
+                <a:latin typeface="Calibri" pitchFamily="34" charset="0"/>
+                <a:ea typeface="Calibri" pitchFamily="34" charset="-122"/>
+                <a:cs typeface="Calibri" pitchFamily="34" charset="-120"/>
+              </a:rPr>
+              <a:t>Check (AI closed)</a:t>
+            </a:r>
+            <a:endParaRPr lang="en-US" sz="1500" dirty="0"/>
+          </a:p>
+        </p:txBody>
+      </p:sp>
+      <p:sp>
+        <p:nvSpPr>
+          <p:cNvPr id="14" name="Text 12"/>
+          <p:cNvSpPr/>
+          <p:nvPr/>
+        </p:nvSpPr>
+        <p:spPr>
+          <a:xfrm>
+            <a:off x="1051560" y="5550408"/>
+            <a:ext cx="10424160" cy="731520"/>
+          </a:xfrm>
+          <a:prstGeom prst="rect">
+            <a:avLst/>
+          </a:prstGeom>
+          <a:noFill/>
+          <a:ln/>
+        </p:spPr>
+        <p:txBody>
+          <a:bodyPr wrap="square" rtlCol="0" anchor="t">
+            <a:spAutoFit/>
+          </a:bodyPr>
+          <a:lstStyle/>
+          <a:p>
+            <a:pPr indent="0" marL="0">
+              <a:buNone/>
+            </a:pPr>
+            <a:r>
+              <a:rPr lang="en-US" sz="1400" dirty="0">
+                <a:solidFill>
+                  <a:srgbClr val="1A1A1A"/>
+                </a:solidFill>
+                <a:latin typeface="Calibri" pitchFamily="34" charset="0"/>
+                <a:ea typeface="Calibri" pitchFamily="34" charset="-122"/>
+                <a:cs typeface="Calibri" pitchFamily="34" charset="-120"/>
+              </a:rPr>
+              <a:t>Explain it: your headline finding, and what it does not show. (Competencies 3, 4.)</a:t>
+            </a:r>
+            <a:endParaRPr lang="en-US" sz="1400" dirty="0"/>
+          </a:p>
+        </p:txBody>
       </p:sp>
     </p:spTree>
   </p:cSld>

--- a/slides/pptx/week-08.pptx
+++ b/slides/pptx/week-08.pptx
@@ -3755,7 +3755,7 @@
                 <a:ea typeface="Calibri" pitchFamily="34" charset="-122"/>
                 <a:cs typeface="Calibri" pitchFamily="34" charset="-120"/>
               </a:rPr>
-              <a:t>WEEK 8 · THE MATERIAL</a:t>
+              <a:t>WEEK 8 · KEY POINTS</a:t>
             </a:r>
             <a:endParaRPr lang="en-US" sz="1200" dirty="0"/>
           </a:p>
@@ -4143,7 +4143,7 @@
                 <a:ea typeface="Calibri" pitchFamily="34" charset="-122"/>
                 <a:cs typeface="Calibri" pitchFamily="34" charset="-120"/>
               </a:rPr>
-              <a:t>WEEK 8 · THE MATERIAL</a:t>
+              <a:t>WEEK 8 · KEY POINTS</a:t>
             </a:r>
             <a:endParaRPr lang="en-US" sz="1200" dirty="0"/>
           </a:p>
@@ -4531,7 +4531,7 @@
                 <a:ea typeface="Calibri" pitchFamily="34" charset="-122"/>
                 <a:cs typeface="Calibri" pitchFamily="34" charset="-120"/>
               </a:rPr>
-              <a:t>WEEK 8 · THE MATERIAL</a:t>
+              <a:t>WEEK 8 · KEY POINTS</a:t>
             </a:r>
             <a:endParaRPr lang="en-US" sz="1200" dirty="0"/>
           </a:p>

--- a/slides/pptx/week-08.pptx
+++ b/slides/pptx/week-08.pptx
@@ -1919,7 +1919,7 @@
                 <a:ea typeface="Calibri" pitchFamily="34" charset="-122"/>
                 <a:cs typeface="Calibri" pitchFamily="34" charset="-120"/>
               </a:rPr>
-              <a:t>Meet models that live entirely inside one historical period, learn what a famous model has secretly memorized, kill your own finding to see what survives, and leave with a prose draft.</a:t>
+              <a:t>Meet models that live entirely inside one historical period, learn what a famous model has secretly memorized, stress-test your own finding to see what survives, and leave with a prose draft.</a:t>
             </a:r>
             <a:endParaRPr lang="en-US" sz="1600" dirty="0"/>
           </a:p>
@@ -2776,7 +2776,7 @@
                 <a:ea typeface="Cambria" pitchFamily="34" charset="-122"/>
                 <a:cs typeface="Cambria" pitchFamily="34" charset="-120"/>
               </a:rPr>
-              <a:t>Kill it, then keep it</a:t>
+              <a:t>Test it, then keep what survives</a:t>
             </a:r>
             <a:endParaRPr lang="en-US" sz="1900" dirty="0"/>
           </a:p>
@@ -2820,7 +2820,7 @@
                 <a:ea typeface="Calibri" pitchFamily="34" charset="-122"/>
                 <a:cs typeface="Calibri" pitchFamily="34" charset="-120"/>
               </a:rPr>
-              <a:t>The Week 2 trial move, now turned on your own finding.</a:t>
+              <a:t>The Week 2 trial's method, now applied to your own finding.</a:t>
             </a:r>
             <a:endParaRPr lang="en-US" sz="1450" dirty="0"/>
           </a:p>
@@ -3796,7 +3796,7 @@
                 <a:ea typeface="Cambria" pitchFamily="34" charset="-122"/>
                 <a:cs typeface="Cambria" pitchFamily="34" charset="-120"/>
               </a:rPr>
-              <a:t>Kill it, then keep it</a:t>
+              <a:t>Stress-test the finding</a:t>
             </a:r>
             <a:endParaRPr lang="en-US" sz="3000" dirty="0"/>
           </a:p>
@@ -3860,7 +3860,7 @@
                 <a:ea typeface="Calibri" pitchFamily="34" charset="-122"/>
                 <a:cs typeface="Calibri" pitchFamily="34" charset="-120"/>
               </a:rPr>
-              <a:t>The Bollen move, turned on your own finding: remove the slice that worries you most and re-run.</a:t>
+              <a:t>Bollen's method, applied to your own finding: remove the slice that most concerns you and re-run.</a:t>
             </a:r>
             <a:endParaRPr lang="en-US" sz="1650" dirty="0"/>
           </a:p>
@@ -3924,7 +3924,7 @@
                 <a:ea typeface="Calibri" pitchFamily="34" charset="-122"/>
                 <a:cs typeface="Calibri" pitchFamily="34" charset="-120"/>
               </a:rPr>
-              <a:t>Survives? Say so, with the check shown. Dies? You just learned what your finding was made of.</a:t>
+              <a:t>If the pattern survives, report it with the check shown. If it does not, you have learned what the finding depended on.</a:t>
             </a:r>
             <a:endParaRPr lang="en-US" sz="1650" dirty="0"/>
           </a:p>
@@ -4376,7 +4376,7 @@
                 <a:ea typeface="Calibri" pitchFamily="34" charset="-122"/>
                 <a:cs typeface="Calibri" pitchFamily="34" charset="-120"/>
               </a:rPr>
-              <a:t>TimeCapsuleLLM: train only on 1800s London text and the model speaks its era. A corpus bounds a mind.</a:t>
+              <a:t>TimeCapsuleLLM: train only on 1800s London text and the model speaks its era. A model is bounded by its corpus.</a:t>
             </a:r>
             <a:endParaRPr lang="en-US" sz="1650" dirty="0"/>
           </a:p>
@@ -5524,7 +5524,7 @@
                 <a:ea typeface="Calibri" pitchFamily="34" charset="-122"/>
                 <a:cs typeface="Calibri" pitchFamily="34" charset="-120"/>
               </a:rPr>
-              <a:t>Kill it, then keep what survives, one continuous arc on your own results: shuffle the labels and re-run; split the corpus in half; ask "compared to what?". Then compress whatever survived into one headline sentence.</a:t>
+              <a:t>Stress-test the finding, one continuous arc on your own results: shuffle the labels and re-run; split the corpus in half; ask "compared to what?". Then compress whatever survived into one headline sentence.</a:t>
             </a:r>
             <a:endParaRPr lang="en-US" sz="1250" dirty="0"/>
           </a:p>

--- a/slides/pptx/week-08.pptx
+++ b/slides/pptx/week-08.pptx
@@ -6017,7 +6017,7 @@
         </p:nvSpPr>
         <p:spPr>
           <a:xfrm>
-            <a:off x="640080" y="1810512"/>
+            <a:off x="640080" y="1673352"/>
             <a:ext cx="219456" cy="219456"/>
           </a:xfrm>
           <a:prstGeom prst="ellipse">
@@ -6037,7 +6037,7 @@
         </p:nvSpPr>
         <p:spPr>
           <a:xfrm>
-            <a:off x="1051560" y="1737360"/>
+            <a:off x="1051560" y="1600200"/>
             <a:ext cx="10424160" cy="365760"/>
           </a:xfrm>
           <a:prstGeom prst="rect">
@@ -6076,7 +6076,7 @@
         </p:nvSpPr>
         <p:spPr>
           <a:xfrm>
-            <a:off x="1051560" y="2121408"/>
+            <a:off x="1051560" y="1984248"/>
             <a:ext cx="10424160" cy="731520"/>
           </a:xfrm>
           <a:prstGeom prst="rect">
@@ -6103,7 +6103,7 @@
                 <a:ea typeface="Calibri" pitchFamily="34" charset="-122"/>
                 <a:cs typeface="Calibri" pitchFamily="34" charset="-120"/>
               </a:rPr>
-              <a:t>None required</a:t>
+              <a:t>Ted Chiang, ChatGPT Is a Blurry JPEG of the Web (2023), the compression idea this week is built on</a:t>
             </a:r>
             <a:endParaRPr lang="en-US" sz="1400" dirty="0"/>
           </a:p>
@@ -6117,7 +6117,7 @@
         </p:nvSpPr>
         <p:spPr>
           <a:xfrm>
-            <a:off x="640080" y="2953512"/>
+            <a:off x="640080" y="2633472"/>
             <a:ext cx="219456" cy="219456"/>
           </a:xfrm>
           <a:prstGeom prst="ellipse">
@@ -6137,7 +6137,7 @@
         </p:nvSpPr>
         <p:spPr>
           <a:xfrm>
-            <a:off x="1051560" y="2880360"/>
+            <a:off x="1051560" y="2560320"/>
             <a:ext cx="10424160" cy="365760"/>
           </a:xfrm>
           <a:prstGeom prst="rect">
@@ -6176,7 +6176,7 @@
         </p:nvSpPr>
         <p:spPr>
           <a:xfrm>
-            <a:off x="1051560" y="3264408"/>
+            <a:off x="1051560" y="2944368"/>
             <a:ext cx="10424160" cy="731520"/>
           </a:xfrm>
           <a:prstGeom prst="rect">
@@ -6217,7 +6217,7 @@
         </p:nvSpPr>
         <p:spPr>
           <a:xfrm>
-            <a:off x="640080" y="4096512"/>
+            <a:off x="640080" y="3593592"/>
             <a:ext cx="219456" cy="219456"/>
           </a:xfrm>
           <a:prstGeom prst="ellipse">
@@ -6237,7 +6237,7 @@
         </p:nvSpPr>
         <p:spPr>
           <a:xfrm>
-            <a:off x="1051560" y="4023360"/>
+            <a:off x="1051560" y="3520440"/>
             <a:ext cx="10424160" cy="365760"/>
           </a:xfrm>
           <a:prstGeom prst="rect">
@@ -6262,7 +6262,7 @@
                 <a:ea typeface="Calibri" pitchFamily="34" charset="-122"/>
                 <a:cs typeface="Calibri" pitchFamily="34" charset="-120"/>
               </a:rPr>
-              <a:t>Sketch</a:t>
+              <a:t>Deeper (optional)</a:t>
             </a:r>
             <a:endParaRPr lang="en-US" sz="1500" dirty="0"/>
           </a:p>
@@ -6276,7 +6276,7 @@
         </p:nvSpPr>
         <p:spPr>
           <a:xfrm>
-            <a:off x="1051560" y="4407408"/>
+            <a:off x="1051560" y="3904488"/>
             <a:ext cx="10424160" cy="731520"/>
           </a:xfrm>
           <a:prstGeom prst="rect">
@@ -6303,7 +6303,7 @@
                 <a:ea typeface="Calibri" pitchFamily="34" charset="-122"/>
                 <a:cs typeface="Calibri" pitchFamily="34" charset="-120"/>
               </a:rPr>
-              <a:t>Expand to 600 to 1,000 words; write your show-your-work appendix and which checks survived.</a:t>
+              <a:t>Da, The Computational Case Against Computational Literary Studies (2019), the field's sharpest critique, read against your own robustness checks</a:t>
             </a:r>
             <a:endParaRPr lang="en-US" sz="1400" dirty="0"/>
           </a:p>
@@ -6317,14 +6317,14 @@
         </p:nvSpPr>
         <p:spPr>
           <a:xfrm>
-            <a:off x="640080" y="5239512"/>
+            <a:off x="640080" y="4553712"/>
             <a:ext cx="219456" cy="219456"/>
           </a:xfrm>
           <a:prstGeom prst="ellipse">
             <a:avLst/>
           </a:prstGeom>
           <a:solidFill>
-            <a:srgbClr val="7A3B2E"/>
+            <a:srgbClr val="3F6F5F"/>
           </a:solidFill>
           <a:ln/>
         </p:spPr>
@@ -6337,7 +6337,7 @@
         </p:nvSpPr>
         <p:spPr>
           <a:xfrm>
-            <a:off x="1051560" y="5166360"/>
+            <a:off x="1051560" y="4480560"/>
             <a:ext cx="10424160" cy="365760"/>
           </a:xfrm>
           <a:prstGeom prst="rect">
@@ -6356,12 +6356,112 @@
             <a:r>
               <a:rPr lang="en-US" sz="1500" b="1" dirty="0">
                 <a:solidFill>
-                  <a:srgbClr val="7A3B2E"/>
+                  <a:srgbClr val="3F6F5F"/>
                 </a:solidFill>
                 <a:latin typeface="Calibri" pitchFamily="34" charset="0"/>
                 <a:ea typeface="Calibri" pitchFamily="34" charset="-122"/>
                 <a:cs typeface="Calibri" pitchFamily="34" charset="-120"/>
               </a:rPr>
+              <a:t>Sketch</a:t>
+            </a:r>
+            <a:endParaRPr lang="en-US" sz="1500" dirty="0"/>
+          </a:p>
+        </p:txBody>
+      </p:sp>
+      <p:sp>
+        <p:nvSpPr>
+          <p:cNvPr id="14" name="Text 12"/>
+          <p:cNvSpPr/>
+          <p:nvPr/>
+        </p:nvSpPr>
+        <p:spPr>
+          <a:xfrm>
+            <a:off x="1051560" y="4864608"/>
+            <a:ext cx="10424160" cy="731520"/>
+          </a:xfrm>
+          <a:prstGeom prst="rect">
+            <a:avLst/>
+          </a:prstGeom>
+          <a:noFill/>
+          <a:ln/>
+        </p:spPr>
+        <p:txBody>
+          <a:bodyPr wrap="square" rtlCol="0" anchor="t">
+            <a:spAutoFit/>
+          </a:bodyPr>
+          <a:lstStyle/>
+          <a:p>
+            <a:pPr indent="0" marL="0">
+              <a:buNone/>
+            </a:pPr>
+            <a:r>
+              <a:rPr lang="en-US" sz="1400" dirty="0">
+                <a:solidFill>
+                  <a:srgbClr val="1A1A1A"/>
+                </a:solidFill>
+                <a:latin typeface="Calibri" pitchFamily="34" charset="0"/>
+                <a:ea typeface="Calibri" pitchFamily="34" charset="-122"/>
+                <a:cs typeface="Calibri" pitchFamily="34" charset="-120"/>
+              </a:rPr>
+              <a:t>Expand to 600 to 1,000 words; write your show-your-work appendix and which checks survived.</a:t>
+            </a:r>
+            <a:endParaRPr lang="en-US" sz="1400" dirty="0"/>
+          </a:p>
+        </p:txBody>
+      </p:sp>
+      <p:sp>
+        <p:nvSpPr>
+          <p:cNvPr id="15" name="Shape 13"/>
+          <p:cNvSpPr/>
+          <p:nvPr/>
+        </p:nvSpPr>
+        <p:spPr>
+          <a:xfrm>
+            <a:off x="640080" y="5513832"/>
+            <a:ext cx="219456" cy="219456"/>
+          </a:xfrm>
+          <a:prstGeom prst="ellipse">
+            <a:avLst/>
+          </a:prstGeom>
+          <a:solidFill>
+            <a:srgbClr val="7A3B2E"/>
+          </a:solidFill>
+          <a:ln/>
+        </p:spPr>
+      </p:sp>
+      <p:sp>
+        <p:nvSpPr>
+          <p:cNvPr id="16" name="Text 14"/>
+          <p:cNvSpPr/>
+          <p:nvPr/>
+        </p:nvSpPr>
+        <p:spPr>
+          <a:xfrm>
+            <a:off x="1051560" y="5440680"/>
+            <a:ext cx="10424160" cy="365760"/>
+          </a:xfrm>
+          <a:prstGeom prst="rect">
+            <a:avLst/>
+          </a:prstGeom>
+          <a:noFill/>
+          <a:ln/>
+        </p:spPr>
+        <p:txBody>
+          <a:bodyPr wrap="square" rtlCol="0" anchor="ctr"/>
+          <a:lstStyle/>
+          <a:p>
+            <a:pPr indent="0" marL="0">
+              <a:buNone/>
+            </a:pPr>
+            <a:r>
+              <a:rPr lang="en-US" sz="1500" b="1" dirty="0">
+                <a:solidFill>
+                  <a:srgbClr val="7A3B2E"/>
+                </a:solidFill>
+                <a:latin typeface="Calibri" pitchFamily="34" charset="0"/>
+                <a:ea typeface="Calibri" pitchFamily="34" charset="-122"/>
+                <a:cs typeface="Calibri" pitchFamily="34" charset="-120"/>
+              </a:rPr>
               <a:t>Check (AI closed)</a:t>
             </a:r>
             <a:endParaRPr lang="en-US" sz="1500" dirty="0"/>
@@ -6370,13 +6470,13 @@
       </p:sp>
       <p:sp>
         <p:nvSpPr>
-          <p:cNvPr id="14" name="Text 12"/>
-          <p:cNvSpPr/>
-          <p:nvPr/>
-        </p:nvSpPr>
-        <p:spPr>
-          <a:xfrm>
-            <a:off x="1051560" y="5550408"/>
+          <p:cNvPr id="17" name="Text 15"/>
+          <p:cNvSpPr/>
+          <p:nvPr/>
+        </p:nvSpPr>
+        <p:spPr>
+          <a:xfrm>
+            <a:off x="1051560" y="5824728"/>
             <a:ext cx="10424160" cy="731520"/>
           </a:xfrm>
           <a:prstGeom prst="rect">

--- a/slides/pptx/week-08.pptx
+++ b/slides/pptx/week-08.pptx
@@ -16,9 +16,10 @@
     <p:sldId id="264" r:id="rId10"/>
     <p:sldId id="265" r:id="rId11"/>
     <p:sldId id="266" r:id="rId12"/>
+    <p:sldId id="267" r:id="rId13"/>
   </p:sldIdLst>
   <p:notesMasterIdLst>
-    <p:notesMasterId r:id="rId13"/>
+    <p:notesMasterId r:id="rId14"/>
   </p:notesMasterIdLst>
   <p:sldSz cx="12191695" cy="6858000"/>
   <p:notesSz cx="6858000" cy="12191695"/>
@@ -730,6 +731,94 @@
 </p:notes>
 </file>
 
+<file path=ppt/notesSlides/notesSlide12.xml><?xml version="1.0" encoding="utf-8"?>
+<p:notes xmlns:a="http://schemas.openxmlformats.org/drawingml/2006/main" xmlns:r="http://schemas.openxmlformats.org/officeDocument/2006/relationships" xmlns:p="http://schemas.openxmlformats.org/presentationml/2006/main">
+  <p:cSld>
+    <p:spTree>
+      <p:nvGrpSpPr>
+        <p:cNvPr id="1" name=""/>
+        <p:cNvGrpSpPr/>
+        <p:nvPr/>
+      </p:nvGrpSpPr>
+      <p:grpSpPr>
+        <a:xfrm>
+          <a:off x="0" y="0"/>
+          <a:ext cx="0" cy="0"/>
+          <a:chOff x="0" y="0"/>
+          <a:chExt cx="0" cy="0"/>
+        </a:xfrm>
+      </p:grpSpPr>
+      <p:sp>
+        <p:nvSpPr>
+          <p:cNvPr id="2" name="Slide Image Placeholder 1"/>
+          <p:cNvSpPr>
+            <a:spLocks noGrp="1" noRot="1" noChangeAspect="1"/>
+          </p:cNvSpPr>
+          <p:nvPr>
+            <p:ph type="sldImg"/>
+          </p:nvPr>
+        </p:nvSpPr>
+        <p:spPr/>
+      </p:sp>
+      <p:sp>
+        <p:nvSpPr>
+          <p:cNvPr id="3" name="Notes Placeholder 2"/>
+          <p:cNvSpPr>
+            <a:spLocks noGrp="1"/>
+          </p:cNvSpPr>
+          <p:nvPr>
+            <p:ph type="body" idx="1"/>
+          </p:nvPr>
+        </p:nvSpPr>
+        <p:spPr/>
+        <p:txBody>
+          <a:bodyPr/>
+          <a:lstStyle/>
+          <a:p>
+            <a:r>
+              <a:rPr lang="en-US" dirty="0"/>
+              <a:t/>
+            </a:r>
+            <a:endParaRPr lang="en-US" dirty="0"/>
+          </a:p>
+        </p:txBody>
+      </p:sp>
+      <p:sp>
+        <p:nvSpPr>
+          <p:cNvPr id="4" name="Slide Number Placeholder 3"/>
+          <p:cNvSpPr>
+            <a:spLocks noGrp="1"/>
+          </p:cNvSpPr>
+          <p:nvPr>
+            <p:ph type="sldNum" sz="quarter" idx="10"/>
+          </p:nvPr>
+        </p:nvSpPr>
+        <p:spPr/>
+        <p:txBody>
+          <a:bodyPr/>
+          <a:lstStyle/>
+          <a:p>
+            <a:fld id="{F7021451-1387-4CA6-816F-3879F97B5CBC}" type="slidenum">
+              <a:rPr lang="en-US"/>
+              <a:t>12</a:t>
+            </a:fld>
+            <a:endParaRPr lang="en-US"/>
+          </a:p>
+        </p:txBody>
+      </p:sp>
+    </p:spTree>
+    <p:extLst>
+      <p:ext uri="{BB962C8B-B14F-4D97-AF65-F5344CB8AC3E}">
+        <p14:creationId xmlns:p14="http://schemas.microsoft.com/office/powerpoint/2010/main" val="1024086991"/>
+      </p:ext>
+    </p:extLst>
+  </p:cSld>
+  <p:clrMapOvr>
+    <a:masterClrMapping/>
+  </p:clrMapOvr>
+</p:notes>
+</file>
+
 <file path=ppt/notesSlides/notesSlide2.xml><?xml version="1.0" encoding="utf-8"?>
 <p:notes xmlns:a="http://schemas.openxmlformats.org/drawingml/2006/main" xmlns:r="http://schemas.openxmlformats.org/officeDocument/2006/relationships" xmlns:p="http://schemas.openxmlformats.org/presentationml/2006/main">
   <p:cSld>
@@ -2325,7 +2414,7 @@
         <p:spPr>
           <a:xfrm>
             <a:off x="640080" y="640080"/>
-            <a:ext cx="10058400" cy="320040"/>
+            <a:ext cx="10058400" cy="731520"/>
           </a:xfrm>
           <a:prstGeom prst="rect">
             <a:avLst/>
@@ -2341,7 +2430,66 @@
               <a:buNone/>
             </a:pPr>
             <a:r>
-              <a:rPr lang="en-US" sz="1300" b="1" spc="300" kern="0" dirty="0">
+              <a:rPr lang="en-US" sz="3000" b="1" dirty="0">
+                <a:solidFill>
+                  <a:srgbClr val="1A1A1A"/>
+                </a:solidFill>
+                <a:latin typeface="Cambria" pitchFamily="34" charset="0"/>
+                <a:ea typeface="Cambria" pitchFamily="34" charset="-122"/>
+                <a:cs typeface="Cambria" pitchFamily="34" charset="-120"/>
+              </a:rPr>
+              <a:t>Reading &amp; homework</a:t>
+            </a:r>
+            <a:endParaRPr lang="en-US" sz="3000" dirty="0"/>
+          </a:p>
+        </p:txBody>
+      </p:sp>
+      <p:sp>
+        <p:nvSpPr>
+          <p:cNvPr id="3" name="Shape 1"/>
+          <p:cNvSpPr/>
+          <p:nvPr/>
+        </p:nvSpPr>
+        <p:spPr>
+          <a:xfrm>
+            <a:off x="640080" y="1673352"/>
+            <a:ext cx="219456" cy="219456"/>
+          </a:xfrm>
+          <a:prstGeom prst="ellipse">
+            <a:avLst/>
+          </a:prstGeom>
+          <a:solidFill>
+            <a:srgbClr val="7A3B2E"/>
+          </a:solidFill>
+          <a:ln/>
+        </p:spPr>
+      </p:sp>
+      <p:sp>
+        <p:nvSpPr>
+          <p:cNvPr id="4" name="Text 2"/>
+          <p:cNvSpPr/>
+          <p:nvPr/>
+        </p:nvSpPr>
+        <p:spPr>
+          <a:xfrm>
+            <a:off x="1051560" y="1600200"/>
+            <a:ext cx="10424160" cy="365760"/>
+          </a:xfrm>
+          <a:prstGeom prst="rect">
+            <a:avLst/>
+          </a:prstGeom>
+          <a:noFill/>
+          <a:ln/>
+        </p:spPr>
+        <p:txBody>
+          <a:bodyPr wrap="square" rtlCol="0" anchor="ctr"/>
+          <a:lstStyle/>
+          <a:p>
+            <a:pPr indent="0" marL="0">
+              <a:buNone/>
+            </a:pPr>
+            <a:r>
+              <a:rPr lang="en-US" sz="1500" b="1" dirty="0">
                 <a:solidFill>
                   <a:srgbClr val="7A3B2E"/>
                 </a:solidFill>
@@ -2349,72 +2497,11 @@
                 <a:ea typeface="Calibri" pitchFamily="34" charset="-122"/>
                 <a:cs typeface="Calibri" pitchFamily="34" charset="-120"/>
               </a:rPr>
-              <a:t>HOW THIS WEEK CONNECTS</a:t>
-            </a:r>
-            <a:endParaRPr lang="en-US" sz="1300" dirty="0"/>
-          </a:p>
-        </p:txBody>
-      </p:sp>
-      <p:sp>
-        <p:nvSpPr>
-          <p:cNvPr id="3" name="Text 1"/>
-          <p:cNvSpPr/>
-          <p:nvPr/>
-        </p:nvSpPr>
-        <p:spPr>
-          <a:xfrm>
-            <a:off x="640080" y="987552"/>
-            <a:ext cx="10058400" cy="640080"/>
-          </a:xfrm>
-          <a:prstGeom prst="rect">
-            <a:avLst/>
-          </a:prstGeom>
-          <a:noFill/>
-          <a:ln/>
-        </p:spPr>
-        <p:txBody>
-          <a:bodyPr wrap="square" rtlCol="0" anchor="ctr"/>
-          <a:lstStyle/>
-          <a:p>
-            <a:pPr indent="0" marL="0">
-              <a:buNone/>
-            </a:pPr>
-            <a:r>
-              <a:rPr lang="en-US" sz="2800" b="1" dirty="0">
-                <a:solidFill>
-                  <a:srgbClr val="1A1A1A"/>
-                </a:solidFill>
-                <a:latin typeface="Cambria" pitchFamily="34" charset="0"/>
-                <a:ea typeface="Cambria" pitchFamily="34" charset="-122"/>
-                <a:cs typeface="Cambria" pitchFamily="34" charset="-120"/>
-              </a:rPr>
-              <a:t>The course's through-lines</a:t>
-            </a:r>
-            <a:endParaRPr lang="en-US" sz="2800" dirty="0"/>
-          </a:p>
-        </p:txBody>
-      </p:sp>
-      <p:sp>
-        <p:nvSpPr>
-          <p:cNvPr id="4" name="Shape 2"/>
-          <p:cNvSpPr/>
-          <p:nvPr/>
-        </p:nvSpPr>
-        <p:spPr>
-          <a:xfrm>
-            <a:off x="640080" y="2057400"/>
-            <a:ext cx="457200" cy="457200"/>
-          </a:xfrm>
-          <a:prstGeom prst="roundRect">
-            <a:avLst>
-              <a:gd name="adj" fmla="val 16000"/>
-            </a:avLst>
-          </a:prstGeom>
-          <a:solidFill>
-            <a:srgbClr val="7A3B2E"/>
-          </a:solidFill>
-          <a:ln/>
-        </p:spPr>
+              <a:t>Reading</a:t>
+            </a:r>
+            <a:endParaRPr lang="en-US" sz="1500" dirty="0"/>
+          </a:p>
+        </p:txBody>
       </p:sp>
       <p:sp>
         <p:nvSpPr>
@@ -2424,86 +2511,8 @@
         </p:nvSpPr>
         <p:spPr>
           <a:xfrm>
-            <a:off x="640080" y="2057400"/>
-            <a:ext cx="457200" cy="457200"/>
-          </a:xfrm>
-          <a:prstGeom prst="rect">
-            <a:avLst/>
-          </a:prstGeom>
-          <a:noFill/>
-          <a:ln/>
-        </p:spPr>
-        <p:txBody>
-          <a:bodyPr wrap="square" rtlCol="0" anchor="ctr"/>
-          <a:lstStyle/>
-          <a:p>
-            <a:pPr algn="ctr" indent="0" marL="0">
-              <a:buNone/>
-            </a:pPr>
-            <a:r>
-              <a:rPr lang="en-US" sz="2000" b="1" dirty="0">
-                <a:solidFill>
-                  <a:srgbClr val="FFFFFF"/>
-                </a:solidFill>
-                <a:latin typeface="Cambria" pitchFamily="34" charset="0"/>
-                <a:ea typeface="Cambria" pitchFamily="34" charset="-122"/>
-                <a:cs typeface="Cambria" pitchFamily="34" charset="-120"/>
-              </a:rPr>
-              <a:t>1</a:t>
-            </a:r>
-            <a:endParaRPr lang="en-US" sz="2000" dirty="0"/>
-          </a:p>
-        </p:txBody>
-      </p:sp>
-      <p:sp>
-        <p:nvSpPr>
-          <p:cNvPr id="6" name="Text 4"/>
-          <p:cNvSpPr/>
-          <p:nvPr/>
-        </p:nvSpPr>
-        <p:spPr>
-          <a:xfrm>
-            <a:off x="1371600" y="2020824"/>
-            <a:ext cx="10332720" cy="411480"/>
-          </a:xfrm>
-          <a:prstGeom prst="rect">
-            <a:avLst/>
-          </a:prstGeom>
-          <a:noFill/>
-          <a:ln/>
-        </p:spPr>
-        <p:txBody>
-          <a:bodyPr wrap="square" rtlCol="0" anchor="ctr"/>
-          <a:lstStyle/>
-          <a:p>
-            <a:pPr indent="0" marL="0">
-              <a:buNone/>
-            </a:pPr>
-            <a:r>
-              <a:rPr lang="en-US" sz="1900" b="1" dirty="0">
-                <a:solidFill>
-                  <a:srgbClr val="7A3B2E"/>
-                </a:solidFill>
-                <a:latin typeface="Cambria" pitchFamily="34" charset="0"/>
-                <a:ea typeface="Cambria" pitchFamily="34" charset="-122"/>
-                <a:cs typeface="Cambria" pitchFamily="34" charset="-120"/>
-              </a:rPr>
-              <a:t>Whose data, at full scale</a:t>
-            </a:r>
-            <a:endParaRPr lang="en-US" sz="1900" dirty="0"/>
-          </a:p>
-        </p:txBody>
-      </p:sp>
-      <p:sp>
-        <p:nvSpPr>
-          <p:cNvPr id="7" name="Text 5"/>
-          <p:cNvSpPr/>
-          <p:nvPr/>
-        </p:nvSpPr>
-        <p:spPr>
-          <a:xfrm>
-            <a:off x="1371600" y="2441448"/>
-            <a:ext cx="10332720" cy="914400"/>
+            <a:off x="1051560" y="1984248"/>
+            <a:ext cx="10424160" cy="731520"/>
           </a:xfrm>
           <a:prstGeom prst="rect">
             <a:avLst/>
@@ -2518,13 +2527,10 @@
           <a:lstStyle/>
           <a:p>
             <a:pPr indent="0" marL="0">
-              <a:lnSpc>
-                <a:spcPct val="112000"/>
-              </a:lnSpc>
-              <a:buNone/>
-            </a:pPr>
-            <a:r>
-              <a:rPr lang="en-US" sz="1450" dirty="0">
+              <a:buNone/>
+            </a:pPr>
+            <a:r>
+              <a:rPr lang="en-US" sz="1400" dirty="0">
                 <a:solidFill>
                   <a:srgbClr val="1A1A1A"/>
                 </a:solidFill>
@@ -2532,27 +2538,25 @@
                 <a:ea typeface="Calibri" pitchFamily="34" charset="-122"/>
                 <a:cs typeface="Calibri" pitchFamily="34" charset="-120"/>
               </a:rPr>
-              <a:t>A model is its corpus: bound the corpus and you bound the mind.</a:t>
-            </a:r>
-            <a:endParaRPr lang="en-US" sz="1450" dirty="0"/>
-          </a:p>
-        </p:txBody>
-      </p:sp>
-      <p:sp>
-        <p:nvSpPr>
-          <p:cNvPr id="8" name="Shape 6"/>
-          <p:cNvSpPr/>
-          <p:nvPr/>
-        </p:nvSpPr>
-        <p:spPr>
-          <a:xfrm>
-            <a:off x="640080" y="3520440"/>
-            <a:ext cx="457200" cy="457200"/>
-          </a:xfrm>
-          <a:prstGeom prst="roundRect">
-            <a:avLst>
-              <a:gd name="adj" fmla="val 16000"/>
-            </a:avLst>
+              <a:t>Ted Chiang, ChatGPT Is a Blurry JPEG of the Web (2023), the compression idea this week is built on</a:t>
+            </a:r>
+            <a:endParaRPr lang="en-US" sz="1400" dirty="0"/>
+          </a:p>
+        </p:txBody>
+      </p:sp>
+      <p:sp>
+        <p:nvSpPr>
+          <p:cNvPr id="6" name="Shape 4"/>
+          <p:cNvSpPr/>
+          <p:nvPr/>
+        </p:nvSpPr>
+        <p:spPr>
+          <a:xfrm>
+            <a:off x="640080" y="2633472"/>
+            <a:ext cx="219456" cy="219456"/>
+          </a:xfrm>
+          <a:prstGeom prst="ellipse">
+            <a:avLst/>
           </a:prstGeom>
           <a:solidFill>
             <a:srgbClr val="3F6F5F"/>
@@ -2562,14 +2566,14 @@
       </p:sp>
       <p:sp>
         <p:nvSpPr>
-          <p:cNvPr id="9" name="Text 7"/>
-          <p:cNvSpPr/>
-          <p:nvPr/>
-        </p:nvSpPr>
-        <p:spPr>
-          <a:xfrm>
-            <a:off x="640080" y="3520440"/>
-            <a:ext cx="457200" cy="457200"/>
+          <p:cNvPr id="7" name="Text 5"/>
+          <p:cNvSpPr/>
+          <p:nvPr/>
+        </p:nvSpPr>
+        <p:spPr>
+          <a:xfrm>
+            <a:off x="1051560" y="2560320"/>
+            <a:ext cx="10424160" cy="365760"/>
           </a:xfrm>
           <a:prstGeom prst="rect">
             <a:avLst/>
@@ -2581,73 +2585,34 @@
           <a:bodyPr wrap="square" rtlCol="0" anchor="ctr"/>
           <a:lstStyle/>
           <a:p>
-            <a:pPr algn="ctr" indent="0" marL="0">
-              <a:buNone/>
-            </a:pPr>
-            <a:r>
-              <a:rPr lang="en-US" sz="2000" b="1" dirty="0">
-                <a:solidFill>
-                  <a:srgbClr val="FFFFFF"/>
-                </a:solidFill>
-                <a:latin typeface="Cambria" pitchFamily="34" charset="0"/>
-                <a:ea typeface="Cambria" pitchFamily="34" charset="-122"/>
-                <a:cs typeface="Cambria" pitchFamily="34" charset="-120"/>
-              </a:rPr>
-              <a:t>2</a:t>
-            </a:r>
-            <a:endParaRPr lang="en-US" sz="2000" dirty="0"/>
-          </a:p>
-        </p:txBody>
-      </p:sp>
-      <p:sp>
-        <p:nvSpPr>
-          <p:cNvPr id="10" name="Text 8"/>
-          <p:cNvSpPr/>
-          <p:nvPr/>
-        </p:nvSpPr>
-        <p:spPr>
-          <a:xfrm>
-            <a:off x="1371600" y="3483864"/>
-            <a:ext cx="10332720" cy="411480"/>
-          </a:xfrm>
-          <a:prstGeom prst="rect">
-            <a:avLst/>
-          </a:prstGeom>
-          <a:noFill/>
-          <a:ln/>
-        </p:spPr>
-        <p:txBody>
-          <a:bodyPr wrap="square" rtlCol="0" anchor="ctr"/>
-          <a:lstStyle/>
-          <a:p>
             <a:pPr indent="0" marL="0">
               <a:buNone/>
             </a:pPr>
             <a:r>
-              <a:rPr lang="en-US" sz="1900" b="1" dirty="0">
+              <a:rPr lang="en-US" sz="1500" b="1" dirty="0">
                 <a:solidFill>
                   <a:srgbClr val="3F6F5F"/>
                 </a:solidFill>
-                <a:latin typeface="Cambria" pitchFamily="34" charset="0"/>
-                <a:ea typeface="Cambria" pitchFamily="34" charset="-122"/>
-                <a:cs typeface="Cambria" pitchFamily="34" charset="-120"/>
-              </a:rPr>
-              <a:t>Memorization isn't reading</a:t>
-            </a:r>
-            <a:endParaRPr lang="en-US" sz="1900" dirty="0"/>
-          </a:p>
-        </p:txBody>
-      </p:sp>
-      <p:sp>
-        <p:nvSpPr>
-          <p:cNvPr id="11" name="Text 9"/>
-          <p:cNvSpPr/>
-          <p:nvPr/>
-        </p:nvSpPr>
-        <p:spPr>
-          <a:xfrm>
-            <a:off x="1371600" y="3904488"/>
-            <a:ext cx="10332720" cy="914400"/>
+                <a:latin typeface="Calibri" pitchFamily="34" charset="0"/>
+                <a:ea typeface="Calibri" pitchFamily="34" charset="-122"/>
+                <a:cs typeface="Calibri" pitchFamily="34" charset="-120"/>
+              </a:rPr>
+              <a:t>Supplement</a:t>
+            </a:r>
+            <a:endParaRPr lang="en-US" sz="1500" dirty="0"/>
+          </a:p>
+        </p:txBody>
+      </p:sp>
+      <p:sp>
+        <p:nvSpPr>
+          <p:cNvPr id="8" name="Text 6"/>
+          <p:cNvSpPr/>
+          <p:nvPr/>
+        </p:nvSpPr>
+        <p:spPr>
+          <a:xfrm>
+            <a:off x="1051560" y="2944368"/>
+            <a:ext cx="10424160" cy="731520"/>
           </a:xfrm>
           <a:prstGeom prst="rect">
             <a:avLst/>
@@ -2662,13 +2627,10 @@
           <a:lstStyle/>
           <a:p>
             <a:pPr indent="0" marL="0">
-              <a:lnSpc>
-                <a:spcPct val="112000"/>
-              </a:lnSpc>
-              <a:buNone/>
-            </a:pPr>
-            <a:r>
-              <a:rPr lang="en-US" sz="1450" dirty="0">
+              <a:buNone/>
+            </a:pPr>
+            <a:r>
+              <a:rPr lang="en-US" sz="1400" dirty="0">
                 <a:solidFill>
                   <a:srgbClr val="1A1A1A"/>
                 </a:solidFill>
@@ -2676,27 +2638,25 @@
                 <a:ea typeface="Calibri" pitchFamily="34" charset="-122"/>
                 <a:cs typeface="Calibri" pitchFamily="34" charset="-120"/>
               </a:rPr>
-              <a:t>A model may recite your corpus rather than read it, a validity problem, not just ethics.</a:t>
-            </a:r>
-            <a:endParaRPr lang="en-US" sz="1450" dirty="0"/>
-          </a:p>
-        </p:txBody>
-      </p:sp>
-      <p:sp>
-        <p:nvSpPr>
-          <p:cNvPr id="12" name="Shape 10"/>
-          <p:cNvSpPr/>
-          <p:nvPr/>
-        </p:nvSpPr>
-        <p:spPr>
-          <a:xfrm>
-            <a:off x="640080" y="4983480"/>
-            <a:ext cx="457200" cy="457200"/>
-          </a:xfrm>
-          <a:prstGeom prst="roundRect">
-            <a:avLst>
-              <a:gd name="adj" fmla="val 16000"/>
-            </a:avLst>
+              <a:t>TimeCapsuleLLM and Speak, Memory; period models MonadGPT and MacBERTh</a:t>
+            </a:r>
+            <a:endParaRPr lang="en-US" sz="1400" dirty="0"/>
+          </a:p>
+        </p:txBody>
+      </p:sp>
+      <p:sp>
+        <p:nvSpPr>
+          <p:cNvPr id="9" name="Shape 7"/>
+          <p:cNvSpPr/>
+          <p:nvPr/>
+        </p:nvSpPr>
+        <p:spPr>
+          <a:xfrm>
+            <a:off x="640080" y="3593592"/>
+            <a:ext cx="219456" cy="219456"/>
+          </a:xfrm>
+          <a:prstGeom prst="ellipse">
+            <a:avLst/>
           </a:prstGeom>
           <a:solidFill>
             <a:srgbClr val="B9852F"/>
@@ -2706,14 +2666,14 @@
       </p:sp>
       <p:sp>
         <p:nvSpPr>
-          <p:cNvPr id="13" name="Text 11"/>
-          <p:cNvSpPr/>
-          <p:nvPr/>
-        </p:nvSpPr>
-        <p:spPr>
-          <a:xfrm>
-            <a:off x="640080" y="4983480"/>
-            <a:ext cx="457200" cy="457200"/>
+          <p:cNvPr id="10" name="Text 8"/>
+          <p:cNvSpPr/>
+          <p:nvPr/>
+        </p:nvSpPr>
+        <p:spPr>
+          <a:xfrm>
+            <a:off x="1051560" y="3520440"/>
+            <a:ext cx="10424160" cy="365760"/>
           </a:xfrm>
           <a:prstGeom prst="rect">
             <a:avLst/>
@@ -2725,73 +2685,34 @@
           <a:bodyPr wrap="square" rtlCol="0" anchor="ctr"/>
           <a:lstStyle/>
           <a:p>
-            <a:pPr algn="ctr" indent="0" marL="0">
-              <a:buNone/>
-            </a:pPr>
-            <a:r>
-              <a:rPr lang="en-US" sz="2000" b="1" dirty="0">
-                <a:solidFill>
-                  <a:srgbClr val="FFFFFF"/>
-                </a:solidFill>
-                <a:latin typeface="Cambria" pitchFamily="34" charset="0"/>
-                <a:ea typeface="Cambria" pitchFamily="34" charset="-122"/>
-                <a:cs typeface="Cambria" pitchFamily="34" charset="-120"/>
-              </a:rPr>
-              <a:t>3</a:t>
-            </a:r>
-            <a:endParaRPr lang="en-US" sz="2000" dirty="0"/>
-          </a:p>
-        </p:txBody>
-      </p:sp>
-      <p:sp>
-        <p:nvSpPr>
-          <p:cNvPr id="14" name="Text 12"/>
-          <p:cNvSpPr/>
-          <p:nvPr/>
-        </p:nvSpPr>
-        <p:spPr>
-          <a:xfrm>
-            <a:off x="1371600" y="4946904"/>
-            <a:ext cx="10332720" cy="411480"/>
-          </a:xfrm>
-          <a:prstGeom prst="rect">
-            <a:avLst/>
-          </a:prstGeom>
-          <a:noFill/>
-          <a:ln/>
-        </p:spPr>
-        <p:txBody>
-          <a:bodyPr wrap="square" rtlCol="0" anchor="ctr"/>
-          <a:lstStyle/>
-          <a:p>
             <a:pPr indent="0" marL="0">
               <a:buNone/>
             </a:pPr>
             <a:r>
-              <a:rPr lang="en-US" sz="1900" b="1" dirty="0">
+              <a:rPr lang="en-US" sz="1500" b="1" dirty="0">
                 <a:solidFill>
                   <a:srgbClr val="B9852F"/>
                 </a:solidFill>
-                <a:latin typeface="Cambria" pitchFamily="34" charset="0"/>
-                <a:ea typeface="Cambria" pitchFamily="34" charset="-122"/>
-                <a:cs typeface="Cambria" pitchFamily="34" charset="-120"/>
-              </a:rPr>
-              <a:t>Test it, then keep what survives</a:t>
-            </a:r>
-            <a:endParaRPr lang="en-US" sz="1900" dirty="0"/>
-          </a:p>
-        </p:txBody>
-      </p:sp>
-      <p:sp>
-        <p:nvSpPr>
-          <p:cNvPr id="15" name="Text 13"/>
-          <p:cNvSpPr/>
-          <p:nvPr/>
-        </p:nvSpPr>
-        <p:spPr>
-          <a:xfrm>
-            <a:off x="1371600" y="5367528"/>
-            <a:ext cx="10332720" cy="914400"/>
+                <a:latin typeface="Calibri" pitchFamily="34" charset="0"/>
+                <a:ea typeface="Calibri" pitchFamily="34" charset="-122"/>
+                <a:cs typeface="Calibri" pitchFamily="34" charset="-120"/>
+              </a:rPr>
+              <a:t>Deeper (optional)</a:t>
+            </a:r>
+            <a:endParaRPr lang="en-US" sz="1500" dirty="0"/>
+          </a:p>
+        </p:txBody>
+      </p:sp>
+      <p:sp>
+        <p:nvSpPr>
+          <p:cNvPr id="11" name="Text 9"/>
+          <p:cNvSpPr/>
+          <p:nvPr/>
+        </p:nvSpPr>
+        <p:spPr>
+          <a:xfrm>
+            <a:off x="1051560" y="3904488"/>
+            <a:ext cx="10424160" cy="731520"/>
           </a:xfrm>
           <a:prstGeom prst="rect">
             <a:avLst/>
@@ -2806,13 +2727,10 @@
           <a:lstStyle/>
           <a:p>
             <a:pPr indent="0" marL="0">
-              <a:lnSpc>
-                <a:spcPct val="112000"/>
-              </a:lnSpc>
-              <a:buNone/>
-            </a:pPr>
-            <a:r>
-              <a:rPr lang="en-US" sz="1450" dirty="0">
+              <a:buNone/>
+            </a:pPr>
+            <a:r>
+              <a:rPr lang="en-US" sz="1400" dirty="0">
                 <a:solidFill>
                   <a:srgbClr val="1A1A1A"/>
                 </a:solidFill>
@@ -2820,9 +2738,209 @@
                 <a:ea typeface="Calibri" pitchFamily="34" charset="-122"/>
                 <a:cs typeface="Calibri" pitchFamily="34" charset="-120"/>
               </a:rPr>
-              <a:t>The Week 2 trial's method, now applied to your own finding.</a:t>
-            </a:r>
-            <a:endParaRPr lang="en-US" sz="1450" dirty="0"/>
+              <a:t>Da, The Computational Case Against Computational Literary Studies (2019), the field's sharpest critique, read against your own robustness checks</a:t>
+            </a:r>
+            <a:endParaRPr lang="en-US" sz="1400" dirty="0"/>
+          </a:p>
+        </p:txBody>
+      </p:sp>
+      <p:sp>
+        <p:nvSpPr>
+          <p:cNvPr id="12" name="Shape 10"/>
+          <p:cNvSpPr/>
+          <p:nvPr/>
+        </p:nvSpPr>
+        <p:spPr>
+          <a:xfrm>
+            <a:off x="640080" y="4553712"/>
+            <a:ext cx="219456" cy="219456"/>
+          </a:xfrm>
+          <a:prstGeom prst="ellipse">
+            <a:avLst/>
+          </a:prstGeom>
+          <a:solidFill>
+            <a:srgbClr val="3F6F5F"/>
+          </a:solidFill>
+          <a:ln/>
+        </p:spPr>
+      </p:sp>
+      <p:sp>
+        <p:nvSpPr>
+          <p:cNvPr id="13" name="Text 11"/>
+          <p:cNvSpPr/>
+          <p:nvPr/>
+        </p:nvSpPr>
+        <p:spPr>
+          <a:xfrm>
+            <a:off x="1051560" y="4480560"/>
+            <a:ext cx="10424160" cy="365760"/>
+          </a:xfrm>
+          <a:prstGeom prst="rect">
+            <a:avLst/>
+          </a:prstGeom>
+          <a:noFill/>
+          <a:ln/>
+        </p:spPr>
+        <p:txBody>
+          <a:bodyPr wrap="square" rtlCol="0" anchor="ctr"/>
+          <a:lstStyle/>
+          <a:p>
+            <a:pPr indent="0" marL="0">
+              <a:buNone/>
+            </a:pPr>
+            <a:r>
+              <a:rPr lang="en-US" sz="1500" b="1" dirty="0">
+                <a:solidFill>
+                  <a:srgbClr val="3F6F5F"/>
+                </a:solidFill>
+                <a:latin typeface="Calibri" pitchFamily="34" charset="0"/>
+                <a:ea typeface="Calibri" pitchFamily="34" charset="-122"/>
+                <a:cs typeface="Calibri" pitchFamily="34" charset="-120"/>
+              </a:rPr>
+              <a:t>Sketch</a:t>
+            </a:r>
+            <a:endParaRPr lang="en-US" sz="1500" dirty="0"/>
+          </a:p>
+        </p:txBody>
+      </p:sp>
+      <p:sp>
+        <p:nvSpPr>
+          <p:cNvPr id="14" name="Text 12"/>
+          <p:cNvSpPr/>
+          <p:nvPr/>
+        </p:nvSpPr>
+        <p:spPr>
+          <a:xfrm>
+            <a:off x="1051560" y="4864608"/>
+            <a:ext cx="10424160" cy="731520"/>
+          </a:xfrm>
+          <a:prstGeom prst="rect">
+            <a:avLst/>
+          </a:prstGeom>
+          <a:noFill/>
+          <a:ln/>
+        </p:spPr>
+        <p:txBody>
+          <a:bodyPr wrap="square" rtlCol="0" anchor="t">
+            <a:spAutoFit/>
+          </a:bodyPr>
+          <a:lstStyle/>
+          <a:p>
+            <a:pPr indent="0" marL="0">
+              <a:buNone/>
+            </a:pPr>
+            <a:r>
+              <a:rPr lang="en-US" sz="1400" dirty="0">
+                <a:solidFill>
+                  <a:srgbClr val="1A1A1A"/>
+                </a:solidFill>
+                <a:latin typeface="Calibri" pitchFamily="34" charset="0"/>
+                <a:ea typeface="Calibri" pitchFamily="34" charset="-122"/>
+                <a:cs typeface="Calibri" pitchFamily="34" charset="-120"/>
+              </a:rPr>
+              <a:t>Expand to 600 to 1,000 words; write your show-your-work appendix and which checks survived.</a:t>
+            </a:r>
+            <a:endParaRPr lang="en-US" sz="1400" dirty="0"/>
+          </a:p>
+        </p:txBody>
+      </p:sp>
+      <p:sp>
+        <p:nvSpPr>
+          <p:cNvPr id="15" name="Shape 13"/>
+          <p:cNvSpPr/>
+          <p:nvPr/>
+        </p:nvSpPr>
+        <p:spPr>
+          <a:xfrm>
+            <a:off x="640080" y="5513832"/>
+            <a:ext cx="219456" cy="219456"/>
+          </a:xfrm>
+          <a:prstGeom prst="ellipse">
+            <a:avLst/>
+          </a:prstGeom>
+          <a:solidFill>
+            <a:srgbClr val="7A3B2E"/>
+          </a:solidFill>
+          <a:ln/>
+        </p:spPr>
+      </p:sp>
+      <p:sp>
+        <p:nvSpPr>
+          <p:cNvPr id="16" name="Text 14"/>
+          <p:cNvSpPr/>
+          <p:nvPr/>
+        </p:nvSpPr>
+        <p:spPr>
+          <a:xfrm>
+            <a:off x="1051560" y="5440680"/>
+            <a:ext cx="10424160" cy="365760"/>
+          </a:xfrm>
+          <a:prstGeom prst="rect">
+            <a:avLst/>
+          </a:prstGeom>
+          <a:noFill/>
+          <a:ln/>
+        </p:spPr>
+        <p:txBody>
+          <a:bodyPr wrap="square" rtlCol="0" anchor="ctr"/>
+          <a:lstStyle/>
+          <a:p>
+            <a:pPr indent="0" marL="0">
+              <a:buNone/>
+            </a:pPr>
+            <a:r>
+              <a:rPr lang="en-US" sz="1500" b="1" dirty="0">
+                <a:solidFill>
+                  <a:srgbClr val="7A3B2E"/>
+                </a:solidFill>
+                <a:latin typeface="Calibri" pitchFamily="34" charset="0"/>
+                <a:ea typeface="Calibri" pitchFamily="34" charset="-122"/>
+                <a:cs typeface="Calibri" pitchFamily="34" charset="-120"/>
+              </a:rPr>
+              <a:t>Check (AI closed)</a:t>
+            </a:r>
+            <a:endParaRPr lang="en-US" sz="1500" dirty="0"/>
+          </a:p>
+        </p:txBody>
+      </p:sp>
+      <p:sp>
+        <p:nvSpPr>
+          <p:cNvPr id="17" name="Text 15"/>
+          <p:cNvSpPr/>
+          <p:nvPr/>
+        </p:nvSpPr>
+        <p:spPr>
+          <a:xfrm>
+            <a:off x="1051560" y="5824728"/>
+            <a:ext cx="10424160" cy="731520"/>
+          </a:xfrm>
+          <a:prstGeom prst="rect">
+            <a:avLst/>
+          </a:prstGeom>
+          <a:noFill/>
+          <a:ln/>
+        </p:spPr>
+        <p:txBody>
+          <a:bodyPr wrap="square" rtlCol="0" anchor="t">
+            <a:spAutoFit/>
+          </a:bodyPr>
+          <a:lstStyle/>
+          <a:p>
+            <a:pPr indent="0" marL="0">
+              <a:buNone/>
+            </a:pPr>
+            <a:r>
+              <a:rPr lang="en-US" sz="1400" dirty="0">
+                <a:solidFill>
+                  <a:srgbClr val="1A1A1A"/>
+                </a:solidFill>
+                <a:latin typeface="Calibri" pitchFamily="34" charset="0"/>
+                <a:ea typeface="Calibri" pitchFamily="34" charset="-122"/>
+                <a:cs typeface="Calibri" pitchFamily="34" charset="-120"/>
+              </a:rPr>
+              <a:t>Explain it: your headline finding, and what it does not show. (Competencies 3, 4.)</a:t>
+            </a:r>
+            <a:endParaRPr lang="en-US" sz="1400" dirty="0"/>
           </a:p>
         </p:txBody>
       </p:sp>
@@ -2837,6 +2955,548 @@
 <file path=ppt/slides/slide11.xml><?xml version="1.0" encoding="utf-8"?>
 <p:sld xmlns:a="http://schemas.openxmlformats.org/drawingml/2006/main" xmlns:r="http://schemas.openxmlformats.org/officeDocument/2006/relationships" xmlns:p="http://schemas.openxmlformats.org/presentationml/2006/main">
   <p:cSld name="Slide 11">
+    <p:bg>
+      <p:bgPr>
+        <a:solidFill>
+          <a:srgbClr val="FFFFFF"/>
+        </a:solidFill>
+      </p:bgPr>
+    </p:bg>
+    <p:spTree>
+      <p:nvGrpSpPr>
+        <p:cNvPr id="1" name=""/>
+        <p:cNvGrpSpPr/>
+        <p:nvPr/>
+      </p:nvGrpSpPr>
+      <p:grpSpPr>
+        <a:xfrm>
+          <a:off x="0" y="0"/>
+          <a:ext cx="0" cy="0"/>
+          <a:chOff x="0" y="0"/>
+          <a:chExt cx="0" cy="0"/>
+        </a:xfrm>
+      </p:grpSpPr>
+      <p:sp>
+        <p:nvSpPr>
+          <p:cNvPr id="2" name="Text 0"/>
+          <p:cNvSpPr/>
+          <p:nvPr/>
+        </p:nvSpPr>
+        <p:spPr>
+          <a:xfrm>
+            <a:off x="640080" y="640080"/>
+            <a:ext cx="10058400" cy="320040"/>
+          </a:xfrm>
+          <a:prstGeom prst="rect">
+            <a:avLst/>
+          </a:prstGeom>
+          <a:noFill/>
+          <a:ln/>
+        </p:spPr>
+        <p:txBody>
+          <a:bodyPr wrap="square" rtlCol="0" anchor="ctr"/>
+          <a:lstStyle/>
+          <a:p>
+            <a:pPr indent="0" marL="0">
+              <a:buNone/>
+            </a:pPr>
+            <a:r>
+              <a:rPr lang="en-US" sz="1300" b="1" spc="300" kern="0" dirty="0">
+                <a:solidFill>
+                  <a:srgbClr val="7A3B2E"/>
+                </a:solidFill>
+                <a:latin typeface="Calibri" pitchFamily="34" charset="0"/>
+                <a:ea typeface="Calibri" pitchFamily="34" charset="-122"/>
+                <a:cs typeface="Calibri" pitchFamily="34" charset="-120"/>
+              </a:rPr>
+              <a:t>HOW THIS WEEK CONNECTS</a:t>
+            </a:r>
+            <a:endParaRPr lang="en-US" sz="1300" dirty="0"/>
+          </a:p>
+        </p:txBody>
+      </p:sp>
+      <p:sp>
+        <p:nvSpPr>
+          <p:cNvPr id="3" name="Text 1"/>
+          <p:cNvSpPr/>
+          <p:nvPr/>
+        </p:nvSpPr>
+        <p:spPr>
+          <a:xfrm>
+            <a:off x="640080" y="987552"/>
+            <a:ext cx="10058400" cy="640080"/>
+          </a:xfrm>
+          <a:prstGeom prst="rect">
+            <a:avLst/>
+          </a:prstGeom>
+          <a:noFill/>
+          <a:ln/>
+        </p:spPr>
+        <p:txBody>
+          <a:bodyPr wrap="square" rtlCol="0" anchor="ctr"/>
+          <a:lstStyle/>
+          <a:p>
+            <a:pPr indent="0" marL="0">
+              <a:buNone/>
+            </a:pPr>
+            <a:r>
+              <a:rPr lang="en-US" sz="2800" b="1" dirty="0">
+                <a:solidFill>
+                  <a:srgbClr val="1A1A1A"/>
+                </a:solidFill>
+                <a:latin typeface="Cambria" pitchFamily="34" charset="0"/>
+                <a:ea typeface="Cambria" pitchFamily="34" charset="-122"/>
+                <a:cs typeface="Cambria" pitchFamily="34" charset="-120"/>
+              </a:rPr>
+              <a:t>The course's through-lines</a:t>
+            </a:r>
+            <a:endParaRPr lang="en-US" sz="2800" dirty="0"/>
+          </a:p>
+        </p:txBody>
+      </p:sp>
+      <p:sp>
+        <p:nvSpPr>
+          <p:cNvPr id="4" name="Shape 2"/>
+          <p:cNvSpPr/>
+          <p:nvPr/>
+        </p:nvSpPr>
+        <p:spPr>
+          <a:xfrm>
+            <a:off x="640080" y="2057400"/>
+            <a:ext cx="457200" cy="457200"/>
+          </a:xfrm>
+          <a:prstGeom prst="roundRect">
+            <a:avLst>
+              <a:gd name="adj" fmla="val 16000"/>
+            </a:avLst>
+          </a:prstGeom>
+          <a:solidFill>
+            <a:srgbClr val="7A3B2E"/>
+          </a:solidFill>
+          <a:ln/>
+        </p:spPr>
+      </p:sp>
+      <p:sp>
+        <p:nvSpPr>
+          <p:cNvPr id="5" name="Text 3"/>
+          <p:cNvSpPr/>
+          <p:nvPr/>
+        </p:nvSpPr>
+        <p:spPr>
+          <a:xfrm>
+            <a:off x="640080" y="2057400"/>
+            <a:ext cx="457200" cy="457200"/>
+          </a:xfrm>
+          <a:prstGeom prst="rect">
+            <a:avLst/>
+          </a:prstGeom>
+          <a:noFill/>
+          <a:ln/>
+        </p:spPr>
+        <p:txBody>
+          <a:bodyPr wrap="square" rtlCol="0" anchor="ctr"/>
+          <a:lstStyle/>
+          <a:p>
+            <a:pPr algn="ctr" indent="0" marL="0">
+              <a:buNone/>
+            </a:pPr>
+            <a:r>
+              <a:rPr lang="en-US" sz="2000" b="1" dirty="0">
+                <a:solidFill>
+                  <a:srgbClr val="FFFFFF"/>
+                </a:solidFill>
+                <a:latin typeface="Cambria" pitchFamily="34" charset="0"/>
+                <a:ea typeface="Cambria" pitchFamily="34" charset="-122"/>
+                <a:cs typeface="Cambria" pitchFamily="34" charset="-120"/>
+              </a:rPr>
+              <a:t>1</a:t>
+            </a:r>
+            <a:endParaRPr lang="en-US" sz="2000" dirty="0"/>
+          </a:p>
+        </p:txBody>
+      </p:sp>
+      <p:sp>
+        <p:nvSpPr>
+          <p:cNvPr id="6" name="Text 4"/>
+          <p:cNvSpPr/>
+          <p:nvPr/>
+        </p:nvSpPr>
+        <p:spPr>
+          <a:xfrm>
+            <a:off x="1371600" y="2020824"/>
+            <a:ext cx="10332720" cy="411480"/>
+          </a:xfrm>
+          <a:prstGeom prst="rect">
+            <a:avLst/>
+          </a:prstGeom>
+          <a:noFill/>
+          <a:ln/>
+        </p:spPr>
+        <p:txBody>
+          <a:bodyPr wrap="square" rtlCol="0" anchor="ctr"/>
+          <a:lstStyle/>
+          <a:p>
+            <a:pPr indent="0" marL="0">
+              <a:buNone/>
+            </a:pPr>
+            <a:r>
+              <a:rPr lang="en-US" sz="1900" b="1" dirty="0">
+                <a:solidFill>
+                  <a:srgbClr val="7A3B2E"/>
+                </a:solidFill>
+                <a:latin typeface="Cambria" pitchFamily="34" charset="0"/>
+                <a:ea typeface="Cambria" pitchFamily="34" charset="-122"/>
+                <a:cs typeface="Cambria" pitchFamily="34" charset="-120"/>
+              </a:rPr>
+              <a:t>Whose data, at full scale</a:t>
+            </a:r>
+            <a:endParaRPr lang="en-US" sz="1900" dirty="0"/>
+          </a:p>
+        </p:txBody>
+      </p:sp>
+      <p:sp>
+        <p:nvSpPr>
+          <p:cNvPr id="7" name="Text 5"/>
+          <p:cNvSpPr/>
+          <p:nvPr/>
+        </p:nvSpPr>
+        <p:spPr>
+          <a:xfrm>
+            <a:off x="1371600" y="2441448"/>
+            <a:ext cx="10332720" cy="914400"/>
+          </a:xfrm>
+          <a:prstGeom prst="rect">
+            <a:avLst/>
+          </a:prstGeom>
+          <a:noFill/>
+          <a:ln/>
+        </p:spPr>
+        <p:txBody>
+          <a:bodyPr wrap="square" rtlCol="0" anchor="t">
+            <a:spAutoFit/>
+          </a:bodyPr>
+          <a:lstStyle/>
+          <a:p>
+            <a:pPr indent="0" marL="0">
+              <a:lnSpc>
+                <a:spcPct val="112000"/>
+              </a:lnSpc>
+              <a:buNone/>
+            </a:pPr>
+            <a:r>
+              <a:rPr lang="en-US" sz="1450" dirty="0">
+                <a:solidFill>
+                  <a:srgbClr val="1A1A1A"/>
+                </a:solidFill>
+                <a:latin typeface="Calibri" pitchFamily="34" charset="0"/>
+                <a:ea typeface="Calibri" pitchFamily="34" charset="-122"/>
+                <a:cs typeface="Calibri" pitchFamily="34" charset="-120"/>
+              </a:rPr>
+              <a:t>A model is its corpus: bound the corpus and you bound the mind.</a:t>
+            </a:r>
+            <a:endParaRPr lang="en-US" sz="1450" dirty="0"/>
+          </a:p>
+        </p:txBody>
+      </p:sp>
+      <p:sp>
+        <p:nvSpPr>
+          <p:cNvPr id="8" name="Shape 6"/>
+          <p:cNvSpPr/>
+          <p:nvPr/>
+        </p:nvSpPr>
+        <p:spPr>
+          <a:xfrm>
+            <a:off x="640080" y="3520440"/>
+            <a:ext cx="457200" cy="457200"/>
+          </a:xfrm>
+          <a:prstGeom prst="roundRect">
+            <a:avLst>
+              <a:gd name="adj" fmla="val 16000"/>
+            </a:avLst>
+          </a:prstGeom>
+          <a:solidFill>
+            <a:srgbClr val="3F6F5F"/>
+          </a:solidFill>
+          <a:ln/>
+        </p:spPr>
+      </p:sp>
+      <p:sp>
+        <p:nvSpPr>
+          <p:cNvPr id="9" name="Text 7"/>
+          <p:cNvSpPr/>
+          <p:nvPr/>
+        </p:nvSpPr>
+        <p:spPr>
+          <a:xfrm>
+            <a:off x="640080" y="3520440"/>
+            <a:ext cx="457200" cy="457200"/>
+          </a:xfrm>
+          <a:prstGeom prst="rect">
+            <a:avLst/>
+          </a:prstGeom>
+          <a:noFill/>
+          <a:ln/>
+        </p:spPr>
+        <p:txBody>
+          <a:bodyPr wrap="square" rtlCol="0" anchor="ctr"/>
+          <a:lstStyle/>
+          <a:p>
+            <a:pPr algn="ctr" indent="0" marL="0">
+              <a:buNone/>
+            </a:pPr>
+            <a:r>
+              <a:rPr lang="en-US" sz="2000" b="1" dirty="0">
+                <a:solidFill>
+                  <a:srgbClr val="FFFFFF"/>
+                </a:solidFill>
+                <a:latin typeface="Cambria" pitchFamily="34" charset="0"/>
+                <a:ea typeface="Cambria" pitchFamily="34" charset="-122"/>
+                <a:cs typeface="Cambria" pitchFamily="34" charset="-120"/>
+              </a:rPr>
+              <a:t>2</a:t>
+            </a:r>
+            <a:endParaRPr lang="en-US" sz="2000" dirty="0"/>
+          </a:p>
+        </p:txBody>
+      </p:sp>
+      <p:sp>
+        <p:nvSpPr>
+          <p:cNvPr id="10" name="Text 8"/>
+          <p:cNvSpPr/>
+          <p:nvPr/>
+        </p:nvSpPr>
+        <p:spPr>
+          <a:xfrm>
+            <a:off x="1371600" y="3483864"/>
+            <a:ext cx="10332720" cy="411480"/>
+          </a:xfrm>
+          <a:prstGeom prst="rect">
+            <a:avLst/>
+          </a:prstGeom>
+          <a:noFill/>
+          <a:ln/>
+        </p:spPr>
+        <p:txBody>
+          <a:bodyPr wrap="square" rtlCol="0" anchor="ctr"/>
+          <a:lstStyle/>
+          <a:p>
+            <a:pPr indent="0" marL="0">
+              <a:buNone/>
+            </a:pPr>
+            <a:r>
+              <a:rPr lang="en-US" sz="1900" b="1" dirty="0">
+                <a:solidFill>
+                  <a:srgbClr val="3F6F5F"/>
+                </a:solidFill>
+                <a:latin typeface="Cambria" pitchFamily="34" charset="0"/>
+                <a:ea typeface="Cambria" pitchFamily="34" charset="-122"/>
+                <a:cs typeface="Cambria" pitchFamily="34" charset="-120"/>
+              </a:rPr>
+              <a:t>Memorization isn't reading</a:t>
+            </a:r>
+            <a:endParaRPr lang="en-US" sz="1900" dirty="0"/>
+          </a:p>
+        </p:txBody>
+      </p:sp>
+      <p:sp>
+        <p:nvSpPr>
+          <p:cNvPr id="11" name="Text 9"/>
+          <p:cNvSpPr/>
+          <p:nvPr/>
+        </p:nvSpPr>
+        <p:spPr>
+          <a:xfrm>
+            <a:off x="1371600" y="3904488"/>
+            <a:ext cx="10332720" cy="914400"/>
+          </a:xfrm>
+          <a:prstGeom prst="rect">
+            <a:avLst/>
+          </a:prstGeom>
+          <a:noFill/>
+          <a:ln/>
+        </p:spPr>
+        <p:txBody>
+          <a:bodyPr wrap="square" rtlCol="0" anchor="t">
+            <a:spAutoFit/>
+          </a:bodyPr>
+          <a:lstStyle/>
+          <a:p>
+            <a:pPr indent="0" marL="0">
+              <a:lnSpc>
+                <a:spcPct val="112000"/>
+              </a:lnSpc>
+              <a:buNone/>
+            </a:pPr>
+            <a:r>
+              <a:rPr lang="en-US" sz="1450" dirty="0">
+                <a:solidFill>
+                  <a:srgbClr val="1A1A1A"/>
+                </a:solidFill>
+                <a:latin typeface="Calibri" pitchFamily="34" charset="0"/>
+                <a:ea typeface="Calibri" pitchFamily="34" charset="-122"/>
+                <a:cs typeface="Calibri" pitchFamily="34" charset="-120"/>
+              </a:rPr>
+              <a:t>A model may recite your corpus rather than read it, a validity problem, not just ethics.</a:t>
+            </a:r>
+            <a:endParaRPr lang="en-US" sz="1450" dirty="0"/>
+          </a:p>
+        </p:txBody>
+      </p:sp>
+      <p:sp>
+        <p:nvSpPr>
+          <p:cNvPr id="12" name="Shape 10"/>
+          <p:cNvSpPr/>
+          <p:nvPr/>
+        </p:nvSpPr>
+        <p:spPr>
+          <a:xfrm>
+            <a:off x="640080" y="4983480"/>
+            <a:ext cx="457200" cy="457200"/>
+          </a:xfrm>
+          <a:prstGeom prst="roundRect">
+            <a:avLst>
+              <a:gd name="adj" fmla="val 16000"/>
+            </a:avLst>
+          </a:prstGeom>
+          <a:solidFill>
+            <a:srgbClr val="B9852F"/>
+          </a:solidFill>
+          <a:ln/>
+        </p:spPr>
+      </p:sp>
+      <p:sp>
+        <p:nvSpPr>
+          <p:cNvPr id="13" name="Text 11"/>
+          <p:cNvSpPr/>
+          <p:nvPr/>
+        </p:nvSpPr>
+        <p:spPr>
+          <a:xfrm>
+            <a:off x="640080" y="4983480"/>
+            <a:ext cx="457200" cy="457200"/>
+          </a:xfrm>
+          <a:prstGeom prst="rect">
+            <a:avLst/>
+          </a:prstGeom>
+          <a:noFill/>
+          <a:ln/>
+        </p:spPr>
+        <p:txBody>
+          <a:bodyPr wrap="square" rtlCol="0" anchor="ctr"/>
+          <a:lstStyle/>
+          <a:p>
+            <a:pPr algn="ctr" indent="0" marL="0">
+              <a:buNone/>
+            </a:pPr>
+            <a:r>
+              <a:rPr lang="en-US" sz="2000" b="1" dirty="0">
+                <a:solidFill>
+                  <a:srgbClr val="FFFFFF"/>
+                </a:solidFill>
+                <a:latin typeface="Cambria" pitchFamily="34" charset="0"/>
+                <a:ea typeface="Cambria" pitchFamily="34" charset="-122"/>
+                <a:cs typeface="Cambria" pitchFamily="34" charset="-120"/>
+              </a:rPr>
+              <a:t>3</a:t>
+            </a:r>
+            <a:endParaRPr lang="en-US" sz="2000" dirty="0"/>
+          </a:p>
+        </p:txBody>
+      </p:sp>
+      <p:sp>
+        <p:nvSpPr>
+          <p:cNvPr id="14" name="Text 12"/>
+          <p:cNvSpPr/>
+          <p:nvPr/>
+        </p:nvSpPr>
+        <p:spPr>
+          <a:xfrm>
+            <a:off x="1371600" y="4946904"/>
+            <a:ext cx="10332720" cy="411480"/>
+          </a:xfrm>
+          <a:prstGeom prst="rect">
+            <a:avLst/>
+          </a:prstGeom>
+          <a:noFill/>
+          <a:ln/>
+        </p:spPr>
+        <p:txBody>
+          <a:bodyPr wrap="square" rtlCol="0" anchor="ctr"/>
+          <a:lstStyle/>
+          <a:p>
+            <a:pPr indent="0" marL="0">
+              <a:buNone/>
+            </a:pPr>
+            <a:r>
+              <a:rPr lang="en-US" sz="1900" b="1" dirty="0">
+                <a:solidFill>
+                  <a:srgbClr val="B9852F"/>
+                </a:solidFill>
+                <a:latin typeface="Cambria" pitchFamily="34" charset="0"/>
+                <a:ea typeface="Cambria" pitchFamily="34" charset="-122"/>
+                <a:cs typeface="Cambria" pitchFamily="34" charset="-120"/>
+              </a:rPr>
+              <a:t>Test it, then keep what survives</a:t>
+            </a:r>
+            <a:endParaRPr lang="en-US" sz="1900" dirty="0"/>
+          </a:p>
+        </p:txBody>
+      </p:sp>
+      <p:sp>
+        <p:nvSpPr>
+          <p:cNvPr id="15" name="Text 13"/>
+          <p:cNvSpPr/>
+          <p:nvPr/>
+        </p:nvSpPr>
+        <p:spPr>
+          <a:xfrm>
+            <a:off x="1371600" y="5367528"/>
+            <a:ext cx="10332720" cy="914400"/>
+          </a:xfrm>
+          <a:prstGeom prst="rect">
+            <a:avLst/>
+          </a:prstGeom>
+          <a:noFill/>
+          <a:ln/>
+        </p:spPr>
+        <p:txBody>
+          <a:bodyPr wrap="square" rtlCol="0" anchor="t">
+            <a:spAutoFit/>
+          </a:bodyPr>
+          <a:lstStyle/>
+          <a:p>
+            <a:pPr indent="0" marL="0">
+              <a:lnSpc>
+                <a:spcPct val="112000"/>
+              </a:lnSpc>
+              <a:buNone/>
+            </a:pPr>
+            <a:r>
+              <a:rPr lang="en-US" sz="1450" dirty="0">
+                <a:solidFill>
+                  <a:srgbClr val="1A1A1A"/>
+                </a:solidFill>
+                <a:latin typeface="Calibri" pitchFamily="34" charset="0"/>
+                <a:ea typeface="Calibri" pitchFamily="34" charset="-122"/>
+                <a:cs typeface="Calibri" pitchFamily="34" charset="-120"/>
+              </a:rPr>
+              <a:t>The Week 2 trial's method, now applied to your own finding.</a:t>
+            </a:r>
+            <a:endParaRPr lang="en-US" sz="1450" dirty="0"/>
+          </a:p>
+        </p:txBody>
+      </p:sp>
+    </p:spTree>
+  </p:cSld>
+  <p:clrMapOvr>
+    <a:masterClrMapping/>
+  </p:clrMapOvr>
+</p:sld>
+</file>
+
+<file path=ppt/slides/slide12.xml><?xml version="1.0" encoding="utf-8"?>
+<p:sld xmlns:a="http://schemas.openxmlformats.org/drawingml/2006/main" xmlns:r="http://schemas.openxmlformats.org/officeDocument/2006/relationships" xmlns:p="http://schemas.openxmlformats.org/presentationml/2006/main">
+  <p:cSld name="Slide 12">
     <p:bg>
       <p:bgPr>
         <a:solidFill>
@@ -4572,7 +5232,7 @@
                 <a:ea typeface="Cambria" pitchFamily="34" charset="-122"/>
                 <a:cs typeface="Cambria" pitchFamily="34" charset="-120"/>
               </a:rPr>
-              <a:t>The show-your-work appendix</a:t>
+              <a:t>Interrogate your own chart</a:t>
             </a:r>
             <a:endParaRPr lang="en-US" sz="3000" dirty="0"/>
           </a:p>
@@ -4607,7 +5267,7 @@
         <p:spPr>
           <a:xfrm>
             <a:off x="1097280" y="2240280"/>
-            <a:ext cx="10607040" cy="1051560"/>
+            <a:ext cx="10607040" cy="1017270"/>
           </a:xfrm>
           <a:prstGeom prst="rect">
             <a:avLst/>
@@ -4636,7 +5296,7 @@
                 <a:ea typeface="Calibri" pitchFamily="34" charset="-122"/>
                 <a:cs typeface="Calibri" pitchFamily="34" charset="-120"/>
               </a:rPr>
-              <a:t>Your method choices, your moments of doubt, what you cut, what the AI got wrong.</a:t>
+              <a:t>Does the y-axis start at zero, or is the plotting default manufacturing your trend?</a:t>
             </a:r>
             <a:endParaRPr lang="en-US" sz="1650" dirty="0"/>
           </a:p>
@@ -4650,7 +5310,7 @@
         </p:nvSpPr>
         <p:spPr>
           <a:xfrm>
-            <a:off x="640080" y="3383280"/>
+            <a:off x="640080" y="3348990"/>
             <a:ext cx="201168" cy="201168"/>
           </a:xfrm>
           <a:prstGeom prst="ellipse">
@@ -4670,8 +5330,8 @@
         </p:nvSpPr>
         <p:spPr>
           <a:xfrm>
-            <a:off x="1097280" y="3291840"/>
-            <a:ext cx="10607040" cy="1051560"/>
+            <a:off x="1097280" y="3257550"/>
+            <a:ext cx="10607040" cy="1017270"/>
           </a:xfrm>
           <a:prstGeom prst="rect">
             <a:avLst/>
@@ -4700,7 +5360,7 @@
                 <a:ea typeface="Calibri" pitchFamily="34" charset="-122"/>
                 <a:cs typeface="Calibri" pitchFamily="34" charset="-120"/>
               </a:rPr>
-              <a:t>Name where a reader could reasonably disagree with you, before they do.</a:t>
+              <a:t>Is the eye pulled toward a pattern the data won't support?</a:t>
             </a:r>
             <a:endParaRPr lang="en-US" sz="1650" dirty="0"/>
           </a:p>
@@ -4714,7 +5374,7 @@
         </p:nvSpPr>
         <p:spPr>
           <a:xfrm>
-            <a:off x="640080" y="4434840"/>
+            <a:off x="640080" y="4366260"/>
             <a:ext cx="201168" cy="201168"/>
           </a:xfrm>
           <a:prstGeom prst="ellipse">
@@ -4734,8 +5394,8 @@
         </p:nvSpPr>
         <p:spPr>
           <a:xfrm>
-            <a:off x="1097280" y="4343400"/>
-            <a:ext cx="10607040" cy="1051560"/>
+            <a:off x="1097280" y="4274820"/>
+            <a:ext cx="10607040" cy="1017270"/>
           </a:xfrm>
           <a:prstGeom prst="rect">
             <a:avLst/>
@@ -4764,7 +5424,71 @@
                 <a:ea typeface="Calibri" pitchFamily="34" charset="-122"/>
                 <a:cs typeface="Calibri" pitchFamily="34" charset="-120"/>
               </a:rPr>
-              <a:t>The honesty you demanded of published work all term, turned on yourself. (Data Feminism's practice, run quietly all course.)</a:t>
+              <a:t>What does this chart hide that a different one would show?</a:t>
+            </a:r>
+            <a:endParaRPr lang="en-US" sz="1650" dirty="0"/>
+          </a:p>
+        </p:txBody>
+      </p:sp>
+      <p:sp>
+        <p:nvSpPr>
+          <p:cNvPr id="11" name="Shape 9"/>
+          <p:cNvSpPr/>
+          <p:nvPr/>
+        </p:nvSpPr>
+        <p:spPr>
+          <a:xfrm>
+            <a:off x="640080" y="5383530"/>
+            <a:ext cx="201168" cy="201168"/>
+          </a:xfrm>
+          <a:prstGeom prst="ellipse">
+            <a:avLst/>
+          </a:prstGeom>
+          <a:solidFill>
+            <a:srgbClr val="7A3B2E"/>
+          </a:solidFill>
+          <a:ln/>
+        </p:spPr>
+      </p:sp>
+      <p:sp>
+        <p:nvSpPr>
+          <p:cNvPr id="12" name="Text 10"/>
+          <p:cNvSpPr/>
+          <p:nvPr/>
+        </p:nvSpPr>
+        <p:spPr>
+          <a:xfrm>
+            <a:off x="1097280" y="5292090"/>
+            <a:ext cx="10607040" cy="1017270"/>
+          </a:xfrm>
+          <a:prstGeom prst="rect">
+            <a:avLst/>
+          </a:prstGeom>
+          <a:noFill/>
+          <a:ln/>
+        </p:spPr>
+        <p:txBody>
+          <a:bodyPr wrap="square" rtlCol="0" anchor="t">
+            <a:spAutoFit/>
+          </a:bodyPr>
+          <a:lstStyle/>
+          <a:p>
+            <a:pPr indent="0" marL="0">
+              <a:lnSpc>
+                <a:spcPct val="112000"/>
+              </a:lnSpc>
+              <a:buNone/>
+            </a:pPr>
+            <a:r>
+              <a:rPr lang="en-US" sz="1650" dirty="0">
+                <a:solidFill>
+                  <a:srgbClr val="1A1A1A"/>
+                </a:solidFill>
+                <a:latin typeface="Calibri" pitchFamily="34" charset="0"/>
+                <a:ea typeface="Calibri" pitchFamily="34" charset="-122"/>
+                <a:cs typeface="Calibri" pitchFamily="34" charset="-120"/>
+              </a:rPr>
+              <a:t>Ten weeks interrogating other people's charts. These ten minutes are for yours. Fix one thing.</a:t>
             </a:r>
             <a:endParaRPr lang="en-US" sz="1650" dirty="0"/>
           </a:p>
@@ -4804,14 +5528,34 @@
       </p:grpSpPr>
       <p:sp>
         <p:nvSpPr>
-          <p:cNvPr id="2" name="Text 0"/>
-          <p:cNvSpPr/>
-          <p:nvPr/>
-        </p:nvSpPr>
-        <p:spPr>
-          <a:xfrm>
-            <a:off x="640080" y="731520"/>
-            <a:ext cx="10058400" cy="731520"/>
+          <p:cNvPr id="2" name="Shape 0"/>
+          <p:cNvSpPr/>
+          <p:nvPr/>
+        </p:nvSpPr>
+        <p:spPr>
+          <a:xfrm>
+            <a:off x="0" y="0"/>
+            <a:ext cx="164592" cy="6858000"/>
+          </a:xfrm>
+          <a:prstGeom prst="rect">
+            <a:avLst/>
+          </a:prstGeom>
+          <a:solidFill>
+            <a:srgbClr val="7A3B2E"/>
+          </a:solidFill>
+          <a:ln/>
+        </p:spPr>
+      </p:sp>
+      <p:sp>
+        <p:nvSpPr>
+          <p:cNvPr id="3" name="Text 1"/>
+          <p:cNvSpPr/>
+          <p:nvPr/>
+        </p:nvSpPr>
+        <p:spPr>
+          <a:xfrm>
+            <a:off x="640080" y="640080"/>
+            <a:ext cx="10058400" cy="320040"/>
           </a:xfrm>
           <a:prstGeom prst="rect">
             <a:avLst/>
@@ -4821,6 +5565,47 @@
         </p:spPr>
         <p:txBody>
           <a:bodyPr wrap="square" rtlCol="0" anchor="ctr"/>
+          <a:lstStyle/>
+          <a:p>
+            <a:pPr indent="0" marL="0">
+              <a:buNone/>
+            </a:pPr>
+            <a:r>
+              <a:rPr lang="en-US" sz="1200" b="1" spc="300" kern="0" dirty="0">
+                <a:solidFill>
+                  <a:srgbClr val="7A3B2E"/>
+                </a:solidFill>
+                <a:latin typeface="Calibri" pitchFamily="34" charset="0"/>
+                <a:ea typeface="Calibri" pitchFamily="34" charset="-122"/>
+                <a:cs typeface="Calibri" pitchFamily="34" charset="-120"/>
+              </a:rPr>
+              <a:t>WEEK 8 · KEY POINTS</a:t>
+            </a:r>
+            <a:endParaRPr lang="en-US" sz="1200" dirty="0"/>
+          </a:p>
+        </p:txBody>
+      </p:sp>
+      <p:sp>
+        <p:nvSpPr>
+          <p:cNvPr id="4" name="Text 2"/>
+          <p:cNvSpPr/>
+          <p:nvPr/>
+        </p:nvSpPr>
+        <p:spPr>
+          <a:xfrm>
+            <a:off x="640080" y="1005840"/>
+            <a:ext cx="10881360" cy="914400"/>
+          </a:xfrm>
+          <a:prstGeom prst="rect">
+            <a:avLst/>
+          </a:prstGeom>
+          <a:noFill/>
+          <a:ln/>
+        </p:spPr>
+        <p:txBody>
+          <a:bodyPr wrap="square" rtlCol="0" anchor="t">
+            <a:spAutoFit/>
+          </a:bodyPr>
           <a:lstStyle/>
           <a:p>
             <a:pPr indent="0" marL="0">
@@ -4835,7 +5620,7 @@
                 <a:ea typeface="Cambria" pitchFamily="34" charset="-122"/>
                 <a:cs typeface="Cambria" pitchFamily="34" charset="-120"/>
               </a:rPr>
-              <a:t>Three modes today</a:t>
+              <a:t>The show-your-work appendix</a:t>
             </a:r>
             <a:endParaRPr lang="en-US" sz="3000" dirty="0"/>
           </a:p>
@@ -4843,134 +5628,98 @@
       </p:sp>
       <p:sp>
         <p:nvSpPr>
-          <p:cNvPr id="3" name="Text 1"/>
-          <p:cNvSpPr/>
-          <p:nvPr/>
-        </p:nvSpPr>
-        <p:spPr>
-          <a:xfrm>
-            <a:off x="640080" y="1417320"/>
-            <a:ext cx="10058400" cy="365760"/>
-          </a:xfrm>
-          <a:prstGeom prst="rect">
-            <a:avLst/>
-          </a:prstGeom>
-          <a:noFill/>
-          <a:ln/>
-        </p:spPr>
-        <p:txBody>
-          <a:bodyPr wrap="square" rtlCol="0" anchor="ctr"/>
+          <p:cNvPr id="5" name="Shape 3"/>
+          <p:cNvSpPr/>
+          <p:nvPr/>
+        </p:nvSpPr>
+        <p:spPr>
+          <a:xfrm>
+            <a:off x="640080" y="2331720"/>
+            <a:ext cx="201168" cy="201168"/>
+          </a:xfrm>
+          <a:prstGeom prst="ellipse">
+            <a:avLst/>
+          </a:prstGeom>
+          <a:solidFill>
+            <a:srgbClr val="7A3B2E"/>
+          </a:solidFill>
+          <a:ln/>
+        </p:spPr>
+      </p:sp>
+      <p:sp>
+        <p:nvSpPr>
+          <p:cNvPr id="6" name="Text 4"/>
+          <p:cNvSpPr/>
+          <p:nvPr/>
+        </p:nvSpPr>
+        <p:spPr>
+          <a:xfrm>
+            <a:off x="1097280" y="2240280"/>
+            <a:ext cx="10607040" cy="1051560"/>
+          </a:xfrm>
+          <a:prstGeom prst="rect">
+            <a:avLst/>
+          </a:prstGeom>
+          <a:noFill/>
+          <a:ln/>
+        </p:spPr>
+        <p:txBody>
+          <a:bodyPr wrap="square" rtlCol="0" anchor="t">
+            <a:spAutoFit/>
+          </a:bodyPr>
           <a:lstStyle/>
           <a:p>
             <a:pPr indent="0" marL="0">
-              <a:buNone/>
-            </a:pPr>
-            <a:r>
-              <a:rPr lang="en-US" sz="1400" i="1" dirty="0">
-                <a:solidFill>
-                  <a:srgbClr val="6B6B63"/>
+              <a:lnSpc>
+                <a:spcPct val="112000"/>
+              </a:lnSpc>
+              <a:buNone/>
+            </a:pPr>
+            <a:r>
+              <a:rPr lang="en-US" sz="1650" dirty="0">
+                <a:solidFill>
+                  <a:srgbClr val="1A1A1A"/>
                 </a:solidFill>
                 <a:latin typeface="Calibri" pitchFamily="34" charset="0"/>
                 <a:ea typeface="Calibri" pitchFamily="34" charset="-122"/>
                 <a:cs typeface="Calibri" pitchFamily="34" charset="-120"/>
               </a:rPr>
-              <a:t>about a third of the session each</a:t>
-            </a:r>
-            <a:endParaRPr lang="en-US" sz="1400" dirty="0"/>
-          </a:p>
-        </p:txBody>
-      </p:sp>
-      <p:sp>
-        <p:nvSpPr>
-          <p:cNvPr id="4" name="Shape 2"/>
-          <p:cNvSpPr/>
-          <p:nvPr/>
-        </p:nvSpPr>
-        <p:spPr>
-          <a:xfrm>
-            <a:off x="640080" y="2194560"/>
-            <a:ext cx="3383280" cy="3291840"/>
-          </a:xfrm>
-          <a:prstGeom prst="roundRect">
-            <a:avLst>
-              <a:gd name="adj" fmla="val 3333"/>
-            </a:avLst>
-          </a:prstGeom>
-          <a:solidFill>
-            <a:srgbClr val="F4EEE8"/>
-          </a:solidFill>
-          <a:ln/>
-        </p:spPr>
-      </p:sp>
-      <p:sp>
-        <p:nvSpPr>
-          <p:cNvPr id="5" name="Shape 3"/>
-          <p:cNvSpPr/>
-          <p:nvPr/>
-        </p:nvSpPr>
-        <p:spPr>
-          <a:xfrm>
-            <a:off x="1051560" y="2606040"/>
-            <a:ext cx="548640" cy="548640"/>
+              <a:t>Your method choices, your moments of doubt, what you cut, what the AI got wrong.</a:t>
+            </a:r>
+            <a:endParaRPr lang="en-US" sz="1650" dirty="0"/>
+          </a:p>
+        </p:txBody>
+      </p:sp>
+      <p:sp>
+        <p:nvSpPr>
+          <p:cNvPr id="7" name="Shape 5"/>
+          <p:cNvSpPr/>
+          <p:nvPr/>
+        </p:nvSpPr>
+        <p:spPr>
+          <a:xfrm>
+            <a:off x="640080" y="3383280"/>
+            <a:ext cx="201168" cy="201168"/>
           </a:xfrm>
           <a:prstGeom prst="ellipse">
             <a:avLst/>
           </a:prstGeom>
           <a:solidFill>
-            <a:srgbClr val="7A3B2E"/>
-          </a:solidFill>
-          <a:ln/>
-        </p:spPr>
-      </p:sp>
-      <p:sp>
-        <p:nvSpPr>
-          <p:cNvPr id="6" name="Text 4"/>
-          <p:cNvSpPr/>
-          <p:nvPr/>
-        </p:nvSpPr>
-        <p:spPr>
-          <a:xfrm>
-            <a:off x="1005840" y="3383280"/>
-            <a:ext cx="2651760" cy="548640"/>
-          </a:xfrm>
-          <a:prstGeom prst="rect">
-            <a:avLst/>
-          </a:prstGeom>
-          <a:noFill/>
-          <a:ln/>
-        </p:spPr>
-        <p:txBody>
-          <a:bodyPr wrap="square" rtlCol="0" anchor="ctr"/>
-          <a:lstStyle/>
-          <a:p>
-            <a:pPr indent="0" marL="0">
-              <a:buNone/>
-            </a:pPr>
-            <a:r>
-              <a:rPr lang="en-US" sz="2100" b="1" dirty="0">
-                <a:solidFill>
-                  <a:srgbClr val="1A1A1A"/>
-                </a:solidFill>
-                <a:latin typeface="Cambria" pitchFamily="34" charset="0"/>
-                <a:ea typeface="Cambria" pitchFamily="34" charset="-122"/>
-                <a:cs typeface="Cambria" pitchFamily="34" charset="-120"/>
-              </a:rPr>
-              <a:t>Lecture / demo</a:t>
-            </a:r>
-            <a:endParaRPr lang="en-US" sz="2100" dirty="0"/>
-          </a:p>
-        </p:txBody>
-      </p:sp>
-      <p:sp>
-        <p:nvSpPr>
-          <p:cNvPr id="7" name="Text 5"/>
-          <p:cNvSpPr/>
-          <p:nvPr/>
-        </p:nvSpPr>
-        <p:spPr>
-          <a:xfrm>
-            <a:off x="1005840" y="3977640"/>
-            <a:ext cx="2651760" cy="1371600"/>
+            <a:srgbClr val="3F6F5F"/>
+          </a:solidFill>
+          <a:ln/>
+        </p:spPr>
+      </p:sp>
+      <p:sp>
+        <p:nvSpPr>
+          <p:cNvPr id="8" name="Text 6"/>
+          <p:cNvSpPr/>
+          <p:nvPr/>
+        </p:nvSpPr>
+        <p:spPr>
+          <a:xfrm>
+            <a:off x="1097280" y="3291840"/>
+            <a:ext cx="10607040" cy="1051560"/>
           </a:xfrm>
           <a:prstGeom prst="rect">
             <a:avLst/>
@@ -4986,12 +5735,12 @@
           <a:p>
             <a:pPr indent="0" marL="0">
               <a:lnSpc>
-                <a:spcPct val="115000"/>
+                <a:spcPct val="112000"/>
               </a:lnSpc>
               <a:buNone/>
             </a:pPr>
             <a:r>
-              <a:rPr lang="en-US" sz="1500" dirty="0">
+              <a:rPr lang="en-US" sz="1650" dirty="0">
                 <a:solidFill>
                   <a:srgbClr val="1A1A1A"/>
                 </a:solidFill>
@@ -4999,33 +5748,11 @@
                 <a:ea typeface="Calibri" pitchFamily="34" charset="-122"/>
                 <a:cs typeface="Calibri" pitchFamily="34" charset="-120"/>
               </a:rPr>
-              <a:t>What a trained model is: a compression of its corpus</a:t>
-            </a:r>
-            <a:endParaRPr lang="en-US" sz="1500" dirty="0"/>
-          </a:p>
-        </p:txBody>
-      </p:sp>
-      <p:sp>
-        <p:nvSpPr>
-          <p:cNvPr id="8" name="Shape 6"/>
-          <p:cNvSpPr/>
-          <p:nvPr/>
-        </p:nvSpPr>
-        <p:spPr>
-          <a:xfrm>
-            <a:off x="4526280" y="2194560"/>
-            <a:ext cx="3383280" cy="3291840"/>
-          </a:xfrm>
-          <a:prstGeom prst="roundRect">
-            <a:avLst>
-              <a:gd name="adj" fmla="val 3333"/>
-            </a:avLst>
-          </a:prstGeom>
-          <a:solidFill>
-            <a:srgbClr val="F4EEE8"/>
-          </a:solidFill>
-          <a:ln/>
-        </p:spPr>
+              <a:t>Name where a reader could reasonably disagree with you, before they do.</a:t>
+            </a:r>
+            <a:endParaRPr lang="en-US" sz="1650" dirty="0"/>
+          </a:p>
+        </p:txBody>
       </p:sp>
       <p:sp>
         <p:nvSpPr>
@@ -5035,14 +5762,14 @@
         </p:nvSpPr>
         <p:spPr>
           <a:xfrm>
-            <a:off x="4937760" y="2606040"/>
-            <a:ext cx="548640" cy="548640"/>
+            <a:off x="640080" y="4434840"/>
+            <a:ext cx="201168" cy="201168"/>
           </a:xfrm>
           <a:prstGeom prst="ellipse">
             <a:avLst/>
           </a:prstGeom>
           <a:solidFill>
-            <a:srgbClr val="3F6F5F"/>
+            <a:srgbClr val="B9852F"/>
           </a:solidFill>
           <a:ln/>
         </p:spPr>
@@ -5055,47 +5782,8 @@
         </p:nvSpPr>
         <p:spPr>
           <a:xfrm>
-            <a:off x="4892040" y="3383280"/>
-            <a:ext cx="2651760" cy="548640"/>
-          </a:xfrm>
-          <a:prstGeom prst="rect">
-            <a:avLst/>
-          </a:prstGeom>
-          <a:noFill/>
-          <a:ln/>
-        </p:spPr>
-        <p:txBody>
-          <a:bodyPr wrap="square" rtlCol="0" anchor="ctr"/>
-          <a:lstStyle/>
-          <a:p>
-            <a:pPr indent="0" marL="0">
-              <a:buNone/>
-            </a:pPr>
-            <a:r>
-              <a:rPr lang="en-US" sz="2100" b="1" dirty="0">
-                <a:solidFill>
-                  <a:srgbClr val="1A1A1A"/>
-                </a:solidFill>
-                <a:latin typeface="Cambria" pitchFamily="34" charset="0"/>
-                <a:ea typeface="Cambria" pitchFamily="34" charset="-122"/>
-                <a:cs typeface="Cambria" pitchFamily="34" charset="-120"/>
-              </a:rPr>
-              <a:t>Workshop</a:t>
-            </a:r>
-            <a:endParaRPr lang="en-US" sz="2100" dirty="0"/>
-          </a:p>
-        </p:txBody>
-      </p:sp>
-      <p:sp>
-        <p:nvSpPr>
-          <p:cNvPr id="11" name="Text 9"/>
-          <p:cNvSpPr/>
-          <p:nvPr/>
-        </p:nvSpPr>
-        <p:spPr>
-          <a:xfrm>
-            <a:off x="4892040" y="3977640"/>
-            <a:ext cx="2651760" cy="1371600"/>
+            <a:off x="1097280" y="4343400"/>
+            <a:ext cx="10607040" cy="1051560"/>
           </a:xfrm>
           <a:prstGeom prst="rect">
             <a:avLst/>
@@ -5111,12 +5799,12 @@
           <a:p>
             <a:pPr indent="0" marL="0">
               <a:lnSpc>
-                <a:spcPct val="115000"/>
+                <a:spcPct val="112000"/>
               </a:lnSpc>
               <a:buNone/>
             </a:pPr>
             <a:r>
-              <a:rPr lang="en-US" sz="1500" dirty="0">
+              <a:rPr lang="en-US" sz="1650" dirty="0">
                 <a:solidFill>
                   <a:srgbClr val="1A1A1A"/>
                 </a:solidFill>
@@ -5124,134 +5812,9 @@
                 <a:ea typeface="Calibri" pitchFamily="34" charset="-122"/>
                 <a:cs typeface="Calibri" pitchFamily="34" charset="-120"/>
               </a:rPr>
-              <a:t>Build hands-on on your own data.</a:t>
-            </a:r>
-            <a:endParaRPr lang="en-US" sz="1500" dirty="0"/>
-          </a:p>
-        </p:txBody>
-      </p:sp>
-      <p:sp>
-        <p:nvSpPr>
-          <p:cNvPr id="12" name="Shape 10"/>
-          <p:cNvSpPr/>
-          <p:nvPr/>
-        </p:nvSpPr>
-        <p:spPr>
-          <a:xfrm>
-            <a:off x="8412480" y="2194560"/>
-            <a:ext cx="3383280" cy="3291840"/>
-          </a:xfrm>
-          <a:prstGeom prst="roundRect">
-            <a:avLst>
-              <a:gd name="adj" fmla="val 3333"/>
-            </a:avLst>
-          </a:prstGeom>
-          <a:solidFill>
-            <a:srgbClr val="F4EEE8"/>
-          </a:solidFill>
-          <a:ln/>
-        </p:spPr>
-      </p:sp>
-      <p:sp>
-        <p:nvSpPr>
-          <p:cNvPr id="13" name="Shape 11"/>
-          <p:cNvSpPr/>
-          <p:nvPr/>
-        </p:nvSpPr>
-        <p:spPr>
-          <a:xfrm>
-            <a:off x="8823960" y="2606040"/>
-            <a:ext cx="548640" cy="548640"/>
-          </a:xfrm>
-          <a:prstGeom prst="ellipse">
-            <a:avLst/>
-          </a:prstGeom>
-          <a:solidFill>
-            <a:srgbClr val="B9852F"/>
-          </a:solidFill>
-          <a:ln/>
-        </p:spPr>
-      </p:sp>
-      <p:sp>
-        <p:nvSpPr>
-          <p:cNvPr id="14" name="Text 12"/>
-          <p:cNvSpPr/>
-          <p:nvPr/>
-        </p:nvSpPr>
-        <p:spPr>
-          <a:xfrm>
-            <a:off x="8778240" y="3383280"/>
-            <a:ext cx="2651760" cy="548640"/>
-          </a:xfrm>
-          <a:prstGeom prst="rect">
-            <a:avLst/>
-          </a:prstGeom>
-          <a:noFill/>
-          <a:ln/>
-        </p:spPr>
-        <p:txBody>
-          <a:bodyPr wrap="square" rtlCol="0" anchor="ctr"/>
-          <a:lstStyle/>
-          <a:p>
-            <a:pPr indent="0" marL="0">
-              <a:buNone/>
-            </a:pPr>
-            <a:r>
-              <a:rPr lang="en-US" sz="2100" b="1" dirty="0">
-                <a:solidFill>
-                  <a:srgbClr val="1A1A1A"/>
-                </a:solidFill>
-                <a:latin typeface="Cambria" pitchFamily="34" charset="0"/>
-                <a:ea typeface="Cambria" pitchFamily="34" charset="-122"/>
-                <a:cs typeface="Cambria" pitchFamily="34" charset="-120"/>
-              </a:rPr>
-              <a:t>Discussion</a:t>
-            </a:r>
-            <a:endParaRPr lang="en-US" sz="2100" dirty="0"/>
-          </a:p>
-        </p:txBody>
-      </p:sp>
-      <p:sp>
-        <p:nvSpPr>
-          <p:cNvPr id="15" name="Text 13"/>
-          <p:cNvSpPr/>
-          <p:nvPr/>
-        </p:nvSpPr>
-        <p:spPr>
-          <a:xfrm>
-            <a:off x="8778240" y="3977640"/>
-            <a:ext cx="2651760" cy="1371600"/>
-          </a:xfrm>
-          <a:prstGeom prst="rect">
-            <a:avLst/>
-          </a:prstGeom>
-          <a:noFill/>
-          <a:ln/>
-        </p:spPr>
-        <p:txBody>
-          <a:bodyPr wrap="square" rtlCol="0" anchor="t">
-            <a:spAutoFit/>
-          </a:bodyPr>
-          <a:lstStyle/>
-          <a:p>
-            <a:pPr indent="0" marL="0">
-              <a:lnSpc>
-                <a:spcPct val="115000"/>
-              </a:lnSpc>
-              <a:buNone/>
-            </a:pPr>
-            <a:r>
-              <a:rPr lang="en-US" sz="1500" dirty="0">
-                <a:solidFill>
-                  <a:srgbClr val="1A1A1A"/>
-                </a:solidFill>
-                <a:latin typeface="Calibri" pitchFamily="34" charset="0"/>
-                <a:ea typeface="Calibri" pitchFamily="34" charset="-122"/>
-                <a:cs typeface="Calibri" pitchFamily="34" charset="-120"/>
-              </a:rPr>
-              <a:t>Interrogate the study, debate it, or critique each other's work.</a:t>
-            </a:r>
-            <a:endParaRPr lang="en-US" sz="1500" dirty="0"/>
+              <a:t>The honesty you demanded of published work all term, turned on yourself. (Data Feminism's practice, run quietly all course.)</a:t>
+            </a:r>
+            <a:endParaRPr lang="en-US" sz="1650" dirty="0"/>
           </a:p>
         </p:txBody>
       </p:sp>
@@ -5295,7 +5858,7 @@
         </p:nvSpPr>
         <p:spPr>
           <a:xfrm>
-            <a:off x="640080" y="640080"/>
+            <a:off x="640080" y="731520"/>
             <a:ext cx="10058400" cy="731520"/>
           </a:xfrm>
           <a:prstGeom prst="rect">
@@ -5320,7 +5883,7 @@
                 <a:ea typeface="Cambria" pitchFamily="34" charset="-122"/>
                 <a:cs typeface="Cambria" pitchFamily="34" charset="-120"/>
               </a:rPr>
-              <a:t>The session</a:t>
+              <a:t>Three modes today</a:t>
             </a:r>
             <a:endParaRPr lang="en-US" sz="3000" dirty="0"/>
           </a:p>
@@ -5328,36 +5891,14 @@
       </p:sp>
       <p:sp>
         <p:nvSpPr>
-          <p:cNvPr id="3" name="Shape 1"/>
-          <p:cNvSpPr/>
-          <p:nvPr/>
-        </p:nvSpPr>
-        <p:spPr>
-          <a:xfrm>
-            <a:off x="640080" y="1572768"/>
-            <a:ext cx="868680" cy="457200"/>
-          </a:xfrm>
-          <a:prstGeom prst="roundRect">
-            <a:avLst>
-              <a:gd name="adj" fmla="val 12000"/>
-            </a:avLst>
-          </a:prstGeom>
-          <a:solidFill>
-            <a:srgbClr val="7A3B2E"/>
-          </a:solidFill>
-          <a:ln/>
-        </p:spPr>
-      </p:sp>
-      <p:sp>
-        <p:nvSpPr>
-          <p:cNvPr id="4" name="Text 2"/>
-          <p:cNvSpPr/>
-          <p:nvPr/>
-        </p:nvSpPr>
-        <p:spPr>
-          <a:xfrm>
-            <a:off x="640080" y="1572768"/>
-            <a:ext cx="868680" cy="457200"/>
+          <p:cNvPr id="3" name="Text 1"/>
+          <p:cNvSpPr/>
+          <p:nvPr/>
+        </p:nvSpPr>
+        <p:spPr>
+          <a:xfrm>
+            <a:off x="640080" y="1417320"/>
+            <a:ext cx="10058400" cy="365760"/>
           </a:xfrm>
           <a:prstGeom prst="rect">
             <a:avLst/>
@@ -5369,52 +5910,136 @@
           <a:bodyPr wrap="square" rtlCol="0" anchor="ctr"/>
           <a:lstStyle/>
           <a:p>
-            <a:pPr algn="ctr" indent="0" marL="0">
-              <a:buNone/>
-            </a:pPr>
-            <a:r>
-              <a:rPr lang="en-US" sz="1100" b="1" dirty="0">
-                <a:solidFill>
-                  <a:srgbClr val="FFFFFF"/>
+            <a:pPr indent="0" marL="0">
+              <a:buNone/>
+            </a:pPr>
+            <a:r>
+              <a:rPr lang="en-US" sz="1400" i="1" dirty="0">
+                <a:solidFill>
+                  <a:srgbClr val="6B6B63"/>
                 </a:solidFill>
                 <a:latin typeface="Calibri" pitchFamily="34" charset="0"/>
                 <a:ea typeface="Calibri" pitchFamily="34" charset="-122"/>
                 <a:cs typeface="Calibri" pitchFamily="34" charset="-120"/>
               </a:rPr>
-              <a:t>0:00</a:t>
-            </a:r>
-            <a:endParaRPr lang="en-US" sz="1100" dirty="0"/>
-          </a:p>
-        </p:txBody>
-      </p:sp>
-      <p:sp>
-        <p:nvSpPr>
-          <p:cNvPr id="5" name="Text 3"/>
-          <p:cNvSpPr/>
-          <p:nvPr/>
-        </p:nvSpPr>
-        <p:spPr>
-          <a:xfrm>
-            <a:off x="1691640" y="1554480"/>
-            <a:ext cx="9646920" cy="566928"/>
-          </a:xfrm>
-          <a:prstGeom prst="rect">
-            <a:avLst/>
-          </a:prstGeom>
-          <a:noFill/>
-          <a:ln/>
-        </p:spPr>
-        <p:txBody>
-          <a:bodyPr wrap="square" rtlCol="0" anchor="ctr">
+              <a:t>about a third of the session each</a:t>
+            </a:r>
+            <a:endParaRPr lang="en-US" sz="1400" dirty="0"/>
+          </a:p>
+        </p:txBody>
+      </p:sp>
+      <p:sp>
+        <p:nvSpPr>
+          <p:cNvPr id="4" name="Shape 2"/>
+          <p:cNvSpPr/>
+          <p:nvPr/>
+        </p:nvSpPr>
+        <p:spPr>
+          <a:xfrm>
+            <a:off x="640080" y="2194560"/>
+            <a:ext cx="3383280" cy="3291840"/>
+          </a:xfrm>
+          <a:prstGeom prst="roundRect">
+            <a:avLst>
+              <a:gd name="adj" fmla="val 3333"/>
+            </a:avLst>
+          </a:prstGeom>
+          <a:solidFill>
+            <a:srgbClr val="F4EEE8"/>
+          </a:solidFill>
+          <a:ln/>
+        </p:spPr>
+      </p:sp>
+      <p:sp>
+        <p:nvSpPr>
+          <p:cNvPr id="5" name="Shape 3"/>
+          <p:cNvSpPr/>
+          <p:nvPr/>
+        </p:nvSpPr>
+        <p:spPr>
+          <a:xfrm>
+            <a:off x="1051560" y="2606040"/>
+            <a:ext cx="548640" cy="548640"/>
+          </a:xfrm>
+          <a:prstGeom prst="ellipse">
+            <a:avLst/>
+          </a:prstGeom>
+          <a:solidFill>
+            <a:srgbClr val="7A3B2E"/>
+          </a:solidFill>
+          <a:ln/>
+        </p:spPr>
+      </p:sp>
+      <p:sp>
+        <p:nvSpPr>
+          <p:cNvPr id="6" name="Text 4"/>
+          <p:cNvSpPr/>
+          <p:nvPr/>
+        </p:nvSpPr>
+        <p:spPr>
+          <a:xfrm>
+            <a:off x="1005840" y="3383280"/>
+            <a:ext cx="2651760" cy="548640"/>
+          </a:xfrm>
+          <a:prstGeom prst="rect">
+            <a:avLst/>
+          </a:prstGeom>
+          <a:noFill/>
+          <a:ln/>
+        </p:spPr>
+        <p:txBody>
+          <a:bodyPr wrap="square" rtlCol="0" anchor="ctr"/>
+          <a:lstStyle/>
+          <a:p>
+            <a:pPr indent="0" marL="0">
+              <a:buNone/>
+            </a:pPr>
+            <a:r>
+              <a:rPr lang="en-US" sz="2100" b="1" dirty="0">
+                <a:solidFill>
+                  <a:srgbClr val="1A1A1A"/>
+                </a:solidFill>
+                <a:latin typeface="Cambria" pitchFamily="34" charset="0"/>
+                <a:ea typeface="Cambria" pitchFamily="34" charset="-122"/>
+                <a:cs typeface="Cambria" pitchFamily="34" charset="-120"/>
+              </a:rPr>
+              <a:t>Lecture / demo</a:t>
+            </a:r>
+            <a:endParaRPr lang="en-US" sz="2100" dirty="0"/>
+          </a:p>
+        </p:txBody>
+      </p:sp>
+      <p:sp>
+        <p:nvSpPr>
+          <p:cNvPr id="7" name="Text 5"/>
+          <p:cNvSpPr/>
+          <p:nvPr/>
+        </p:nvSpPr>
+        <p:spPr>
+          <a:xfrm>
+            <a:off x="1005840" y="3977640"/>
+            <a:ext cx="2651760" cy="1371600"/>
+          </a:xfrm>
+          <a:prstGeom prst="rect">
+            <a:avLst/>
+          </a:prstGeom>
+          <a:noFill/>
+          <a:ln/>
+        </p:spPr>
+        <p:txBody>
+          <a:bodyPr wrap="square" rtlCol="0" anchor="t">
             <a:spAutoFit/>
           </a:bodyPr>
           <a:lstStyle/>
           <a:p>
             <a:pPr indent="0" marL="0">
-              <a:buNone/>
-            </a:pPr>
-            <a:r>
-              <a:rPr lang="en-US" sz="1250" dirty="0">
+              <a:lnSpc>
+                <a:spcPct val="115000"/>
+              </a:lnSpc>
+              <a:buNone/>
+            </a:pPr>
+            <a:r>
+              <a:rPr lang="en-US" sz="1500" dirty="0">
                 <a:solidFill>
                   <a:srgbClr val="1A1A1A"/>
                 </a:solidFill>
@@ -5422,44 +6047,64 @@
                 <a:ea typeface="Calibri" pitchFamily="34" charset="-122"/>
                 <a:cs typeface="Calibri" pitchFamily="34" charset="-120"/>
               </a:rPr>
-              <a:t>Warm-up + Look at This: TimeCapsuleLLM and "Speak, Memory," screenshots ready. (These period models, and supplements like MonadGPT and MacBERTh, live on Hugging Face, where you can download and run open models, or fine-tune your own.)</a:t>
-            </a:r>
-            <a:endParaRPr lang="en-US" sz="1250" dirty="0"/>
-          </a:p>
-        </p:txBody>
-      </p:sp>
-      <p:sp>
-        <p:nvSpPr>
-          <p:cNvPr id="6" name="Shape 4"/>
-          <p:cNvSpPr/>
-          <p:nvPr/>
-        </p:nvSpPr>
-        <p:spPr>
-          <a:xfrm>
-            <a:off x="640080" y="2139696"/>
-            <a:ext cx="868680" cy="457200"/>
+              <a:t>What a trained model is: a compression of its corpus</a:t>
+            </a:r>
+            <a:endParaRPr lang="en-US" sz="1500" dirty="0"/>
+          </a:p>
+        </p:txBody>
+      </p:sp>
+      <p:sp>
+        <p:nvSpPr>
+          <p:cNvPr id="8" name="Shape 6"/>
+          <p:cNvSpPr/>
+          <p:nvPr/>
+        </p:nvSpPr>
+        <p:spPr>
+          <a:xfrm>
+            <a:off x="4526280" y="2194560"/>
+            <a:ext cx="3383280" cy="3291840"/>
           </a:xfrm>
           <a:prstGeom prst="roundRect">
             <a:avLst>
-              <a:gd name="adj" fmla="val 12000"/>
+              <a:gd name="adj" fmla="val 3333"/>
             </a:avLst>
           </a:prstGeom>
           <a:solidFill>
-            <a:srgbClr val="7A3B2E"/>
-          </a:solidFill>
-          <a:ln/>
-        </p:spPr>
-      </p:sp>
-      <p:sp>
-        <p:nvSpPr>
-          <p:cNvPr id="7" name="Text 5"/>
-          <p:cNvSpPr/>
-          <p:nvPr/>
-        </p:nvSpPr>
-        <p:spPr>
-          <a:xfrm>
-            <a:off x="640080" y="2139696"/>
-            <a:ext cx="868680" cy="457200"/>
+            <a:srgbClr val="F4EEE8"/>
+          </a:solidFill>
+          <a:ln/>
+        </p:spPr>
+      </p:sp>
+      <p:sp>
+        <p:nvSpPr>
+          <p:cNvPr id="9" name="Shape 7"/>
+          <p:cNvSpPr/>
+          <p:nvPr/>
+        </p:nvSpPr>
+        <p:spPr>
+          <a:xfrm>
+            <a:off x="4937760" y="2606040"/>
+            <a:ext cx="548640" cy="548640"/>
+          </a:xfrm>
+          <a:prstGeom prst="ellipse">
+            <a:avLst/>
+          </a:prstGeom>
+          <a:solidFill>
+            <a:srgbClr val="3F6F5F"/>
+          </a:solidFill>
+          <a:ln/>
+        </p:spPr>
+      </p:sp>
+      <p:sp>
+        <p:nvSpPr>
+          <p:cNvPr id="10" name="Text 8"/>
+          <p:cNvSpPr/>
+          <p:nvPr/>
+        </p:nvSpPr>
+        <p:spPr>
+          <a:xfrm>
+            <a:off x="4892040" y="3383280"/>
+            <a:ext cx="2651760" cy="548640"/>
           </a:xfrm>
           <a:prstGeom prst="rect">
             <a:avLst/>
@@ -5471,52 +6116,180 @@
           <a:bodyPr wrap="square" rtlCol="0" anchor="ctr"/>
           <a:lstStyle/>
           <a:p>
-            <a:pPr algn="ctr" indent="0" marL="0">
-              <a:buNone/>
-            </a:pPr>
-            <a:r>
-              <a:rPr lang="en-US" sz="1100" b="1" dirty="0">
-                <a:solidFill>
-                  <a:srgbClr val="FFFFFF"/>
+            <a:pPr indent="0" marL="0">
+              <a:buNone/>
+            </a:pPr>
+            <a:r>
+              <a:rPr lang="en-US" sz="2100" b="1" dirty="0">
+                <a:solidFill>
+                  <a:srgbClr val="1A1A1A"/>
+                </a:solidFill>
+                <a:latin typeface="Cambria" pitchFamily="34" charset="0"/>
+                <a:ea typeface="Cambria" pitchFamily="34" charset="-122"/>
+                <a:cs typeface="Cambria" pitchFamily="34" charset="-120"/>
+              </a:rPr>
+              <a:t>Workshop</a:t>
+            </a:r>
+            <a:endParaRPr lang="en-US" sz="2100" dirty="0"/>
+          </a:p>
+        </p:txBody>
+      </p:sp>
+      <p:sp>
+        <p:nvSpPr>
+          <p:cNvPr id="11" name="Text 9"/>
+          <p:cNvSpPr/>
+          <p:nvPr/>
+        </p:nvSpPr>
+        <p:spPr>
+          <a:xfrm>
+            <a:off x="4892040" y="3977640"/>
+            <a:ext cx="2651760" cy="1371600"/>
+          </a:xfrm>
+          <a:prstGeom prst="rect">
+            <a:avLst/>
+          </a:prstGeom>
+          <a:noFill/>
+          <a:ln/>
+        </p:spPr>
+        <p:txBody>
+          <a:bodyPr wrap="square" rtlCol="0" anchor="t">
+            <a:spAutoFit/>
+          </a:bodyPr>
+          <a:lstStyle/>
+          <a:p>
+            <a:pPr indent="0" marL="0">
+              <a:lnSpc>
+                <a:spcPct val="115000"/>
+              </a:lnSpc>
+              <a:buNone/>
+            </a:pPr>
+            <a:r>
+              <a:rPr lang="en-US" sz="1500" dirty="0">
+                <a:solidFill>
+                  <a:srgbClr val="1A1A1A"/>
                 </a:solidFill>
                 <a:latin typeface="Calibri" pitchFamily="34" charset="0"/>
                 <a:ea typeface="Calibri" pitchFamily="34" charset="-122"/>
                 <a:cs typeface="Calibri" pitchFamily="34" charset="-120"/>
               </a:rPr>
-              <a:t>0:07</a:t>
-            </a:r>
-            <a:endParaRPr lang="en-US" sz="1100" dirty="0"/>
-          </a:p>
-        </p:txBody>
-      </p:sp>
-      <p:sp>
-        <p:nvSpPr>
-          <p:cNvPr id="8" name="Text 6"/>
-          <p:cNvSpPr/>
-          <p:nvPr/>
-        </p:nvSpPr>
-        <p:spPr>
-          <a:xfrm>
-            <a:off x="1691640" y="2121408"/>
-            <a:ext cx="9646920" cy="566928"/>
-          </a:xfrm>
-          <a:prstGeom prst="rect">
-            <a:avLst/>
-          </a:prstGeom>
-          <a:noFill/>
-          <a:ln/>
-        </p:spPr>
-        <p:txBody>
-          <a:bodyPr wrap="square" rtlCol="0" anchor="ctr">
+              <a:t>Build hands-on on your own data.</a:t>
+            </a:r>
+            <a:endParaRPr lang="en-US" sz="1500" dirty="0"/>
+          </a:p>
+        </p:txBody>
+      </p:sp>
+      <p:sp>
+        <p:nvSpPr>
+          <p:cNvPr id="12" name="Shape 10"/>
+          <p:cNvSpPr/>
+          <p:nvPr/>
+        </p:nvSpPr>
+        <p:spPr>
+          <a:xfrm>
+            <a:off x="8412480" y="2194560"/>
+            <a:ext cx="3383280" cy="3291840"/>
+          </a:xfrm>
+          <a:prstGeom prst="roundRect">
+            <a:avLst>
+              <a:gd name="adj" fmla="val 3333"/>
+            </a:avLst>
+          </a:prstGeom>
+          <a:solidFill>
+            <a:srgbClr val="F4EEE8"/>
+          </a:solidFill>
+          <a:ln/>
+        </p:spPr>
+      </p:sp>
+      <p:sp>
+        <p:nvSpPr>
+          <p:cNvPr id="13" name="Shape 11"/>
+          <p:cNvSpPr/>
+          <p:nvPr/>
+        </p:nvSpPr>
+        <p:spPr>
+          <a:xfrm>
+            <a:off x="8823960" y="2606040"/>
+            <a:ext cx="548640" cy="548640"/>
+          </a:xfrm>
+          <a:prstGeom prst="ellipse">
+            <a:avLst/>
+          </a:prstGeom>
+          <a:solidFill>
+            <a:srgbClr val="B9852F"/>
+          </a:solidFill>
+          <a:ln/>
+        </p:spPr>
+      </p:sp>
+      <p:sp>
+        <p:nvSpPr>
+          <p:cNvPr id="14" name="Text 12"/>
+          <p:cNvSpPr/>
+          <p:nvPr/>
+        </p:nvSpPr>
+        <p:spPr>
+          <a:xfrm>
+            <a:off x="8778240" y="3383280"/>
+            <a:ext cx="2651760" cy="548640"/>
+          </a:xfrm>
+          <a:prstGeom prst="rect">
+            <a:avLst/>
+          </a:prstGeom>
+          <a:noFill/>
+          <a:ln/>
+        </p:spPr>
+        <p:txBody>
+          <a:bodyPr wrap="square" rtlCol="0" anchor="ctr"/>
+          <a:lstStyle/>
+          <a:p>
+            <a:pPr indent="0" marL="0">
+              <a:buNone/>
+            </a:pPr>
+            <a:r>
+              <a:rPr lang="en-US" sz="2100" b="1" dirty="0">
+                <a:solidFill>
+                  <a:srgbClr val="1A1A1A"/>
+                </a:solidFill>
+                <a:latin typeface="Cambria" pitchFamily="34" charset="0"/>
+                <a:ea typeface="Cambria" pitchFamily="34" charset="-122"/>
+                <a:cs typeface="Cambria" pitchFamily="34" charset="-120"/>
+              </a:rPr>
+              <a:t>Discussion</a:t>
+            </a:r>
+            <a:endParaRPr lang="en-US" sz="2100" dirty="0"/>
+          </a:p>
+        </p:txBody>
+      </p:sp>
+      <p:sp>
+        <p:nvSpPr>
+          <p:cNvPr id="15" name="Text 13"/>
+          <p:cNvSpPr/>
+          <p:nvPr/>
+        </p:nvSpPr>
+        <p:spPr>
+          <a:xfrm>
+            <a:off x="8778240" y="3977640"/>
+            <a:ext cx="2651760" cy="1371600"/>
+          </a:xfrm>
+          <a:prstGeom prst="rect">
+            <a:avLst/>
+          </a:prstGeom>
+          <a:noFill/>
+          <a:ln/>
+        </p:spPr>
+        <p:txBody>
+          <a:bodyPr wrap="square" rtlCol="0" anchor="t">
             <a:spAutoFit/>
           </a:bodyPr>
           <a:lstStyle/>
           <a:p>
             <a:pPr indent="0" marL="0">
-              <a:buNone/>
-            </a:pPr>
-            <a:r>
-              <a:rPr lang="en-US" sz="1250" dirty="0">
+              <a:lnSpc>
+                <a:spcPct val="115000"/>
+              </a:lnSpc>
+              <a:buNone/>
+            </a:pPr>
+            <a:r>
+              <a:rPr lang="en-US" sz="1500" dirty="0">
                 <a:solidFill>
                   <a:srgbClr val="1A1A1A"/>
                 </a:solidFill>
@@ -5524,417 +6297,9 @@
                 <a:ea typeface="Calibri" pitchFamily="34" charset="-122"/>
                 <a:cs typeface="Calibri" pitchFamily="34" charset="-120"/>
               </a:rPr>
-              <a:t>Stress-test the finding, one continuous arc on your own results: shuffle the labels and re-run; split the corpus in half; ask "compared to what?". Then compress whatever survived into one headline sentence.</a:t>
-            </a:r>
-            <a:endParaRPr lang="en-US" sz="1250" dirty="0"/>
-          </a:p>
-        </p:txBody>
-      </p:sp>
-      <p:sp>
-        <p:nvSpPr>
-          <p:cNvPr id="9" name="Shape 7"/>
-          <p:cNvSpPr/>
-          <p:nvPr/>
-        </p:nvSpPr>
-        <p:spPr>
-          <a:xfrm>
-            <a:off x="640080" y="2706624"/>
-            <a:ext cx="868680" cy="457200"/>
-          </a:xfrm>
-          <a:prstGeom prst="roundRect">
-            <a:avLst>
-              <a:gd name="adj" fmla="val 12000"/>
-            </a:avLst>
-          </a:prstGeom>
-          <a:solidFill>
-            <a:srgbClr val="7A3B2E"/>
-          </a:solidFill>
-          <a:ln/>
-        </p:spPr>
-      </p:sp>
-      <p:sp>
-        <p:nvSpPr>
-          <p:cNvPr id="10" name="Text 8"/>
-          <p:cNvSpPr/>
-          <p:nvPr/>
-        </p:nvSpPr>
-        <p:spPr>
-          <a:xfrm>
-            <a:off x="640080" y="2706624"/>
-            <a:ext cx="868680" cy="457200"/>
-          </a:xfrm>
-          <a:prstGeom prst="rect">
-            <a:avLst/>
-          </a:prstGeom>
-          <a:noFill/>
-          <a:ln/>
-        </p:spPr>
-        <p:txBody>
-          <a:bodyPr wrap="square" rtlCol="0" anchor="ctr"/>
-          <a:lstStyle/>
-          <a:p>
-            <a:pPr algn="ctr" indent="0" marL="0">
-              <a:buNone/>
-            </a:pPr>
-            <a:r>
-              <a:rPr lang="en-US" sz="1100" b="1" dirty="0">
-                <a:solidFill>
-                  <a:srgbClr val="FFFFFF"/>
-                </a:solidFill>
-                <a:latin typeface="Calibri" pitchFamily="34" charset="0"/>
-                <a:ea typeface="Calibri" pitchFamily="34" charset="-122"/>
-                <a:cs typeface="Calibri" pitchFamily="34" charset="-120"/>
-              </a:rPr>
-              <a:t>0:52</a:t>
-            </a:r>
-            <a:endParaRPr lang="en-US" sz="1100" dirty="0"/>
-          </a:p>
-        </p:txBody>
-      </p:sp>
-      <p:sp>
-        <p:nvSpPr>
-          <p:cNvPr id="11" name="Text 9"/>
-          <p:cNvSpPr/>
-          <p:nvPr/>
-        </p:nvSpPr>
-        <p:spPr>
-          <a:xfrm>
-            <a:off x="1691640" y="2688336"/>
-            <a:ext cx="9646920" cy="566928"/>
-          </a:xfrm>
-          <a:prstGeom prst="rect">
-            <a:avLst/>
-          </a:prstGeom>
-          <a:noFill/>
-          <a:ln/>
-        </p:spPr>
-        <p:txBody>
-          <a:bodyPr wrap="square" rtlCol="0" anchor="ctr">
-            <a:spAutoFit/>
-          </a:bodyPr>
-          <a:lstStyle/>
-          <a:p>
-            <a:pPr indent="0" marL="0">
-              <a:buNone/>
-            </a:pPr>
-            <a:r>
-              <a:rPr lang="en-US" sz="1250" dirty="0">
-                <a:solidFill>
-                  <a:srgbClr val="1A1A1A"/>
-                </a:solidFill>
-                <a:latin typeface="Calibri" pitchFamily="34" charset="0"/>
-                <a:ea typeface="Calibri" pitchFamily="34" charset="-122"/>
-                <a:cs typeface="Calibri" pitchFamily="34" charset="-120"/>
-              </a:rPr>
-              <a:t>Break</a:t>
-            </a:r>
-            <a:endParaRPr lang="en-US" sz="1250" dirty="0"/>
-          </a:p>
-        </p:txBody>
-      </p:sp>
-      <p:sp>
-        <p:nvSpPr>
-          <p:cNvPr id="12" name="Shape 10"/>
-          <p:cNvSpPr/>
-          <p:nvPr/>
-        </p:nvSpPr>
-        <p:spPr>
-          <a:xfrm>
-            <a:off x="640080" y="3273552"/>
-            <a:ext cx="868680" cy="457200"/>
-          </a:xfrm>
-          <a:prstGeom prst="roundRect">
-            <a:avLst>
-              <a:gd name="adj" fmla="val 12000"/>
-            </a:avLst>
-          </a:prstGeom>
-          <a:solidFill>
-            <a:srgbClr val="7A3B2E"/>
-          </a:solidFill>
-          <a:ln/>
-        </p:spPr>
-      </p:sp>
-      <p:sp>
-        <p:nvSpPr>
-          <p:cNvPr id="13" name="Text 11"/>
-          <p:cNvSpPr/>
-          <p:nvPr/>
-        </p:nvSpPr>
-        <p:spPr>
-          <a:xfrm>
-            <a:off x="640080" y="3273552"/>
-            <a:ext cx="868680" cy="457200"/>
-          </a:xfrm>
-          <a:prstGeom prst="rect">
-            <a:avLst/>
-          </a:prstGeom>
-          <a:noFill/>
-          <a:ln/>
-        </p:spPr>
-        <p:txBody>
-          <a:bodyPr wrap="square" rtlCol="0" anchor="ctr"/>
-          <a:lstStyle/>
-          <a:p>
-            <a:pPr algn="ctr" indent="0" marL="0">
-              <a:buNone/>
-            </a:pPr>
-            <a:r>
-              <a:rPr lang="en-US" sz="1100" b="1" dirty="0">
-                <a:solidFill>
-                  <a:srgbClr val="FFFFFF"/>
-                </a:solidFill>
-                <a:latin typeface="Calibri" pitchFamily="34" charset="0"/>
-                <a:ea typeface="Calibri" pitchFamily="34" charset="-122"/>
-                <a:cs typeface="Calibri" pitchFamily="34" charset="-120"/>
-              </a:rPr>
-              <a:t>1:02</a:t>
-            </a:r>
-            <a:endParaRPr lang="en-US" sz="1100" dirty="0"/>
-          </a:p>
-        </p:txBody>
-      </p:sp>
-      <p:sp>
-        <p:nvSpPr>
-          <p:cNvPr id="14" name="Text 12"/>
-          <p:cNvSpPr/>
-          <p:nvPr/>
-        </p:nvSpPr>
-        <p:spPr>
-          <a:xfrm>
-            <a:off x="1691640" y="3255264"/>
-            <a:ext cx="9646920" cy="566928"/>
-          </a:xfrm>
-          <a:prstGeom prst="rect">
-            <a:avLst/>
-          </a:prstGeom>
-          <a:noFill/>
-          <a:ln/>
-        </p:spPr>
-        <p:txBody>
-          <a:bodyPr wrap="square" rtlCol="0" anchor="ctr">
-            <a:spAutoFit/>
-          </a:bodyPr>
-          <a:lstStyle/>
-          <a:p>
-            <a:pPr indent="0" marL="0">
-              <a:buNone/>
-            </a:pPr>
-            <a:r>
-              <a:rPr lang="en-US" sz="1250" dirty="0">
-                <a:solidFill>
-                  <a:srgbClr val="1A1A1A"/>
-                </a:solidFill>
-                <a:latin typeface="Calibri" pitchFamily="34" charset="0"/>
-                <a:ea typeface="Calibri" pitchFamily="34" charset="-122"/>
-                <a:cs typeface="Calibri" pitchFamily="34" charset="-120"/>
-              </a:rPr>
-              <a:t>Gemini-free writing block: write your one-sentence interpretation yourself.</a:t>
-            </a:r>
-            <a:endParaRPr lang="en-US" sz="1250" dirty="0"/>
-          </a:p>
-        </p:txBody>
-      </p:sp>
-      <p:sp>
-        <p:nvSpPr>
-          <p:cNvPr id="15" name="Shape 13"/>
-          <p:cNvSpPr/>
-          <p:nvPr/>
-        </p:nvSpPr>
-        <p:spPr>
-          <a:xfrm>
-            <a:off x="640080" y="3840480"/>
-            <a:ext cx="868680" cy="457200"/>
-          </a:xfrm>
-          <a:prstGeom prst="roundRect">
-            <a:avLst>
-              <a:gd name="adj" fmla="val 12000"/>
-            </a:avLst>
-          </a:prstGeom>
-          <a:solidFill>
-            <a:srgbClr val="7A3B2E"/>
-          </a:solidFill>
-          <a:ln/>
-        </p:spPr>
-      </p:sp>
-      <p:sp>
-        <p:nvSpPr>
-          <p:cNvPr id="16" name="Text 14"/>
-          <p:cNvSpPr/>
-          <p:nvPr/>
-        </p:nvSpPr>
-        <p:spPr>
-          <a:xfrm>
-            <a:off x="640080" y="3840480"/>
-            <a:ext cx="868680" cy="457200"/>
-          </a:xfrm>
-          <a:prstGeom prst="rect">
-            <a:avLst/>
-          </a:prstGeom>
-          <a:noFill/>
-          <a:ln/>
-        </p:spPr>
-        <p:txBody>
-          <a:bodyPr wrap="square" rtlCol="0" anchor="ctr"/>
-          <a:lstStyle/>
-          <a:p>
-            <a:pPr algn="ctr" indent="0" marL="0">
-              <a:buNone/>
-            </a:pPr>
-            <a:r>
-              <a:rPr lang="en-US" sz="1100" b="1" dirty="0">
-                <a:solidFill>
-                  <a:srgbClr val="FFFFFF"/>
-                </a:solidFill>
-                <a:latin typeface="Calibri" pitchFamily="34" charset="0"/>
-                <a:ea typeface="Calibri" pitchFamily="34" charset="-122"/>
-                <a:cs typeface="Calibri" pitchFamily="34" charset="-120"/>
-              </a:rPr>
-              <a:t>1:22</a:t>
-            </a:r>
-            <a:endParaRPr lang="en-US" sz="1100" dirty="0"/>
-          </a:p>
-        </p:txBody>
-      </p:sp>
-      <p:sp>
-        <p:nvSpPr>
-          <p:cNvPr id="17" name="Text 15"/>
-          <p:cNvSpPr/>
-          <p:nvPr/>
-        </p:nvSpPr>
-        <p:spPr>
-          <a:xfrm>
-            <a:off x="1691640" y="3822192"/>
-            <a:ext cx="9646920" cy="566928"/>
-          </a:xfrm>
-          <a:prstGeom prst="rect">
-            <a:avLst/>
-          </a:prstGeom>
-          <a:noFill/>
-          <a:ln/>
-        </p:spPr>
-        <p:txBody>
-          <a:bodyPr wrap="square" rtlCol="0" anchor="ctr">
-            <a:spAutoFit/>
-          </a:bodyPr>
-          <a:lstStyle/>
-          <a:p>
-            <a:pPr indent="0" marL="0">
-              <a:buNone/>
-            </a:pPr>
-            <a:r>
-              <a:rPr lang="en-US" sz="1250" dirty="0">
-                <a:solidFill>
-                  <a:srgbClr val="1A1A1A"/>
-                </a:solidFill>
-                <a:latin typeface="Calibri" pitchFamily="34" charset="0"/>
-                <a:ea typeface="Calibri" pitchFamily="34" charset="-122"/>
-                <a:cs typeface="Calibri" pitchFamily="34" charset="-120"/>
-              </a:rPr>
-              <a:t>Writing workshop: opening question, what you found, what it does not show, the choices you made. Distill the Data Biography into the corpus note.</a:t>
-            </a:r>
-            <a:endParaRPr lang="en-US" sz="1250" dirty="0"/>
-          </a:p>
-        </p:txBody>
-      </p:sp>
-      <p:sp>
-        <p:nvSpPr>
-          <p:cNvPr id="18" name="Shape 16"/>
-          <p:cNvSpPr/>
-          <p:nvPr/>
-        </p:nvSpPr>
-        <p:spPr>
-          <a:xfrm>
-            <a:off x="640080" y="4407408"/>
-            <a:ext cx="868680" cy="457200"/>
-          </a:xfrm>
-          <a:prstGeom prst="roundRect">
-            <a:avLst>
-              <a:gd name="adj" fmla="val 12000"/>
-            </a:avLst>
-          </a:prstGeom>
-          <a:solidFill>
-            <a:srgbClr val="7A3B2E"/>
-          </a:solidFill>
-          <a:ln/>
-        </p:spPr>
-      </p:sp>
-      <p:sp>
-        <p:nvSpPr>
-          <p:cNvPr id="19" name="Text 17"/>
-          <p:cNvSpPr/>
-          <p:nvPr/>
-        </p:nvSpPr>
-        <p:spPr>
-          <a:xfrm>
-            <a:off x="640080" y="4407408"/>
-            <a:ext cx="868680" cy="457200"/>
-          </a:xfrm>
-          <a:prstGeom prst="rect">
-            <a:avLst/>
-          </a:prstGeom>
-          <a:noFill/>
-          <a:ln/>
-        </p:spPr>
-        <p:txBody>
-          <a:bodyPr wrap="square" rtlCol="0" anchor="ctr"/>
-          <a:lstStyle/>
-          <a:p>
-            <a:pPr algn="ctr" indent="0" marL="0">
-              <a:buNone/>
-            </a:pPr>
-            <a:r>
-              <a:rPr lang="en-US" sz="1100" b="1" dirty="0">
-                <a:solidFill>
-                  <a:srgbClr val="FFFFFF"/>
-                </a:solidFill>
-                <a:latin typeface="Calibri" pitchFamily="34" charset="0"/>
-                <a:ea typeface="Calibri" pitchFamily="34" charset="-122"/>
-                <a:cs typeface="Calibri" pitchFamily="34" charset="-120"/>
-              </a:rPr>
-              <a:t>1:50</a:t>
-            </a:r>
-            <a:endParaRPr lang="en-US" sz="1100" dirty="0"/>
-          </a:p>
-        </p:txBody>
-      </p:sp>
-      <p:sp>
-        <p:nvSpPr>
-          <p:cNvPr id="20" name="Text 18"/>
-          <p:cNvSpPr/>
-          <p:nvPr/>
-        </p:nvSpPr>
-        <p:spPr>
-          <a:xfrm>
-            <a:off x="1691640" y="4389120"/>
-            <a:ext cx="9646920" cy="566928"/>
-          </a:xfrm>
-          <a:prstGeom prst="rect">
-            <a:avLst/>
-          </a:prstGeom>
-          <a:noFill/>
-          <a:ln/>
-        </p:spPr>
-        <p:txBody>
-          <a:bodyPr wrap="square" rtlCol="0" anchor="ctr">
-            <a:spAutoFit/>
-          </a:bodyPr>
-          <a:lstStyle/>
-          <a:p>
-            <a:pPr indent="0" marL="0">
-              <a:buNone/>
-            </a:pPr>
-            <a:r>
-              <a:rPr lang="en-US" sz="1250" dirty="0">
-                <a:solidFill>
-                  <a:srgbClr val="1A1A1A"/>
-                </a:solidFill>
-                <a:latin typeface="Calibri" pitchFamily="34" charset="0"/>
-                <a:ea typeface="Calibri" pitchFamily="34" charset="-122"/>
-                <a:cs typeface="Calibri" pitchFamily="34" charset="-120"/>
-              </a:rPr>
-              <a:t>Check and check-out.</a:t>
-            </a:r>
-            <a:endParaRPr lang="en-US" sz="1250" dirty="0"/>
+              <a:t>Interrogate the study, debate it, or critique each other's work.</a:t>
+            </a:r>
+            <a:endParaRPr lang="en-US" sz="1500" dirty="0"/>
           </a:p>
         </p:txBody>
       </p:sp>
@@ -6003,7 +6368,7 @@
                 <a:ea typeface="Cambria" pitchFamily="34" charset="-122"/>
                 <a:cs typeface="Cambria" pitchFamily="34" charset="-120"/>
               </a:rPr>
-              <a:t>Reading &amp; homework</a:t>
+              <a:t>The session</a:t>
             </a:r>
             <a:endParaRPr lang="en-US" sz="3000" dirty="0"/>
           </a:p>
@@ -6017,11 +6382,13 @@
         </p:nvSpPr>
         <p:spPr>
           <a:xfrm>
-            <a:off x="640080" y="1673352"/>
-            <a:ext cx="219456" cy="219456"/>
-          </a:xfrm>
-          <a:prstGeom prst="ellipse">
-            <a:avLst/>
+            <a:off x="640080" y="1572768"/>
+            <a:ext cx="868680" cy="457200"/>
+          </a:xfrm>
+          <a:prstGeom prst="roundRect">
+            <a:avLst>
+              <a:gd name="adj" fmla="val 12000"/>
+            </a:avLst>
           </a:prstGeom>
           <a:solidFill>
             <a:srgbClr val="7A3B2E"/>
@@ -6037,8 +6404,8 @@
         </p:nvSpPr>
         <p:spPr>
           <a:xfrm>
-            <a:off x="1051560" y="1600200"/>
-            <a:ext cx="10424160" cy="365760"/>
+            <a:off x="640080" y="1572768"/>
+            <a:ext cx="868680" cy="457200"/>
           </a:xfrm>
           <a:prstGeom prst="rect">
             <a:avLst/>
@@ -6050,21 +6417,21 @@
           <a:bodyPr wrap="square" rtlCol="0" anchor="ctr"/>
           <a:lstStyle/>
           <a:p>
-            <a:pPr indent="0" marL="0">
-              <a:buNone/>
-            </a:pPr>
-            <a:r>
-              <a:rPr lang="en-US" sz="1500" b="1" dirty="0">
-                <a:solidFill>
-                  <a:srgbClr val="7A3B2E"/>
+            <a:pPr algn="ctr" indent="0" marL="0">
+              <a:buNone/>
+            </a:pPr>
+            <a:r>
+              <a:rPr lang="en-US" sz="1100" b="1" dirty="0">
+                <a:solidFill>
+                  <a:srgbClr val="FFFFFF"/>
                 </a:solidFill>
                 <a:latin typeface="Calibri" pitchFamily="34" charset="0"/>
                 <a:ea typeface="Calibri" pitchFamily="34" charset="-122"/>
                 <a:cs typeface="Calibri" pitchFamily="34" charset="-120"/>
               </a:rPr>
-              <a:t>Reading</a:t>
-            </a:r>
-            <a:endParaRPr lang="en-US" sz="1500" dirty="0"/>
+              <a:t>0:00</a:t>
+            </a:r>
+            <a:endParaRPr lang="en-US" sz="1100" dirty="0"/>
           </a:p>
         </p:txBody>
       </p:sp>
@@ -6076,17 +6443,17 @@
         </p:nvSpPr>
         <p:spPr>
           <a:xfrm>
-            <a:off x="1051560" y="1984248"/>
-            <a:ext cx="10424160" cy="731520"/>
-          </a:xfrm>
-          <a:prstGeom prst="rect">
-            <a:avLst/>
-          </a:prstGeom>
-          <a:noFill/>
-          <a:ln/>
-        </p:spPr>
-        <p:txBody>
-          <a:bodyPr wrap="square" rtlCol="0" anchor="t">
+            <a:off x="1691640" y="1554480"/>
+            <a:ext cx="9646920" cy="566928"/>
+          </a:xfrm>
+          <a:prstGeom prst="rect">
+            <a:avLst/>
+          </a:prstGeom>
+          <a:noFill/>
+          <a:ln/>
+        </p:spPr>
+        <p:txBody>
+          <a:bodyPr wrap="square" rtlCol="0" anchor="ctr">
             <a:spAutoFit/>
           </a:bodyPr>
           <a:lstStyle/>
@@ -6095,7 +6462,7 @@
               <a:buNone/>
             </a:pPr>
             <a:r>
-              <a:rPr lang="en-US" sz="1400" dirty="0">
+              <a:rPr lang="en-US" sz="1250" dirty="0">
                 <a:solidFill>
                   <a:srgbClr val="1A1A1A"/>
                 </a:solidFill>
@@ -6103,9 +6470,9 @@
                 <a:ea typeface="Calibri" pitchFamily="34" charset="-122"/>
                 <a:cs typeface="Calibri" pitchFamily="34" charset="-120"/>
               </a:rPr>
-              <a:t>Ted Chiang, ChatGPT Is a Blurry JPEG of the Web (2023), the compression idea this week is built on</a:t>
-            </a:r>
-            <a:endParaRPr lang="en-US" sz="1400" dirty="0"/>
+              <a:t>Warm-up + Look at This: TimeCapsuleLLM and "Speak, Memory," screenshots ready. (These period models, and supplements like MonadGPT and MacBERTh, live on Hugging Face, where you can download and run open models, or fine-tune your own.)</a:t>
+            </a:r>
+            <a:endParaRPr lang="en-US" sz="1250" dirty="0"/>
           </a:p>
         </p:txBody>
       </p:sp>
@@ -6117,14 +6484,16 @@
         </p:nvSpPr>
         <p:spPr>
           <a:xfrm>
-            <a:off x="640080" y="2633472"/>
-            <a:ext cx="219456" cy="219456"/>
-          </a:xfrm>
-          <a:prstGeom prst="ellipse">
-            <a:avLst/>
-          </a:prstGeom>
-          <a:solidFill>
-            <a:srgbClr val="3F6F5F"/>
+            <a:off x="640080" y="2139696"/>
+            <a:ext cx="868680" cy="457200"/>
+          </a:xfrm>
+          <a:prstGeom prst="roundRect">
+            <a:avLst>
+              <a:gd name="adj" fmla="val 12000"/>
+            </a:avLst>
+          </a:prstGeom>
+          <a:solidFill>
+            <a:srgbClr val="7A3B2E"/>
           </a:solidFill>
           <a:ln/>
         </p:spPr>
@@ -6137,8 +6506,8 @@
         </p:nvSpPr>
         <p:spPr>
           <a:xfrm>
-            <a:off x="1051560" y="2560320"/>
-            <a:ext cx="10424160" cy="365760"/>
+            <a:off x="640080" y="2139696"/>
+            <a:ext cx="868680" cy="457200"/>
           </a:xfrm>
           <a:prstGeom prst="rect">
             <a:avLst/>
@@ -6150,21 +6519,21 @@
           <a:bodyPr wrap="square" rtlCol="0" anchor="ctr"/>
           <a:lstStyle/>
           <a:p>
-            <a:pPr indent="0" marL="0">
-              <a:buNone/>
-            </a:pPr>
-            <a:r>
-              <a:rPr lang="en-US" sz="1500" b="1" dirty="0">
-                <a:solidFill>
-                  <a:srgbClr val="3F6F5F"/>
+            <a:pPr algn="ctr" indent="0" marL="0">
+              <a:buNone/>
+            </a:pPr>
+            <a:r>
+              <a:rPr lang="en-US" sz="1100" b="1" dirty="0">
+                <a:solidFill>
+                  <a:srgbClr val="FFFFFF"/>
                 </a:solidFill>
                 <a:latin typeface="Calibri" pitchFamily="34" charset="0"/>
                 <a:ea typeface="Calibri" pitchFamily="34" charset="-122"/>
                 <a:cs typeface="Calibri" pitchFamily="34" charset="-120"/>
               </a:rPr>
-              <a:t>Supplement</a:t>
-            </a:r>
-            <a:endParaRPr lang="en-US" sz="1500" dirty="0"/>
+              <a:t>0:07</a:t>
+            </a:r>
+            <a:endParaRPr lang="en-US" sz="1100" dirty="0"/>
           </a:p>
         </p:txBody>
       </p:sp>
@@ -6176,17 +6545,17 @@
         </p:nvSpPr>
         <p:spPr>
           <a:xfrm>
-            <a:off x="1051560" y="2944368"/>
-            <a:ext cx="10424160" cy="731520"/>
-          </a:xfrm>
-          <a:prstGeom prst="rect">
-            <a:avLst/>
-          </a:prstGeom>
-          <a:noFill/>
-          <a:ln/>
-        </p:spPr>
-        <p:txBody>
-          <a:bodyPr wrap="square" rtlCol="0" anchor="t">
+            <a:off x="1691640" y="2121408"/>
+            <a:ext cx="9646920" cy="566928"/>
+          </a:xfrm>
+          <a:prstGeom prst="rect">
+            <a:avLst/>
+          </a:prstGeom>
+          <a:noFill/>
+          <a:ln/>
+        </p:spPr>
+        <p:txBody>
+          <a:bodyPr wrap="square" rtlCol="0" anchor="ctr">
             <a:spAutoFit/>
           </a:bodyPr>
           <a:lstStyle/>
@@ -6195,7 +6564,7 @@
               <a:buNone/>
             </a:pPr>
             <a:r>
-              <a:rPr lang="en-US" sz="1400" dirty="0">
+              <a:rPr lang="en-US" sz="1250" dirty="0">
                 <a:solidFill>
                   <a:srgbClr val="1A1A1A"/>
                 </a:solidFill>
@@ -6203,9 +6572,9 @@
                 <a:ea typeface="Calibri" pitchFamily="34" charset="-122"/>
                 <a:cs typeface="Calibri" pitchFamily="34" charset="-120"/>
               </a:rPr>
-              <a:t>TimeCapsuleLLM and Speak, Memory; period models MonadGPT and MacBERTh</a:t>
-            </a:r>
-            <a:endParaRPr lang="en-US" sz="1400" dirty="0"/>
+              <a:t>Stress-test the finding, one continuous arc on your own results: shuffle the labels and re-run; split the corpus in half; ask "compared to what?". Then compress whatever survived into one headline sentence.</a:t>
+            </a:r>
+            <a:endParaRPr lang="en-US" sz="1250" dirty="0"/>
           </a:p>
         </p:txBody>
       </p:sp>
@@ -6217,14 +6586,16 @@
         </p:nvSpPr>
         <p:spPr>
           <a:xfrm>
-            <a:off x="640080" y="3593592"/>
-            <a:ext cx="219456" cy="219456"/>
-          </a:xfrm>
-          <a:prstGeom prst="ellipse">
-            <a:avLst/>
-          </a:prstGeom>
-          <a:solidFill>
-            <a:srgbClr val="B9852F"/>
+            <a:off x="640080" y="2706624"/>
+            <a:ext cx="868680" cy="457200"/>
+          </a:xfrm>
+          <a:prstGeom prst="roundRect">
+            <a:avLst>
+              <a:gd name="adj" fmla="val 12000"/>
+            </a:avLst>
+          </a:prstGeom>
+          <a:solidFill>
+            <a:srgbClr val="7A3B2E"/>
           </a:solidFill>
           <a:ln/>
         </p:spPr>
@@ -6237,8 +6608,8 @@
         </p:nvSpPr>
         <p:spPr>
           <a:xfrm>
-            <a:off x="1051560" y="3520440"/>
-            <a:ext cx="10424160" cy="365760"/>
+            <a:off x="640080" y="2706624"/>
+            <a:ext cx="868680" cy="457200"/>
           </a:xfrm>
           <a:prstGeom prst="rect">
             <a:avLst/>
@@ -6250,21 +6621,21 @@
           <a:bodyPr wrap="square" rtlCol="0" anchor="ctr"/>
           <a:lstStyle/>
           <a:p>
-            <a:pPr indent="0" marL="0">
-              <a:buNone/>
-            </a:pPr>
-            <a:r>
-              <a:rPr lang="en-US" sz="1500" b="1" dirty="0">
-                <a:solidFill>
-                  <a:srgbClr val="B9852F"/>
+            <a:pPr algn="ctr" indent="0" marL="0">
+              <a:buNone/>
+            </a:pPr>
+            <a:r>
+              <a:rPr lang="en-US" sz="1100" b="1" dirty="0">
+                <a:solidFill>
+                  <a:srgbClr val="FFFFFF"/>
                 </a:solidFill>
                 <a:latin typeface="Calibri" pitchFamily="34" charset="0"/>
                 <a:ea typeface="Calibri" pitchFamily="34" charset="-122"/>
                 <a:cs typeface="Calibri" pitchFamily="34" charset="-120"/>
               </a:rPr>
-              <a:t>Deeper (optional)</a:t>
-            </a:r>
-            <a:endParaRPr lang="en-US" sz="1500" dirty="0"/>
+              <a:t>0:52</a:t>
+            </a:r>
+            <a:endParaRPr lang="en-US" sz="1100" dirty="0"/>
           </a:p>
         </p:txBody>
       </p:sp>
@@ -6276,17 +6647,17 @@
         </p:nvSpPr>
         <p:spPr>
           <a:xfrm>
-            <a:off x="1051560" y="3904488"/>
-            <a:ext cx="10424160" cy="731520"/>
-          </a:xfrm>
-          <a:prstGeom prst="rect">
-            <a:avLst/>
-          </a:prstGeom>
-          <a:noFill/>
-          <a:ln/>
-        </p:spPr>
-        <p:txBody>
-          <a:bodyPr wrap="square" rtlCol="0" anchor="t">
+            <a:off x="1691640" y="2688336"/>
+            <a:ext cx="9646920" cy="566928"/>
+          </a:xfrm>
+          <a:prstGeom prst="rect">
+            <a:avLst/>
+          </a:prstGeom>
+          <a:noFill/>
+          <a:ln/>
+        </p:spPr>
+        <p:txBody>
+          <a:bodyPr wrap="square" rtlCol="0" anchor="ctr">
             <a:spAutoFit/>
           </a:bodyPr>
           <a:lstStyle/>
@@ -6295,7 +6666,7 @@
               <a:buNone/>
             </a:pPr>
             <a:r>
-              <a:rPr lang="en-US" sz="1400" dirty="0">
+              <a:rPr lang="en-US" sz="1250" dirty="0">
                 <a:solidFill>
                   <a:srgbClr val="1A1A1A"/>
                 </a:solidFill>
@@ -6303,9 +6674,9 @@
                 <a:ea typeface="Calibri" pitchFamily="34" charset="-122"/>
                 <a:cs typeface="Calibri" pitchFamily="34" charset="-120"/>
               </a:rPr>
-              <a:t>Da, The Computational Case Against Computational Literary Studies (2019), the field's sharpest critique, read against your own robustness checks</a:t>
-            </a:r>
-            <a:endParaRPr lang="en-US" sz="1400" dirty="0"/>
+              <a:t>Break</a:t>
+            </a:r>
+            <a:endParaRPr lang="en-US" sz="1250" dirty="0"/>
           </a:p>
         </p:txBody>
       </p:sp>
@@ -6317,14 +6688,16 @@
         </p:nvSpPr>
         <p:spPr>
           <a:xfrm>
-            <a:off x="640080" y="4553712"/>
-            <a:ext cx="219456" cy="219456"/>
-          </a:xfrm>
-          <a:prstGeom prst="ellipse">
-            <a:avLst/>
-          </a:prstGeom>
-          <a:solidFill>
-            <a:srgbClr val="3F6F5F"/>
+            <a:off x="640080" y="3273552"/>
+            <a:ext cx="868680" cy="457200"/>
+          </a:xfrm>
+          <a:prstGeom prst="roundRect">
+            <a:avLst>
+              <a:gd name="adj" fmla="val 12000"/>
+            </a:avLst>
+          </a:prstGeom>
+          <a:solidFill>
+            <a:srgbClr val="7A3B2E"/>
           </a:solidFill>
           <a:ln/>
         </p:spPr>
@@ -6337,8 +6710,8 @@
         </p:nvSpPr>
         <p:spPr>
           <a:xfrm>
-            <a:off x="1051560" y="4480560"/>
-            <a:ext cx="10424160" cy="365760"/>
+            <a:off x="640080" y="3273552"/>
+            <a:ext cx="868680" cy="457200"/>
           </a:xfrm>
           <a:prstGeom prst="rect">
             <a:avLst/>
@@ -6350,21 +6723,21 @@
           <a:bodyPr wrap="square" rtlCol="0" anchor="ctr"/>
           <a:lstStyle/>
           <a:p>
-            <a:pPr indent="0" marL="0">
-              <a:buNone/>
-            </a:pPr>
-            <a:r>
-              <a:rPr lang="en-US" sz="1500" b="1" dirty="0">
-                <a:solidFill>
-                  <a:srgbClr val="3F6F5F"/>
+            <a:pPr algn="ctr" indent="0" marL="0">
+              <a:buNone/>
+            </a:pPr>
+            <a:r>
+              <a:rPr lang="en-US" sz="1100" b="1" dirty="0">
+                <a:solidFill>
+                  <a:srgbClr val="FFFFFF"/>
                 </a:solidFill>
                 <a:latin typeface="Calibri" pitchFamily="34" charset="0"/>
                 <a:ea typeface="Calibri" pitchFamily="34" charset="-122"/>
                 <a:cs typeface="Calibri" pitchFamily="34" charset="-120"/>
               </a:rPr>
-              <a:t>Sketch</a:t>
-            </a:r>
-            <a:endParaRPr lang="en-US" sz="1500" dirty="0"/>
+              <a:t>1:02</a:t>
+            </a:r>
+            <a:endParaRPr lang="en-US" sz="1100" dirty="0"/>
           </a:p>
         </p:txBody>
       </p:sp>
@@ -6376,17 +6749,17 @@
         </p:nvSpPr>
         <p:spPr>
           <a:xfrm>
-            <a:off x="1051560" y="4864608"/>
-            <a:ext cx="10424160" cy="731520"/>
-          </a:xfrm>
-          <a:prstGeom prst="rect">
-            <a:avLst/>
-          </a:prstGeom>
-          <a:noFill/>
-          <a:ln/>
-        </p:spPr>
-        <p:txBody>
-          <a:bodyPr wrap="square" rtlCol="0" anchor="t">
+            <a:off x="1691640" y="3255264"/>
+            <a:ext cx="9646920" cy="566928"/>
+          </a:xfrm>
+          <a:prstGeom prst="rect">
+            <a:avLst/>
+          </a:prstGeom>
+          <a:noFill/>
+          <a:ln/>
+        </p:spPr>
+        <p:txBody>
+          <a:bodyPr wrap="square" rtlCol="0" anchor="ctr">
             <a:spAutoFit/>
           </a:bodyPr>
           <a:lstStyle/>
@@ -6395,7 +6768,7 @@
               <a:buNone/>
             </a:pPr>
             <a:r>
-              <a:rPr lang="en-US" sz="1400" dirty="0">
+              <a:rPr lang="en-US" sz="1250" dirty="0">
                 <a:solidFill>
                   <a:srgbClr val="1A1A1A"/>
                 </a:solidFill>
@@ -6403,9 +6776,9 @@
                 <a:ea typeface="Calibri" pitchFamily="34" charset="-122"/>
                 <a:cs typeface="Calibri" pitchFamily="34" charset="-120"/>
               </a:rPr>
-              <a:t>Expand to 600 to 1,000 words; write your show-your-work appendix and which checks survived.</a:t>
-            </a:r>
-            <a:endParaRPr lang="en-US" sz="1400" dirty="0"/>
+              <a:t>Gemini-free writing block: write your one-sentence interpretation yourself.</a:t>
+            </a:r>
+            <a:endParaRPr lang="en-US" sz="1250" dirty="0"/>
           </a:p>
         </p:txBody>
       </p:sp>
@@ -6417,11 +6790,13 @@
         </p:nvSpPr>
         <p:spPr>
           <a:xfrm>
-            <a:off x="640080" y="5513832"/>
-            <a:ext cx="219456" cy="219456"/>
-          </a:xfrm>
-          <a:prstGeom prst="ellipse">
-            <a:avLst/>
+            <a:off x="640080" y="3840480"/>
+            <a:ext cx="868680" cy="457200"/>
+          </a:xfrm>
+          <a:prstGeom prst="roundRect">
+            <a:avLst>
+              <a:gd name="adj" fmla="val 12000"/>
+            </a:avLst>
           </a:prstGeom>
           <a:solidFill>
             <a:srgbClr val="7A3B2E"/>
@@ -6437,8 +6812,8 @@
         </p:nvSpPr>
         <p:spPr>
           <a:xfrm>
-            <a:off x="1051560" y="5440680"/>
-            <a:ext cx="10424160" cy="365760"/>
+            <a:off x="640080" y="3840480"/>
+            <a:ext cx="868680" cy="457200"/>
           </a:xfrm>
           <a:prstGeom prst="rect">
             <a:avLst/>
@@ -6450,21 +6825,21 @@
           <a:bodyPr wrap="square" rtlCol="0" anchor="ctr"/>
           <a:lstStyle/>
           <a:p>
-            <a:pPr indent="0" marL="0">
-              <a:buNone/>
-            </a:pPr>
-            <a:r>
-              <a:rPr lang="en-US" sz="1500" b="1" dirty="0">
-                <a:solidFill>
-                  <a:srgbClr val="7A3B2E"/>
+            <a:pPr algn="ctr" indent="0" marL="0">
+              <a:buNone/>
+            </a:pPr>
+            <a:r>
+              <a:rPr lang="en-US" sz="1100" b="1" dirty="0">
+                <a:solidFill>
+                  <a:srgbClr val="FFFFFF"/>
                 </a:solidFill>
                 <a:latin typeface="Calibri" pitchFamily="34" charset="0"/>
                 <a:ea typeface="Calibri" pitchFamily="34" charset="-122"/>
                 <a:cs typeface="Calibri" pitchFamily="34" charset="-120"/>
               </a:rPr>
-              <a:t>Check (AI closed)</a:t>
-            </a:r>
-            <a:endParaRPr lang="en-US" sz="1500" dirty="0"/>
+              <a:t>1:22</a:t>
+            </a:r>
+            <a:endParaRPr lang="en-US" sz="1100" dirty="0"/>
           </a:p>
         </p:txBody>
       </p:sp>
@@ -6476,17 +6851,17 @@
         </p:nvSpPr>
         <p:spPr>
           <a:xfrm>
-            <a:off x="1051560" y="5824728"/>
-            <a:ext cx="10424160" cy="731520"/>
-          </a:xfrm>
-          <a:prstGeom prst="rect">
-            <a:avLst/>
-          </a:prstGeom>
-          <a:noFill/>
-          <a:ln/>
-        </p:spPr>
-        <p:txBody>
-          <a:bodyPr wrap="square" rtlCol="0" anchor="t">
+            <a:off x="1691640" y="3822192"/>
+            <a:ext cx="9646920" cy="566928"/>
+          </a:xfrm>
+          <a:prstGeom prst="rect">
+            <a:avLst/>
+          </a:prstGeom>
+          <a:noFill/>
+          <a:ln/>
+        </p:spPr>
+        <p:txBody>
+          <a:bodyPr wrap="square" rtlCol="0" anchor="ctr">
             <a:spAutoFit/>
           </a:bodyPr>
           <a:lstStyle/>
@@ -6495,7 +6870,7 @@
               <a:buNone/>
             </a:pPr>
             <a:r>
-              <a:rPr lang="en-US" sz="1400" dirty="0">
+              <a:rPr lang="en-US" sz="1250" dirty="0">
                 <a:solidFill>
                   <a:srgbClr val="1A1A1A"/>
                 </a:solidFill>
@@ -6503,9 +6878,111 @@
                 <a:ea typeface="Calibri" pitchFamily="34" charset="-122"/>
                 <a:cs typeface="Calibri" pitchFamily="34" charset="-120"/>
               </a:rPr>
-              <a:t>Explain it: your headline finding, and what it does not show. (Competencies 3, 4.)</a:t>
-            </a:r>
-            <a:endParaRPr lang="en-US" sz="1400" dirty="0"/>
+              <a:t>Writing workshop: opening question, what you found, what it does not show, the choices you made. Distill the Data Biography into the corpus note, and close on your main chart while the draft is open: interrogate it and fix one thing.</a:t>
+            </a:r>
+            <a:endParaRPr lang="en-US" sz="1250" dirty="0"/>
+          </a:p>
+        </p:txBody>
+      </p:sp>
+      <p:sp>
+        <p:nvSpPr>
+          <p:cNvPr id="18" name="Shape 16"/>
+          <p:cNvSpPr/>
+          <p:nvPr/>
+        </p:nvSpPr>
+        <p:spPr>
+          <a:xfrm>
+            <a:off x="640080" y="4407408"/>
+            <a:ext cx="868680" cy="457200"/>
+          </a:xfrm>
+          <a:prstGeom prst="roundRect">
+            <a:avLst>
+              <a:gd name="adj" fmla="val 12000"/>
+            </a:avLst>
+          </a:prstGeom>
+          <a:solidFill>
+            <a:srgbClr val="7A3B2E"/>
+          </a:solidFill>
+          <a:ln/>
+        </p:spPr>
+      </p:sp>
+      <p:sp>
+        <p:nvSpPr>
+          <p:cNvPr id="19" name="Text 17"/>
+          <p:cNvSpPr/>
+          <p:nvPr/>
+        </p:nvSpPr>
+        <p:spPr>
+          <a:xfrm>
+            <a:off x="640080" y="4407408"/>
+            <a:ext cx="868680" cy="457200"/>
+          </a:xfrm>
+          <a:prstGeom prst="rect">
+            <a:avLst/>
+          </a:prstGeom>
+          <a:noFill/>
+          <a:ln/>
+        </p:spPr>
+        <p:txBody>
+          <a:bodyPr wrap="square" rtlCol="0" anchor="ctr"/>
+          <a:lstStyle/>
+          <a:p>
+            <a:pPr algn="ctr" indent="0" marL="0">
+              <a:buNone/>
+            </a:pPr>
+            <a:r>
+              <a:rPr lang="en-US" sz="1100" b="1" dirty="0">
+                <a:solidFill>
+                  <a:srgbClr val="FFFFFF"/>
+                </a:solidFill>
+                <a:latin typeface="Calibri" pitchFamily="34" charset="0"/>
+                <a:ea typeface="Calibri" pitchFamily="34" charset="-122"/>
+                <a:cs typeface="Calibri" pitchFamily="34" charset="-120"/>
+              </a:rPr>
+              <a:t>1:50</a:t>
+            </a:r>
+            <a:endParaRPr lang="en-US" sz="1100" dirty="0"/>
+          </a:p>
+        </p:txBody>
+      </p:sp>
+      <p:sp>
+        <p:nvSpPr>
+          <p:cNvPr id="20" name="Text 18"/>
+          <p:cNvSpPr/>
+          <p:nvPr/>
+        </p:nvSpPr>
+        <p:spPr>
+          <a:xfrm>
+            <a:off x="1691640" y="4389120"/>
+            <a:ext cx="9646920" cy="566928"/>
+          </a:xfrm>
+          <a:prstGeom prst="rect">
+            <a:avLst/>
+          </a:prstGeom>
+          <a:noFill/>
+          <a:ln/>
+        </p:spPr>
+        <p:txBody>
+          <a:bodyPr wrap="square" rtlCol="0" anchor="ctr">
+            <a:spAutoFit/>
+          </a:bodyPr>
+          <a:lstStyle/>
+          <a:p>
+            <a:pPr indent="0" marL="0">
+              <a:buNone/>
+            </a:pPr>
+            <a:r>
+              <a:rPr lang="en-US" sz="1250" dirty="0">
+                <a:solidFill>
+                  <a:srgbClr val="1A1A1A"/>
+                </a:solidFill>
+                <a:latin typeface="Calibri" pitchFamily="34" charset="0"/>
+                <a:ea typeface="Calibri" pitchFamily="34" charset="-122"/>
+                <a:cs typeface="Calibri" pitchFamily="34" charset="-120"/>
+              </a:rPr>
+              <a:t>Check and check-out.</a:t>
+            </a:r>
+            <a:endParaRPr lang="en-US" sz="1250" dirty="0"/>
           </a:p>
         </p:txBody>
       </p:sp>

--- a/slides/pptx/week-08.pptx
+++ b/slides/pptx/week-08.pptx
@@ -2638,7 +2638,7 @@
                 <a:ea typeface="Calibri" pitchFamily="34" charset="-122"/>
                 <a:cs typeface="Calibri" pitchFamily="34" charset="-120"/>
               </a:rPr>
-              <a:t>TimeCapsuleLLM and Speak, Memory; period models MonadGPT and MacBERTh</a:t>
+              <a:t>Wolfram, What Is ChatGPT Doing (opening sections), counting all the way down; TimeCapsuleLLM and Speak, Memory; period models MonadGPT and MacBERTh</a:t>
             </a:r>
             <a:endParaRPr lang="en-US" sz="1400" dirty="0"/>
           </a:p>
@@ -2738,7 +2738,7 @@
                 <a:ea typeface="Calibri" pitchFamily="34" charset="-122"/>
                 <a:cs typeface="Calibri" pitchFamily="34" charset="-120"/>
               </a:rPr>
-              <a:t>Da, The Computational Case Against Computational Literary Studies (2019), the field's sharpest critique, read against your own robustness checks</a:t>
+              <a:t>Da (2019), rereread now that the robustness checks are yours: which of her objections does your own project survive?</a:t>
             </a:r>
             <a:endParaRPr lang="en-US" sz="1400" dirty="0"/>
           </a:p>
